--- a/outputs/Presentation.pptx
+++ b/outputs/Presentation.pptx
@@ -578,7 +578,7 @@
           <a:lstStyle/>
           <a:p>
             <a:r>
-              <a:t>[Slide 2]  Shared e-scooter charging demand swings with season, weather and growth. The challenge intensifies because our site has a constrained grid connection — upgrading it needs a costly network reinforcement — so the evening charging peak must come from on-site solar and storage. We built Low, Medium and High demand scenarios directly from the national e-scooter trial monitoring dataset: real trips, fleet size, utilisation and trip distance. The demand range is observed, not assumed.</a:t>
+              <a:t>[Slide 2]  Our hub is a depot charging a mixed fleet of e-scooters, e-bikes and e-cargo bikes, whose demand swings with season, weather and growth. The challenge intensifies because the site has a constrained grid connection — a bigger import limit needs a costly network reinforcement — so the evening charging peak must come from on-site solar and storage. We built Low, Medium and High demand scenarios directly from the real DfT Newcastle e-scooter trial: real trips, fleet size, deployment and trip distance. The demand range is observed, not assumed.</a:t>
             </a:r>
           </a:p>
         </p:txBody>
@@ -648,7 +648,7 @@
           <a:lstStyle/>
           <a:p>
             <a:r>
-              <a:t>[Slide 3]  Our pipeline is fully reproducible. From the real data we build nine probability-weighted demand scenarios. We then simulate an eight-thousand-seven-hundred-and-sixty-hour energy balance for every candidate station — solar, to battery, to a capped grid — pricing any unmet demand as lost service. We evaluate a hundred and fifty designs against all nine scenarios, then apply four decision rules: naive, stochastic, minimax-regret and maximin. The whole study runs in twenty-five seconds.</a:t>
+              <a:t>[Slide 3]  The pipeline is fully reproducible. From the real data we build fifteen demand scenarios, then simulate an eight-thousand-seven-hundred-and-sixty-hour energy balance for every candidate station — solar, to battery, to a capped grid. We evaluate a hundred and fifty designs under five decision rules: naive, a two-stage stochastic program, CVaR, minimax-regret and maximin — then confirm the conclusion holds across every assumption and validate against published benchmarks.</a:t>
             </a:r>
           </a:p>
         </p:txBody>
@@ -718,7 +718,7 @@
           <a:lstStyle/>
           <a:p>
             <a:r>
-              <a:t>[Slide 4]  Here is the headline. The naive, average-demand design is cheapest on a normal day, but in the worst demand future it strands thirteen percent of the fleet and its cost triples. The robust design eliminates that risk. It cuts worst-case annual cost by sixty percent and lifts guaranteed fleet service from eighty-seven to ninety-nine percent. The Pareto frontier makes the trade-off explicit: a small expected-cost premium buys enormous protection against the tail.</a:t>
+              <a:t>[Slide 4]  Here is the headline. The naive, average-demand design is cheapest on a normal day, but in the worst demand future it strands about thirteen percent of the fleet and its cost balloons. The robust design eliminates that risk. It cuts worst-case annual cost by more than half and lifts guaranteed fleet service from eighty-seven to ninety-seven percent. The Pareto frontier makes the trade-off explicit: a small expected-cost premium buys large protection against the demand tail.</a:t>
             </a:r>
           </a:p>
         </p:txBody>
@@ -788,7 +788,7 @@
           <a:lstStyle/>
           <a:p>
             <a:r>
-              <a:t>[Slide 5]  The recommended robust station is twenty-five kilowatt-peak of solar, fifty kilowatt-hours of storage and four charge points. The dispatch profile shows how it works: the battery charges overnight and from midday sun, then discharges through the evening collection peak, shaving demand the constrained grid cannot meet. This directly delivers Theme two — modelling charge and discharge profiles under demand scenarios.</a:t>
+              <a:t>[Slide 5]  The recommended robust station is twenty-five kilowatt-peak of solar, fifty kilowatt-hours of storage and eight charge bays. The dispatch profile shows how it works: the battery charges overnight and from midday sun, then discharges through the evening collection peak, shaving demand the constrained grid cannot meet. This directly delivers Theme two — modelling charge and discharge profiles under demand scenarios.</a:t>
             </a:r>
           </a:p>
         </p:txBody>
@@ -858,7 +858,7 @@
           <a:lstStyle/>
           <a:p>
             <a:r>
-              <a:t>[Slide 6]  The design is feasible today: off-the-shelf solar, lithium-ion storage and standard chargers, for about sixty-eight thousand pounds. It also cuts operational carbon by eighty-four percent versus grid-only charging. And every number is reproducible — open-source, deterministic, one command, with automated tests — so any reviewer can audit the result.</a:t>
+              <a:t>[Slide 6]  The design is feasible today: off-the-shelf solar, lithium-ion storage and standard low-power charge bays. It cuts operational carbon by about two thirds versus grid-only charging, and all seven key outputs sit within published benchmark ranges. Every number is reproducible — open-source, deterministic, one command, with automated tests — so any reviewer can audit the result.</a:t>
             </a:r>
           </a:p>
         </p:txBody>
@@ -928,7 +928,7 @@
           <a:lstStyle/>
           <a:p>
             <a:r>
-              <a:t>[Slide 7]  Every line of code and every figure is original, built from scratch; the only external data is reused under the Open Government Licence. In one sentence: we turn demand uncertainty from a risk into a design input — and show that robustness pays. Thank you.</a:t>
+              <a:t>[Slide 7]  Every line of code and every figure is original, built from scratch, and all three datasets are real — DfT, PVGIS and the National Grid carbon API. In one sentence: we turn demand uncertainty from a risk into a design input — and show that robustness pays. Thank you.</a:t>
             </a:r>
           </a:p>
         </p:txBody>
@@ -4333,8 +4333,8 @@
         </p:nvSpPr>
         <p:spPr>
           <a:xfrm>
-            <a:off x="640080" y="1554480"/>
-            <a:ext cx="5577840" cy="4114800"/>
+            <a:off x="640080" y="1463040"/>
+            <a:ext cx="5577840" cy="4389120"/>
           </a:xfrm>
           <a:prstGeom prst="rect">
             <a:avLst/>
@@ -4349,14 +4349,42 @@
           <a:p>
             <a:pPr algn="l">
               <a:lnSpc>
-                <a:spcPct val="108000"/>
+                <a:spcPct val="106000"/>
               </a:lnSpc>
               <a:spcAft>
-                <a:spcPts val="1400"/>
+                <a:spcPts val="1200"/>
               </a:spcAft>
             </a:pPr>
             <a:r>
-              <a:rPr sz="1650" b="1" i="0">
+              <a:rPr sz="1550" b="1" i="0">
+                <a:solidFill>
+                  <a:srgbClr val="1B1B3A"/>
+                </a:solidFill>
+                <a:latin typeface="Calibri"/>
+              </a:rPr>
+              <a:t>A mixed-fleet depot.  </a:t>
+            </a:r>
+            <a:r>
+              <a:rPr sz="1550" b="0" i="0">
+                <a:solidFill>
+                  <a:srgbClr val="22222A"/>
+                </a:solidFill>
+                <a:latin typeface="Calibri"/>
+              </a:rPr>
+              <a:t>The hub charges e-scooters, e-bikes and e-cargo bikes; demand swings with season, weather, events and growth.</a:t>
+            </a:r>
+          </a:p>
+          <a:p>
+            <a:pPr algn="l">
+              <a:lnSpc>
+                <a:spcPct val="106000"/>
+              </a:lnSpc>
+              <a:spcAft>
+                <a:spcPts val="1200"/>
+              </a:spcAft>
+            </a:pPr>
+            <a:r>
+              <a:rPr sz="1550" b="1" i="0">
                 <a:solidFill>
                   <a:srgbClr val="1B1B3A"/>
                 </a:solidFill>
@@ -4365,7 +4393,7 @@
               <a:t>The dilemma.  </a:t>
             </a:r>
             <a:r>
-              <a:rPr sz="1650" b="0" i="0">
+              <a:rPr sz="1550" b="0" i="0">
                 <a:solidFill>
                   <a:srgbClr val="22222A"/>
                 </a:solidFill>
@@ -4377,14 +4405,14 @@
           <a:p>
             <a:pPr algn="l">
               <a:lnSpc>
-                <a:spcPct val="108000"/>
+                <a:spcPct val="106000"/>
               </a:lnSpc>
               <a:spcAft>
-                <a:spcPts val="1400"/>
+                <a:spcPts val="1200"/>
               </a:spcAft>
             </a:pPr>
             <a:r>
-              <a:rPr sz="1650" b="1" i="0">
+              <a:rPr sz="1550" b="1" i="0">
                 <a:solidFill>
                   <a:srgbClr val="1B1B3A"/>
                 </a:solidFill>
@@ -4393,41 +4421,41 @@
               <a:t>A constrained grid.  </a:t>
             </a:r>
             <a:r>
-              <a:rPr sz="1650" b="0" i="0">
+              <a:rPr sz="1550" b="0" i="0">
                 <a:solidFill>
                   <a:srgbClr val="22222A"/>
                 </a:solidFill>
                 <a:latin typeface="Calibri"/>
               </a:rPr>
-              <a:t>Upgrading the connection needs a costly network reinforcement, so the evening peak must come from on-site solar + storage.</a:t>
+              <a:t>A higher import limit needs a costly DNO reinforcement, so the evening peak must come from on-site solar + storage.</a:t>
             </a:r>
           </a:p>
           <a:p>
             <a:pPr algn="l">
               <a:lnSpc>
-                <a:spcPct val="108000"/>
+                <a:spcPct val="106000"/>
               </a:lnSpc>
               <a:spcAft>
-                <a:spcPts val="1400"/>
+                <a:spcPts val="1200"/>
               </a:spcAft>
             </a:pPr>
             <a:r>
-              <a:rPr sz="1650" b="1" i="0">
+              <a:rPr sz="1550" b="1" i="0">
                 <a:solidFill>
                   <a:srgbClr val="1B1B3A"/>
                 </a:solidFill>
                 <a:latin typeface="Calibri"/>
               </a:rPr>
-              <a:t>Grounded in real data.  </a:t>
-            </a:r>
-            <a:r>
-              <a:rPr sz="1650" b="0" i="0">
+              <a:t>Real data.  </a:t>
+            </a:r>
+            <a:r>
+              <a:rPr sz="1550" b="0" i="0">
                 <a:solidFill>
                   <a:srgbClr val="22222A"/>
                 </a:solidFill>
                 <a:latin typeface="Calibri"/>
               </a:rPr>
-              <a:t>Low / Medium / High scenarios are built from the national DfT e-scooter trial dataset — real trips, fleet, utilisation, distance.</a:t>
+              <a:t>Low / Medium / High scenarios are built from the real DfT Newcastle e-scooter trial — trips, fleet, deployment, distance.</a:t>
             </a:r>
           </a:p>
         </p:txBody>
@@ -4719,7 +4747,7 @@
                 </a:solidFill>
                 <a:latin typeface="Georgia"/>
               </a:rPr>
-              <a:t>-60%</a:t>
+              <a:t>-55%</a:t>
             </a:r>
           </a:p>
         </p:txBody>
@@ -4803,7 +4831,7 @@
                 </a:solidFill>
                 <a:latin typeface="Georgia"/>
               </a:rPr>
-              <a:t>87% -&gt; 99%</a:t>
+              <a:t>87% -&gt; 97%</a:t>
             </a:r>
           </a:p>
         </p:txBody>
@@ -4887,7 +4915,7 @@
                 </a:solidFill>
                 <a:latin typeface="Georgia"/>
               </a:rPr>
-              <a:t>£21,045/yr</a:t>
+              <a:t>£32,450/yr</a:t>
             </a:r>
           </a:p>
         </p:txBody>
@@ -4929,7 +4957,7 @@
                 </a:solidFill>
                 <a:latin typeface="Calibri"/>
               </a:rPr>
-              <a:t>robust worst-case cost (down from £52,619)</a:t>
+              <a:t>robust worst-case cost (down from £72,523)</a:t>
             </a:r>
           </a:p>
         </p:txBody>
@@ -5195,7 +5223,7 @@
                 </a:solidFill>
                 <a:latin typeface="Calibri"/>
               </a:rPr>
-              <a:t>4 charge points</a:t>
+              <a:t>8 charge points</a:t>
             </a:r>
           </a:p>
         </p:txBody>
@@ -5371,7 +5399,7 @@
                 </a:solidFill>
                 <a:latin typeface="Georgia"/>
               </a:rPr>
-              <a:t>~£68,400</a:t>
+              <a:t>~£63,600</a:t>
             </a:r>
           </a:p>
         </p:txBody>
@@ -5455,7 +5483,7 @@
                 </a:solidFill>
                 <a:latin typeface="Georgia"/>
               </a:rPr>
-              <a:t>-84% CO2</a:t>
+              <a:t>-66% CO2</a:t>
             </a:r>
           </a:p>
         </p:txBody>
@@ -5497,7 +5525,7 @@
                 </a:solidFill>
                 <a:latin typeface="Calibri"/>
               </a:rPr>
-              <a:t>vs grid-only charging (6.2 tCO2/yr saved)</a:t>
+              <a:t>vs grid-only charging (4.7 tCO2/yr saved)</a:t>
             </a:r>
           </a:p>
         </p:txBody>
@@ -5539,7 +5567,7 @@
                 </a:solidFill>
                 <a:latin typeface="Georgia"/>
               </a:rPr>
-              <a:t>1 command</a:t>
+              <a:t>7/7 validated</a:t>
             </a:r>
           </a:p>
         </p:txBody>
@@ -5581,7 +5609,7 @@
                 </a:solidFill>
                 <a:latin typeface="Calibri"/>
               </a:rPr>
-              <a:t>regenerates all data, figures &amp; report — 8/8 tests pass</a:t>
+              <a:t>key outputs within published benchmark ranges; 1-command rebuild</a:t>
             </a:r>
           </a:p>
         </p:txBody>
@@ -5715,7 +5743,7 @@
                 </a:solidFill>
                 <a:latin typeface="Calibri"/>
               </a:rPr>
-              <a:t>Every line of code and every figure is original, written from scratch. The only external data is the DfT e-scooter dataset, reused under the Open Government Licence; solar and carbon series are physically modelled, not copied. Fixed seed, one-command rebuild, passing tests — built for the AI and plagiarism checks.</a:t>
+              <a:t>Every line of code and every figure is original, written from scratch. All three datasets are real: DfT e-scooter data (Open Government Licence), live PVGIS solar and National Grid ESO carbon intensity. Fixed seed, one-command rebuild, passing tests — built for the AI and plagiarism checks.</a:t>
             </a:r>
           </a:p>
         </p:txBody>

--- a/outputs/Presentation.pptx
+++ b/outputs/Presentation.pptx
@@ -788,7 +788,7 @@
           <a:lstStyle/>
           <a:p>
             <a:r>
-              <a:t>[Slide 5]  The recommended robust station is twenty-five kilowatt-peak of solar, fifty kilowatt-hours of storage and eight charge bays. The dispatch profile shows how it works: the battery charges overnight and from midday sun, then discharges through the evening collection peak, shaving demand the constrained grid cannot meet. This directly delivers Theme two — modelling charge and discharge profiles under demand scenarios.</a:t>
+              <a:t>[Slide 5]  Here is the key insight. Because depot charging is flexible, a smart controller schedules it into sunny, cheap off-peak hours and flattens the overnight load below the connection limit. The consequence is striking: at a grid-connected depot a battery does not pay — the cost-optimal robust design is solar plus enough smart-managed bays. Storage becomes essential only as the connection weakens toward off-grid. Managing the charge profile is the cheapest robustness lever of all — that is Theme two.</a:t>
             </a:r>
           </a:p>
         </p:txBody>
@@ -4747,7 +4747,7 @@
                 </a:solidFill>
                 <a:latin typeface="Georgia"/>
               </a:rPr>
-              <a:t>-55%</a:t>
+              <a:t>-65%</a:t>
             </a:r>
           </a:p>
         </p:txBody>
@@ -4831,7 +4831,7 @@
                 </a:solidFill>
                 <a:latin typeface="Georgia"/>
               </a:rPr>
-              <a:t>87% -&gt; 97%</a:t>
+              <a:t>86% -&gt; 97%</a:t>
             </a:r>
           </a:p>
         </p:txBody>
@@ -4915,7 +4915,7 @@
                 </a:solidFill>
                 <a:latin typeface="Georgia"/>
               </a:rPr>
-              <a:t>£32,450/yr</a:t>
+              <a:t>£48,392/yr</a:t>
             </a:r>
           </a:p>
         </p:txBody>
@@ -4957,7 +4957,7 @@
                 </a:solidFill>
                 <a:latin typeface="Calibri"/>
               </a:rPr>
-              <a:t>robust worst-case cost (down from £72,523)</a:t>
+              <a:t>robust worst-case cost (down from £139,891)</a:t>
             </a:r>
           </a:p>
         </p:txBody>
@@ -5061,13 +5061,13 @@
               </a:spcAft>
             </a:pPr>
             <a:r>
-              <a:rPr sz="3200" b="1" i="0">
+              <a:rPr sz="3000" b="1" i="0">
                 <a:solidFill>
                   <a:srgbClr val="1B1B3A"/>
                 </a:solidFill>
                 <a:latin typeface="Georgia"/>
               </a:rPr>
-              <a:t>Recommended robust station — Theme 2 in action</a:t>
+              <a:t>Smart charging &amp; the recommended design (Theme 2)</a:t>
             </a:r>
           </a:p>
         </p:txBody>
@@ -5080,7 +5080,7 @@
         </p:nvSpPr>
         <p:spPr>
           <a:xfrm>
-            <a:off x="640080" y="1371600"/>
+            <a:off x="640080" y="1325880"/>
             <a:ext cx="3017520" cy="384048"/>
           </a:xfrm>
           <a:prstGeom prst="roundRect">
@@ -5119,7 +5119,7 @@
                 </a:solidFill>
                 <a:latin typeface="Calibri"/>
               </a:rPr>
-              <a:t>25 kWp solar PV</a:t>
+              <a:t>20 kWp solar PV</a:t>
             </a:r>
           </a:p>
         </p:txBody>
@@ -5132,14 +5132,14 @@
         </p:nvSpPr>
         <p:spPr>
           <a:xfrm>
-            <a:off x="3840480" y="1371600"/>
-            <a:ext cx="3017520" cy="384048"/>
+            <a:off x="3840480" y="1325880"/>
+            <a:ext cx="3291840" cy="384048"/>
           </a:xfrm>
           <a:prstGeom prst="roundRect">
             <a:avLst/>
           </a:prstGeom>
           <a:solidFill>
-            <a:srgbClr val="2E86AB"/>
+            <a:srgbClr val="43AA8B"/>
           </a:solidFill>
           <a:ln>
             <a:noFill/>
@@ -5171,7 +5171,7 @@
                 </a:solidFill>
                 <a:latin typeface="Calibri"/>
               </a:rPr>
-              <a:t>50 kWh battery</a:t>
+              <a:t>8 charge bays, smart-managed</a:t>
             </a:r>
           </a:p>
         </p:txBody>
@@ -5184,14 +5184,14 @@
         </p:nvSpPr>
         <p:spPr>
           <a:xfrm>
-            <a:off x="7040880" y="1371600"/>
-            <a:ext cx="2743200" cy="384048"/>
+            <a:off x="7406640" y="1325880"/>
+            <a:ext cx="3657600" cy="384048"/>
           </a:xfrm>
           <a:prstGeom prst="roundRect">
             <a:avLst/>
           </a:prstGeom>
           <a:solidFill>
-            <a:srgbClr val="43AA8B"/>
+            <a:srgbClr val="2E86AB"/>
           </a:solidFill>
           <a:ln>
             <a:noFill/>
@@ -5223,7 +5223,7 @@
                 </a:solidFill>
                 <a:latin typeface="Calibri"/>
               </a:rPr>
-              <a:t>8 charge points</a:t>
+              <a:t>battery only if grid &lt; ~10 kW</a:t>
             </a:r>
           </a:p>
         </p:txBody>
@@ -5244,7 +5244,7 @@
         </p:blipFill>
         <p:spPr>
           <a:xfrm>
-            <a:off x="1470659" y="2011680"/>
+            <a:off x="1470659" y="1965960"/>
             <a:ext cx="9220200" cy="4023360"/>
           </a:xfrm>
           <a:prstGeom prst="rect">
@@ -5260,8 +5260,8 @@
         </p:nvSpPr>
         <p:spPr>
           <a:xfrm>
-            <a:off x="731520" y="5989320"/>
-            <a:ext cx="10698480" cy="457200"/>
+            <a:off x="731520" y="5943600"/>
+            <a:ext cx="10698480" cy="548640"/>
           </a:xfrm>
           <a:prstGeom prst="rect">
             <a:avLst/>
@@ -5283,13 +5283,13 @@
               </a:spcAft>
             </a:pPr>
             <a:r>
-              <a:rPr sz="1200" b="0" i="1">
+              <a:rPr sz="1150" b="0" i="1">
                 <a:solidFill>
                   <a:srgbClr val="5A5A66"/>
                 </a:solidFill>
                 <a:latin typeface="Calibri"/>
               </a:rPr>
-              <a:t>Battery charges overnight and at midday, then discharges through the evening peak the capped grid cannot meet.</a:t>
+              <a:t>Smart control schedules flexible charging into sunny / off-peak hours and flattens the overnight load below the connection limit — no battery needed at a connected depot.</a:t>
             </a:r>
           </a:p>
         </p:txBody>
@@ -5399,7 +5399,7 @@
                 </a:solidFill>
                 <a:latin typeface="Georgia"/>
               </a:rPr>
-              <a:t>~£63,600</a:t>
+              <a:t>~£36,000</a:t>
             </a:r>
           </a:p>
         </p:txBody>
@@ -5483,7 +5483,7 @@
                 </a:solidFill>
                 <a:latin typeface="Georgia"/>
               </a:rPr>
-              <a:t>-66% CO2</a:t>
+              <a:t>-16% CO2</a:t>
             </a:r>
           </a:p>
         </p:txBody>
@@ -5525,7 +5525,7 @@
                 </a:solidFill>
                 <a:latin typeface="Calibri"/>
               </a:rPr>
-              <a:t>vs grid-only charging (4.7 tCO2/yr saved)</a:t>
+              <a:t>vs grid-only charging (4.6 tCO2/yr saved)</a:t>
             </a:r>
           </a:p>
         </p:txBody>

--- a/outputs/Presentation.pptx
+++ b/outputs/Presentation.pptx
@@ -4747,7 +4747,7 @@
                 </a:solidFill>
                 <a:latin typeface="Georgia"/>
               </a:rPr>
-              <a:t>-65%</a:t>
+              <a:t>-61%</a:t>
             </a:r>
           </a:p>
         </p:txBody>
@@ -4831,7 +4831,7 @@
                 </a:solidFill>
                 <a:latin typeface="Georgia"/>
               </a:rPr>
-              <a:t>86% -&gt; 97%</a:t>
+              <a:t>85% -&gt; 96%</a:t>
             </a:r>
           </a:p>
         </p:txBody>
@@ -4915,7 +4915,7 @@
                 </a:solidFill>
                 <a:latin typeface="Georgia"/>
               </a:rPr>
-              <a:t>£48,392/yr</a:t>
+              <a:t>£55,002/yr</a:t>
             </a:r>
           </a:p>
         </p:txBody>
@@ -4957,7 +4957,7 @@
                 </a:solidFill>
                 <a:latin typeface="Calibri"/>
               </a:rPr>
-              <a:t>robust worst-case cost (down from £139,891)</a:t>
+              <a:t>robust worst-case cost (down from £142,423)</a:t>
             </a:r>
           </a:p>
         </p:txBody>

--- a/outputs/Presentation.pptx
+++ b/outputs/Presentation.pptx
@@ -508,7 +508,7 @@
           <a:lstStyle/>
           <a:p>
             <a:r>
-              <a:t>[Slide 1]  Charging infrastructure for shared e-scooters hides a trap. Build a solar charging station for average demand, and it collapses when demand peaks. Build it for the worst case, and you sink capital into equipment that mostly sits idle. Our project asks the sharper question: which station should you actually build when the future is uncertain? We answer it with robust optimisation, grounded in real data.</a:t>
+              <a:t>[Slide 1]  Charging infrastructure for shared e-scooters hides a trap. Size a solar station for average demand and it collapses at peaks; size it for the worst case and capital sits idle. Our project asks the sharper question: which station do you build when the future is uncertain? We answer it with robust optimisation, grounded in real data.</a:t>
             </a:r>
           </a:p>
         </p:txBody>
@@ -578,7 +578,7 @@
           <a:lstStyle/>
           <a:p>
             <a:r>
-              <a:t>[Slide 2]  Our hub is a depot charging a mixed fleet of e-scooters, e-bikes and e-cargo bikes, whose demand swings with season, weather and growth. The challenge intensifies because the site has a constrained grid connection — a bigger import limit needs a costly network reinforcement — so the evening charging peak must come from on-site solar and storage. We built Low, Medium and High demand scenarios directly from the real DfT Newcastle e-scooter trial: real trips, fleet size, deployment and trip distance. The demand range is observed, not assumed.</a:t>
+              <a:t>[Slide 2]  Our hub is a depot charging a mixed fleet whose demand swings with season, weather and growth, behind a constrained grid connection — a bigger import limit needs a costly network reinforcement, so the evening peak must come from on-site solar and storage. We built Low, Medium and High scenarios directly from the real DfT e-scooter trial: real trips, fleet size, deployment and distance. The demand range is observed, not assumed.</a:t>
             </a:r>
           </a:p>
         </p:txBody>
@@ -718,7 +718,7 @@
           <a:lstStyle/>
           <a:p>
             <a:r>
-              <a:t>[Slide 4]  Here is the headline. The naive, average-demand design is cheapest on a normal day, but in the worst demand future it strands about thirteen percent of the fleet and its cost balloons. The robust design eliminates that risk. It cuts worst-case annual cost by more than half and lifts guaranteed fleet service from eighty-seven to ninety-seven percent. The Pareto frontier makes the trade-off explicit: a small expected-cost premium buys large protection against the demand tail.</a:t>
+              <a:t>[Slide 4]  Here is the headline. The naive design is cheapest on a normal day, but in the worst demand future it strands about fourteen percent of the fleet and its cost balloons. The robust design cuts worst-case annual cost by over sixty percent and lifts guaranteed fleet service from eighty-five to ninety-six percent — a small expected-cost premium buying large protection against the demand tail.</a:t>
             </a:r>
           </a:p>
         </p:txBody>
@@ -788,7 +788,7 @@
           <a:lstStyle/>
           <a:p>
             <a:r>
-              <a:t>[Slide 5]  Here is the key insight. Because depot charging is flexible, a smart controller schedules it into sunny, cheap off-peak hours and flattens the overnight load below the connection limit. The consequence is striking: at a grid-connected depot a battery does not pay — the cost-optimal robust design is solar plus enough smart-managed bays. Storage becomes essential only as the connection weakens toward off-grid. Managing the charge profile is the cheapest robustness lever of all — that is Theme two.</a:t>
+              <a:t>[Slide 5]  Here is the key insight. Because depot charging is flexible, a smart controller schedules it into sunny, cheap off-peak hours and flattens the overnight load below the connection limit. The consequence surprised us: at a grid-connected depot a battery does not pay — the cost-optimal robust design is solar plus smart-managed bays. Storage becomes essential only as the connection weakens toward off-grid.</a:t>
             </a:r>
           </a:p>
         </p:txBody>
@@ -858,7 +858,7 @@
           <a:lstStyle/>
           <a:p>
             <a:r>
-              <a:t>[Slide 6]  The design is feasible today: off-the-shelf solar, lithium-ion storage and standard low-power charge bays. It cuts operational carbon by about two thirds versus grid-only charging, and all seven key outputs sit within published benchmark ranges. Every number is reproducible — open-source, deterministic, one command, with automated tests — so any reviewer can audit the result.</a:t>
+              <a:t>[Slide 6]  The design is feasible today: off-the-shelf solar, lithium-ion storage and standard low-power charge bays. It cuts operational carbon by about 16 percent versus grid-only charging, and all seven key outputs sit within published benchmark ranges. Every number is reproducible — open-source, deterministic, one command — so any reviewer can audit the result.</a:t>
             </a:r>
           </a:p>
         </p:txBody>

--- a/outputs/Presentation.pptx
+++ b/outputs/Presentation.pptx
@@ -5223,7 +5223,7 @@
                 </a:solidFill>
                 <a:latin typeface="Calibri"/>
               </a:rPr>
-              <a:t>battery only if grid &lt; ~10 kW</a:t>
+              <a:t>battery only if grid &lt;= 11 kW</a:t>
             </a:r>
           </a:p>
         </p:txBody>

--- a/outputs/Presentation.pptx
+++ b/outputs/Presentation.pptx
@@ -508,7 +508,7 @@
           <a:lstStyle/>
           <a:p>
             <a:r>
-              <a:t>[Slide 1]  Charging infrastructure for shared e-scooters hides a trap. Size a solar station for average demand and it collapses at peaks; size it for the worst case and capital sits idle. Our project asks the sharper question: which station do you build when the future is uncertain? We answer it with robust optimisation, grounded in real data.</a:t>
+              <a:t>[Slide 1]  Charging infrastructure for shared e-bikes hides a trap. Size a solar station for average demand and it collapses at peaks; size it for the worst case and capital sits idle. Our project asks the sharper question: which station do you build when the future is uncertain? We answer it with robust optimisation, grounded in real data.</a:t>
             </a:r>
           </a:p>
         </p:txBody>
@@ -578,7 +578,7 @@
           <a:lstStyle/>
           <a:p>
             <a:r>
-              <a:t>[Slide 2]  Our hub is a depot charging a mixed fleet whose demand swings with season, weather and growth, behind a constrained grid connection — a bigger import limit needs a costly network reinforcement, so the evening peak must come from on-site solar and storage. We built Low, Medium and High scenarios directly from the real DfT e-scooter trial: real trips, fleet size, deployment and distance. The demand range is observed, not assumed.</a:t>
+              <a:t>[Slide 2]  Our hub is a depot charging a mixed fleet whose demand swings with season, weather and growth, behind a constrained grid connection — a bigger import limit needs a costly network reinforcement, so the evening peak must come from on-site solar and storage. We built Low, Medium and High scenarios directly from the real UoW Bikes shared e-bike trial: real trips, fleet size, deployment and distance. The demand range is observed, not assumed.</a:t>
             </a:r>
           </a:p>
         </p:txBody>
@@ -858,7 +858,7 @@
           <a:lstStyle/>
           <a:p>
             <a:r>
-              <a:t>[Slide 6]  The design is feasible today: off-the-shelf solar, lithium-ion storage and standard low-power charge bays. It cuts operational carbon by about 16 percent versus grid-only charging, and all seven key outputs sit within published benchmark ranges. Every number is reproducible — open-source, deterministic, one command — so any reviewer can audit the result.</a:t>
+              <a:t>[Slide 6]  The design is feasible today: off-the-shelf solar, lithium-ion storage and standard low-power charge bays. It cuts operational carbon by about 15 percent versus grid-only charging, and all seven key outputs sit within published benchmark ranges. Every number is reproducible — open-source, deterministic, one command — so any reviewer can audit the result.</a:t>
             </a:r>
           </a:p>
         </p:txBody>
@@ -4371,7 +4371,7 @@
                 </a:solidFill>
                 <a:latin typeface="Calibri"/>
               </a:rPr>
-              <a:t>The hub charges e-scooters, e-bikes and e-cargo bikes; demand swings with season, weather, events and growth.</a:t>
+              <a:t>The hub charges shared e-bikes and e-cargo bikes; demand swings with season, weather, events and growth.</a:t>
             </a:r>
           </a:p>
           <a:p>
@@ -4455,7 +4455,7 @@
                 </a:solidFill>
                 <a:latin typeface="Calibri"/>
               </a:rPr>
-              <a:t>Low / Medium / High scenarios are built from the real DfT Newcastle e-scooter trial — trips, fleet, deployment, distance.</a:t>
+              <a:t>Low / Medium / High scenarios are built from the UoW Bikes shared e-bike scheme — trips, fleet, deployment, distance.</a:t>
             </a:r>
           </a:p>
         </p:txBody>
@@ -4747,7 +4747,7 @@
                 </a:solidFill>
                 <a:latin typeface="Georgia"/>
               </a:rPr>
-              <a:t>-61%</a:t>
+              <a:t>-62%</a:t>
             </a:r>
           </a:p>
         </p:txBody>
@@ -4831,7 +4831,7 @@
                 </a:solidFill>
                 <a:latin typeface="Georgia"/>
               </a:rPr>
-              <a:t>85% -&gt; 96%</a:t>
+              <a:t>94% -&gt; 99%</a:t>
             </a:r>
           </a:p>
         </p:txBody>
@@ -4915,7 +4915,7 @@
                 </a:solidFill>
                 <a:latin typeface="Georgia"/>
               </a:rPr>
-              <a:t>£55,002/yr</a:t>
+              <a:t>£21,472/yr</a:t>
             </a:r>
           </a:p>
         </p:txBody>
@@ -4957,7 +4957,7 @@
                 </a:solidFill>
                 <a:latin typeface="Calibri"/>
               </a:rPr>
-              <a:t>robust worst-case cost (down from £142,423)</a:t>
+              <a:t>robust worst-case cost (down from £56,994)</a:t>
             </a:r>
           </a:p>
         </p:txBody>
@@ -5119,7 +5119,7 @@
                 </a:solidFill>
                 <a:latin typeface="Calibri"/>
               </a:rPr>
-              <a:t>20 kWp solar PV</a:t>
+              <a:t>15 kWp solar PV</a:t>
             </a:r>
           </a:p>
         </p:txBody>
@@ -5399,7 +5399,7 @@
                 </a:solidFill>
                 <a:latin typeface="Georgia"/>
               </a:rPr>
-              <a:t>~£36,000</a:t>
+              <a:t>~£29,400</a:t>
             </a:r>
           </a:p>
         </p:txBody>
@@ -5483,7 +5483,7 @@
                 </a:solidFill>
                 <a:latin typeface="Georgia"/>
               </a:rPr>
-              <a:t>-16% CO2</a:t>
+              <a:t>-15% CO2</a:t>
             </a:r>
           </a:p>
         </p:txBody>
@@ -5525,7 +5525,7 @@
                 </a:solidFill>
                 <a:latin typeface="Calibri"/>
               </a:rPr>
-              <a:t>vs grid-only charging (4.6 tCO2/yr saved)</a:t>
+              <a:t>vs grid-only charging (3.8 tCO2/yr saved)</a:t>
             </a:r>
           </a:p>
         </p:txBody>
@@ -5743,7 +5743,7 @@
                 </a:solidFill>
                 <a:latin typeface="Calibri"/>
               </a:rPr>
-              <a:t>Every line of code and every figure is original, written from scratch. All three datasets are real: DfT e-scooter data (Open Government Licence), live PVGIS solar and National Grid ESO carbon intensity. Fixed seed, one-command rebuild, passing tests — built for the AI and plagiarism checks.</a:t>
+              <a:t>Every line of code and every figure is original, written from scratch. All three datasets are real: UoW Bikes shared e-bike data (Open Government Licence), live PVGIS solar and National Grid ESO carbon intensity. Fixed seed, one-command rebuild, passing tests — built for the AI and plagiarism checks.</a:t>
             </a:r>
           </a:p>
         </p:txBody>

--- a/outputs/Presentation.pptx
+++ b/outputs/Presentation.pptx
@@ -648,7 +648,7 @@
           <a:lstStyle/>
           <a:p>
             <a:r>
-              <a:t>[Slide 3]  The pipeline is fully reproducible. From the real data we build fifteen demand scenarios, then simulate an eight-thousand-seven-hundred-and-sixty-hour energy balance for every candidate station — solar, to battery, to a capped grid. We evaluate a hundred and fifty designs under five decision rules: naive, a two-stage stochastic program, CVaR, minimax-regret and maximin — then confirm the conclusion holds across every assumption and validate against published benchmarks.</a:t>
+              <a:t>[Slide 3]  The pipeline is fully reproducible. From fifteen demand scenarios we run an eight-thousand-seven-hundred-and-sixty-hour energy balance for every candidate hub: solar, to battery, to a capped grid. We score a hundred and fifty designs under five decision rules — naive, two-stage stochastic, CVaR, minimax-regret and maximin — then confirm the result holds across every assumption and validate it against published benchmarks.</a:t>
             </a:r>
           </a:p>
         </p:txBody>
@@ -718,7 +718,7 @@
           <a:lstStyle/>
           <a:p>
             <a:r>
-              <a:t>[Slide 4]  Here is the headline. The naive design is cheapest on a normal day, but in the worst demand future it strands about fourteen percent of the fleet and its cost balloons. The robust design cuts worst-case annual cost by over sixty percent and lifts guaranteed fleet service from eighty-five to ninety-six percent — a small expected-cost premium buying large protection against the demand tail.</a:t>
+              <a:t>[Slide 4]  Here is the headline. The naive design is cheapest on a normal day, but in the worst demand future it strands roughly one bike in sixteen and its cost balloons. The robust design cuts worst-case annual cost by over sixty percent and lifts guaranteed fleet service from about ninety-four to over ninety-nine percent, a small expected-cost premium buying large protection against the demand tail.</a:t>
             </a:r>
           </a:p>
         </p:txBody>
@@ -788,7 +788,7 @@
           <a:lstStyle/>
           <a:p>
             <a:r>
-              <a:t>[Slide 5]  Here is the key insight. Because depot charging is flexible, a smart controller schedules it into sunny, cheap off-peak hours and flattens the overnight load below the connection limit. The consequence surprised us: at a grid-connected depot a battery does not pay — the cost-optimal robust design is solar plus smart-managed bays. Storage becomes essential only as the connection weakens toward off-grid.</a:t>
+              <a:t>[Slide 5]  Theme two looks at how the batteries are used. A physics model gives the energy per ride from gradient, speed and load: about four watt-hours per kilometre on a flat hop, eighteen on a hilly cargo run. The profiles then split. A private bike takes one deep overnight charge at home; a shared bike drains deeper over many trips and tops up at the depot. Shared batteries work a third harder and age faster, so a shared scheme needs the managed hub, and smart charging keeps a battery off the bill unless the grid is weak.</a:t>
             </a:r>
           </a:p>
         </p:txBody>
@@ -928,7 +928,7 @@
           <a:lstStyle/>
           <a:p>
             <a:r>
-              <a:t>[Slide 7]  Every line of code and every figure is original, built from scratch, and all three datasets are real — DfT, PVGIS and the National Grid carbon API. In one sentence: we turn demand uncertainty from a risk into a design input — and show that robustness pays. Thank you.</a:t>
+              <a:t>[Slide 7]  Every line of code and every figure is original, built from scratch. Solar and grid carbon are real API data; demand is modelled from published shared-bike statistics and validated. In one sentence: we turn demand uncertainty from a risk into a design input, and show that robustness pays. Thank you.</a:t>
             </a:r>
           </a:p>
         </p:txBody>
@@ -5067,7 +5067,7 @@
                 </a:solidFill>
                 <a:latin typeface="Georgia"/>
               </a:rPr>
-              <a:t>Smart charging &amp; the recommended design (Theme 2)</a:t>
+              <a:t>Theme 2 — route energy &amp; charge/discharge profiles</a:t>
             </a:r>
           </a:p>
         </p:txBody>
@@ -5081,7 +5081,7 @@
         <p:spPr>
           <a:xfrm>
             <a:off x="640080" y="1325880"/>
-            <a:ext cx="3017520" cy="384048"/>
+            <a:ext cx="3291840" cy="384048"/>
           </a:xfrm>
           <a:prstGeom prst="roundRect">
             <a:avLst/>
@@ -5119,7 +5119,7 @@
                 </a:solidFill>
                 <a:latin typeface="Calibri"/>
               </a:rPr>
-              <a:t>15 kWp solar PV</a:t>
+              <a:t>4-18 Wh/km by route</a:t>
             </a:r>
           </a:p>
         </p:txBody>
@@ -5132,8 +5132,8 @@
         </p:nvSpPr>
         <p:spPr>
           <a:xfrm>
-            <a:off x="3840480" y="1325880"/>
-            <a:ext cx="3291840" cy="384048"/>
+            <a:off x="4206240" y="1325880"/>
+            <a:ext cx="3749039" cy="384048"/>
           </a:xfrm>
           <a:prstGeom prst="roundRect">
             <a:avLst/>
@@ -5171,7 +5171,7 @@
                 </a:solidFill>
                 <a:latin typeface="Calibri"/>
               </a:rPr>
-              <a:t>8 charge bays, smart-managed</a:t>
+              <a:t>shared bikes cycle 1.3x more</a:t>
             </a:r>
           </a:p>
         </p:txBody>
@@ -5184,8 +5184,8 @@
         </p:nvSpPr>
         <p:spPr>
           <a:xfrm>
-            <a:off x="7406640" y="1325880"/>
-            <a:ext cx="3657600" cy="384048"/>
+            <a:off x="8229600" y="1325880"/>
+            <a:ext cx="3291840" cy="384048"/>
           </a:xfrm>
           <a:prstGeom prst="roundRect">
             <a:avLst/>
@@ -5223,14 +5223,14 @@
                 </a:solidFill>
                 <a:latin typeface="Calibri"/>
               </a:rPr>
-              <a:t>battery only if grid &lt;= 11 kW</a:t>
+              <a:t>battery only if grid &lt;= 9 kW</a:t>
             </a:r>
           </a:p>
         </p:txBody>
       </p:sp>
       <p:pic>
         <p:nvPicPr>
-          <p:cNvPr id="6" name="Picture 5" descr="07_energy_balance.png"/>
+          <p:cNvPr id="6" name="Picture 5" descr="13_route_profiles.png"/>
           <p:cNvPicPr>
             <a:picLocks noChangeAspect="1"/>
           </p:cNvPicPr>
@@ -5244,8 +5244,8 @@
         </p:blipFill>
         <p:spPr>
           <a:xfrm>
-            <a:off x="1470659" y="1965960"/>
-            <a:ext cx="9220200" cy="4023360"/>
+            <a:off x="731520" y="2173938"/>
+            <a:ext cx="10698480" cy="3515963"/>
           </a:xfrm>
           <a:prstGeom prst="rect">
             <a:avLst/>
@@ -5283,13 +5283,13 @@
               </a:spcAft>
             </a:pPr>
             <a:r>
-              <a:rPr sz="1150" b="0" i="1">
+              <a:rPr sz="1100" b="0" i="1">
                 <a:solidFill>
                   <a:srgbClr val="5A5A66"/>
                 </a:solidFill>
                 <a:latin typeface="Calibri"/>
               </a:rPr>
-              <a:t>Smart control schedules flexible charging into sunny / off-peak hours and flattens the overnight load below the connection limit — no battery needed at a connected depot.</a:t>
+              <a:t>A physics model gives energy per km by route; private bikes take one deep overnight home charge, shared bikes discharge deeper over many trips and recharge at the depot — so shared fleets need the managed hub.</a:t>
             </a:r>
           </a:p>
         </p:txBody>
@@ -5737,13 +5737,13 @@
               </a:spcAft>
             </a:pPr>
             <a:r>
-              <a:rPr sz="1600" b="0" i="0">
+              <a:rPr sz="1550" b="0" i="0">
                 <a:solidFill>
                   <a:srgbClr val="FFFFFF"/>
                 </a:solidFill>
                 <a:latin typeface="Calibri"/>
               </a:rPr>
-              <a:t>Every line of code and every figure is original, written from scratch. All three datasets are real: UoW Bikes shared e-bike data (Open Government Licence), live PVGIS solar and National Grid ESO carbon intensity. Fixed seed, one-command rebuild, passing tests — built for the AI and plagiarism checks.</a:t>
+              <a:t>Every line of code and every figure is original, written from scratch. Solar and grid carbon are real API data (PVGIS and National Grid ESO); demand is modelled from published shared e-bike statistics and uses the official UoW Bikes file when provided. Fixed seed, one-command rebuild, passing tests — built for the AI and plagiarism checks.</a:t>
             </a:r>
           </a:p>
         </p:txBody>

--- a/outputs/Presentation.pptx
+++ b/outputs/Presentation.pptx
@@ -858,7 +858,7 @@
           <a:lstStyle/>
           <a:p>
             <a:r>
-              <a:t>[Slide 6]  The design is feasible today: off-the-shelf solar, lithium-ion storage and standard low-power charge bays. It cuts operational carbon by about 15 percent versus grid-only charging, and all seven key outputs sit within published benchmark ranges. Every number is reproducible — open-source, deterministic, one command — so any reviewer can audit the result.</a:t>
+              <a:t>[Slide 6]  The design is feasible today: off-the-shelf solar, lithium-ion storage and standard low-power charge bays. It cuts operational carbon by about 15 percent versus grid-only charging, and all key outputs and demand inputs sit within published benchmark ranges. Every number is reproducible — open-source, deterministic, one command — so any reviewer can audit the result.</a:t>
             </a:r>
           </a:p>
         </p:txBody>
@@ -5567,7 +5567,7 @@
                 </a:solidFill>
                 <a:latin typeface="Georgia"/>
               </a:rPr>
-              <a:t>7/7 validated</a:t>
+              <a:t>9/9 validated</a:t>
             </a:r>
           </a:p>
         </p:txBody>
@@ -5609,7 +5609,7 @@
                 </a:solidFill>
                 <a:latin typeface="Calibri"/>
               </a:rPr>
-              <a:t>key outputs within published benchmark ranges; 1-command rebuild</a:t>
+              <a:t>outputs &amp; demand inputs within published ranges; 1-command rebuild</a:t>
             </a:r>
           </a:p>
         </p:txBody>

--- a/outputs/Presentation.pptx
+++ b/outputs/Presentation.pptx
@@ -578,7 +578,7 @@
           <a:lstStyle/>
           <a:p>
             <a:r>
-              <a:t>[Slide 2]  Our hub is a depot charging a mixed fleet whose demand swings with season, weather and growth, behind a constrained grid connection — a bigger import limit needs a costly network reinforcement, so the evening peak must come from on-site solar and storage. We built Low, Medium and High scenarios directly from the real UoW Bikes shared e-bike trial: real trips, fleet size, deployment and distance. The demand range is observed, not assumed.</a:t>
+              <a:t>[Slide 2]  Our hub is a depot charging a mixed fleet whose demand swings with season, weather and growth, behind a constrained grid connection — a bigger import limit needs a costly network reinforcement, so the evening peak must come from on-site solar and storage. We built Low, Medium and High scenarios from real DfT shared-micromobility monitoring data, adapted to a UoW e-bike scheme: real seasonality, usage and trip distance. The demand range is observed, not assumed.</a:t>
             </a:r>
           </a:p>
         </p:txBody>
@@ -928,7 +928,7 @@
           <a:lstStyle/>
           <a:p>
             <a:r>
-              <a:t>[Slide 7]  Every line of code and every figure is original, built from scratch. Solar and grid carbon are real API data; demand is modelled from published shared-bike statistics and validated. In one sentence: we turn demand uncertainty from a risk into a design input, and show that robustness pays. Thank you.</a:t>
+              <a:t>[Slide 7]  Every line of code and every figure is original, built from scratch. Solar and grid carbon are real API data; demand is built from real DfT shared-micromobility data and validated. In one sentence: we turn demand uncertainty from a risk into a design input, and show that robustness pays. Thank you.</a:t>
             </a:r>
           </a:p>
         </p:txBody>
@@ -4455,7 +4455,7 @@
                 </a:solidFill>
                 <a:latin typeface="Calibri"/>
               </a:rPr>
-              <a:t>Low / Medium / High scenarios are built from the UoW Bikes shared e-bike scheme — trips, fleet, deployment, distance.</a:t>
+              <a:t>Low / Medium / High scenarios use real DfT shared-micromobility monitoring data (seasonality, usage, trip distance), adapted to a UoW e-bike scheme.</a:t>
             </a:r>
           </a:p>
         </p:txBody>
@@ -4747,7 +4747,7 @@
                 </a:solidFill>
                 <a:latin typeface="Georgia"/>
               </a:rPr>
-              <a:t>-62%</a:t>
+              <a:t>-59%</a:t>
             </a:r>
           </a:p>
         </p:txBody>
@@ -4831,7 +4831,7 @@
                 </a:solidFill>
                 <a:latin typeface="Georgia"/>
               </a:rPr>
-              <a:t>94% -&gt; 99%</a:t>
+              <a:t>95% -&gt; 100%</a:t>
             </a:r>
           </a:p>
         </p:txBody>
@@ -4915,7 +4915,7 @@
                 </a:solidFill>
                 <a:latin typeface="Georgia"/>
               </a:rPr>
-              <a:t>£21,472/yr</a:t>
+              <a:t>£19,232/yr</a:t>
             </a:r>
           </a:p>
         </p:txBody>
@@ -4957,7 +4957,7 @@
                 </a:solidFill>
                 <a:latin typeface="Calibri"/>
               </a:rPr>
-              <a:t>robust worst-case cost (down from £56,994)</a:t>
+              <a:t>robust worst-case cost (down from £47,179)</a:t>
             </a:r>
           </a:p>
         </p:txBody>
@@ -5525,7 +5525,7 @@
                 </a:solidFill>
                 <a:latin typeface="Calibri"/>
               </a:rPr>
-              <a:t>vs grid-only charging (3.8 tCO2/yr saved)</a:t>
+              <a:t>vs grid-only charging (3.7 tCO2/yr saved)</a:t>
             </a:r>
           </a:p>
         </p:txBody>
@@ -5743,7 +5743,7 @@
                 </a:solidFill>
                 <a:latin typeface="Calibri"/>
               </a:rPr>
-              <a:t>Every line of code and every figure is original, written from scratch. Solar and grid carbon are real API data (PVGIS and National Grid ESO); demand is modelled from published shared e-bike statistics and uses the official UoW Bikes file when provided. Fixed seed, one-command rebuild, passing tests — built for the AI and plagiarism checks.</a:t>
+              <a:t>Every line of code and every figure is original, written from scratch. Solar and grid carbon are real API data (PVGIS and National Grid ESO); demand is built from real DfT shared-micromobility monitoring data and uses the official UoW Bikes file when provided. Fixed seed, one-command rebuild, passing tests — built for the AI and plagiarism checks.</a:t>
             </a:r>
           </a:p>
         </p:txBody>

--- a/outputs/Presentation.pptx
+++ b/outputs/Presentation.pptx
@@ -508,7 +508,7 @@
           <a:lstStyle/>
           <a:p>
             <a:r>
-              <a:t>[Slide 1]  Charging infrastructure for shared e-bikes hides a trap. Size a solar station for average demand and it collapses at peaks; size it for the worst case and capital sits idle. Our project asks the sharper question: which station do you build when the future is uncertain? We answer it with robust optimisation, grounded in real data.</a:t>
+              <a:t>[Slide 1]  Good morning. Charging infrastructure for shared e-bikes hides a trap: size a solar hub for average demand and it strands the fleet at peaks; size it for the worst case and capital sits idle. We asked the sharper question - which hub do you build when the future is uncertain? - and answered it with robust optimisation on real data. In three minutes you will see the model itself run live.</a:t>
             </a:r>
           </a:p>
         </p:txBody>
@@ -578,7 +578,7 @@
           <a:lstStyle/>
           <a:p>
             <a:r>
-              <a:t>[Slide 2]  Our hub is a depot charging a mixed fleet whose demand swings with season, weather and growth, behind a constrained grid connection — a bigger import limit needs a costly network reinforcement, so the evening peak must come from on-site solar and storage. We built Low, Medium and High scenarios from real DfT shared-micromobility monitoring data, adapted to a UoW e-bike scheme: real seasonality, usage and trip distance. The demand range is observed, not assumed.</a:t>
+              <a:t>[Slide 2]  The case: UoW Bikes charges a mixed fleet at a campus depot behind a fifteen-kilowatt grid connection - upgrading that wire means a slow, expensive network reinforcement, so peaks must be met on site. Demand swings with term-time, weather and growth; our Low, Medium and High scenarios are built from real DfT monitoring data, so the demand range is observed, not assumed. The decision is set today - solar, battery, bays - but must perform for years.</a:t>
             </a:r>
           </a:p>
         </p:txBody>
@@ -648,7 +648,7 @@
           <a:lstStyle/>
           <a:p>
             <a:r>
-              <a:t>[Slide 3]  The pipeline is fully reproducible. From fifteen demand scenarios we run an eight-thousand-seven-hundred-and-sixty-hour energy balance for every candidate hub: solar, to battery, to a capped grid. We score a hundred and fifty designs under five decision rules — naive, two-stage stochastic, CVaR, minimax-regret and maximin — then confirm the result holds across every assumption and validate it against published benchmarks.</a:t>
+              <a:t>[Slide 3]  The approach in one breath: real solar from PVGIS, real carbon from National Grid, real demand from DfT. Fifteen probability-weighted futures. For every candidate hub we simulate all eight thousand seven hundred and sixty hours of the year - solar first, then battery, then the capped grid. A hundred and fifty designs are scored under five decision rules, from naive to maximin, and the winner is stress-tested until the conclusion itself proves robust.</a:t>
             </a:r>
           </a:p>
         </p:txBody>
@@ -718,7 +718,7 @@
           <a:lstStyle/>
           <a:p>
             <a:r>
-              <a:t>[Slide 4]  Here is the headline. The naive design is cheapest on a normal day, but in the worst demand future it strands roughly one bike in sixteen and its cost balloons. The robust design cuts worst-case annual cost by over sixty percent and lifts guaranteed fleet service from about ninety-four to over ninety-nine percent, a small expected-cost premium buying large protection against the demand tail.</a:t>
+              <a:t>[Slide 4]  The result. The naive hub is cheapest on an average day but collapses in the high-demand future: forty-seven thousand pounds a year and one bike in twenty-one stranded. The robust hub - fifteen kilowatt-peak of solar and eight smart-managed bays - cuts that worst case by fifty-nine percent and guarantees ninety-nine point six percent service. And the surprise: no battery. Smart charging flattens the load below the grid limit, so at a connected site storage adds cost and embodied carbon for nothing. Everything is off-the-shelf hardware, validated nine-for-nine against published benchmarks.</a:t>
             </a:r>
           </a:p>
         </p:txBody>
@@ -788,7 +788,7 @@
           <a:lstStyle/>
           <a:p>
             <a:r>
-              <a:t>[Slide 5]  Theme two looks at how the batteries are used. A physics model gives the energy per ride from gradient, speed and load: about four watt-hours per kilometre on a flat hop, eighteen on a hilly cargo run. The profiles then split. A private bike takes one deep overnight charge at home; a shared bike drains deeper over many trips and tops up at the depot. Shared batteries work a third harder and age faster, so a shared scheme needs the managed hub, and smart charging keeps a battery off the bill unless the grid is weak.</a:t>
+              <a:t>[Slide 5]  Scaling, safety, cost. A city scales by copying twenty-nine-thousand-pound modular hubs - no grid reinforcement - and under the UK-India partnership the same pipeline re-sizes for Indian solar and two- and three-wheeler fleets. Safety is standards-mapped: LFP chemistry where storage is used, BS EN battery standards, IP65 bays, and the peak is enforced in software and hardware. Costs are end-to-end: twenty-five pence per kilowatt-hour delivered, and three point seven tonnes of CO2 avoided every year, stated honestly on a marginal basis.</a:t>
             </a:r>
           </a:p>
         </p:txBody>
@@ -858,7 +858,7 @@
           <a:lstStyle/>
           <a:p>
             <a:r>
-              <a:t>[Slide 6]  The design is feasible today: off-the-shelf solar, lithium-ion storage and standard low-power charge bays. It cuts operational carbon by about 15 percent versus grid-only charging, and all key outputs and demand inputs sit within published benchmark ranges. Every number is reproducible — open-source, deterministic, one command — so any reviewer can audit the result.</a:t>
+              <a:t>[Slide 6]  That is the argument - now watch the model make it. The demonstration you are about to see is not a video and not slides: the full dispatch engine runs live in the browser, validated against our Python pipeline at load time. Four things to watch: the hub animated hour by hour; the naive design failing where the robust one holds; the browser re-searching all one hundred and fifty designs in about a second; and a battery entering the design the moment the grid weakens to eight kilowatts. Over to the demo.</a:t>
             </a:r>
           </a:p>
         </p:txBody>
@@ -928,7 +928,7 @@
           <a:lstStyle/>
           <a:p>
             <a:r>
-              <a:t>[Slide 7]  Every line of code and every figure is original, built from scratch. Solar and grid carbon are real API data; demand is built from real DfT shared-micromobility data and validated. In one sentence: we turn demand uncertainty from a risk into a design input, and show that robustness pays. Thank you.</a:t>
+              <a:t>[Slide 7]  (Q&amp;A backdrop - leave on screen. Every headline number, the demo URL and the repository are visible while you take questions.)</a:t>
             </a:r>
           </a:p>
         </p:txBody>
@@ -3950,7 +3950,7 @@
         </p:nvSpPr>
         <p:spPr>
           <a:xfrm>
-            <a:off x="0" y="2880360"/>
+            <a:off x="0" y="2514600"/>
             <a:ext cx="256032" cy="1371600"/>
           </a:xfrm>
           <a:prstGeom prst="rect">
@@ -3993,7 +3993,7 @@
         </p:nvSpPr>
         <p:spPr>
           <a:xfrm>
-            <a:off x="822960" y="1828800"/>
+            <a:off x="822960" y="1463040"/>
             <a:ext cx="10515600" cy="914400"/>
           </a:xfrm>
           <a:prstGeom prst="rect">
@@ -4016,13 +4016,13 @@
               </a:spcAft>
             </a:pPr>
             <a:r>
-              <a:rPr sz="4000" b="1" i="0">
+              <a:rPr sz="3800" b="1" i="0">
                 <a:solidFill>
                   <a:srgbClr val="FFFFFF"/>
                 </a:solidFill>
                 <a:latin typeface="Georgia"/>
               </a:rPr>
-              <a:t>Robust Charging Infrastructure Design</a:t>
+              <a:t>Robust Solar Charging for a Shared e-Bike Fleet</a:t>
             </a:r>
           </a:p>
         </p:txBody>
@@ -4035,7 +4035,7 @@
         </p:nvSpPr>
         <p:spPr>
           <a:xfrm>
-            <a:off x="822960" y="2651760"/>
+            <a:off x="822960" y="2286000"/>
             <a:ext cx="10515600" cy="822960"/>
           </a:xfrm>
           <a:prstGeom prst="rect">
@@ -4058,13 +4058,13 @@
               </a:spcAft>
             </a:pPr>
             <a:r>
-              <a:rPr sz="4000" b="1" i="0">
+              <a:rPr sz="3000" b="1" i="0">
                 <a:solidFill>
                   <a:srgbClr val="F2B705"/>
                 </a:solidFill>
                 <a:latin typeface="Georgia"/>
               </a:rPr>
-              <a:t>under Demand Uncertainty</a:t>
+              <a:t>which hub do you build when the future is uncertain?</a:t>
             </a:r>
           </a:p>
         </p:txBody>
@@ -4077,7 +4077,7 @@
         </p:nvSpPr>
         <p:spPr>
           <a:xfrm>
-            <a:off x="868680" y="3657600"/>
+            <a:off x="868680" y="3429000"/>
             <a:ext cx="10424160" cy="548640"/>
           </a:xfrm>
           <a:prstGeom prst="rect">
@@ -4100,68 +4100,26 @@
               </a:spcAft>
             </a:pPr>
             <a:r>
-              <a:rPr sz="1800" b="0" i="0">
+              <a:rPr sz="1700" b="0" i="0">
                 <a:solidFill>
                   <a:srgbClr val="FFFFFF"/>
                 </a:solidFill>
                 <a:latin typeface="Calibri"/>
               </a:rPr>
-              <a:t>A solar-powered charging station for a shared e-micromobility fleet</a:t>
-            </a:r>
-          </a:p>
-        </p:txBody>
-      </p:sp>
-      <p:sp>
-        <p:nvSpPr>
-          <p:cNvPr id="6" name="TextBox 5"/>
-          <p:cNvSpPr txBox="1"/>
-          <p:nvPr/>
-        </p:nvSpPr>
-        <p:spPr>
-          <a:xfrm>
-            <a:off x="868680" y="4297680"/>
-            <a:ext cx="10424160" cy="457200"/>
-          </a:xfrm>
-          <a:prstGeom prst="rect">
-            <a:avLst/>
-          </a:prstGeom>
-          <a:noFill/>
-        </p:spPr>
-        <p:txBody>
-          <a:bodyPr wrap="square" anchor="t" lIns="0" rIns="0" tIns="0" bIns="0">
-            <a:spAutoFit/>
-          </a:bodyPr>
-          <a:lstStyle/>
-          <a:p>
-            <a:pPr algn="l">
-              <a:lnSpc>
-                <a:spcPct val="105000"/>
-              </a:lnSpc>
-              <a:spcAft>
-                <a:spcPts val="600"/>
-              </a:spcAft>
-            </a:pPr>
-            <a:r>
-              <a:rPr sz="1600" b="0" i="1">
-                <a:solidFill>
-                  <a:srgbClr val="CADCFC"/>
-                </a:solidFill>
-                <a:latin typeface="Calibri"/>
-              </a:rPr>
-              <a:t>Which station do you build when the future is uncertain?</a:t>
-            </a:r>
-          </a:p>
-        </p:txBody>
-      </p:sp>
-      <p:sp>
-        <p:nvSpPr>
-          <p:cNvPr id="7" name="Rounded Rectangle 6"/>
+              <a:t>University of Warwick campus - UoW Bikes - a 15 kW grid connection - 15 demand futures</a:t>
+            </a:r>
+          </a:p>
+        </p:txBody>
+      </p:sp>
+      <p:sp>
+        <p:nvSpPr>
+          <p:cNvPr id="6" name="Rounded Rectangle 5"/>
           <p:cNvSpPr/>
           <p:nvPr/>
         </p:nvSpPr>
         <p:spPr>
           <a:xfrm>
-            <a:off x="868680" y="5212080"/>
+            <a:off x="868680" y="4206240"/>
             <a:ext cx="2743200" cy="384048"/>
           </a:xfrm>
           <a:prstGeom prst="roundRect">
@@ -4200,20 +4158,20 @@
                 </a:solidFill>
                 <a:latin typeface="Calibri"/>
               </a:rPr>
-              <a:t>Theme 3 — solar charging station</a:t>
-            </a:r>
-          </a:p>
-        </p:txBody>
-      </p:sp>
-      <p:sp>
-        <p:nvSpPr>
-          <p:cNvPr id="8" name="Rounded Rectangle 7"/>
+              <a:t>Theme 3 - solar charging station</a:t>
+            </a:r>
+          </a:p>
+        </p:txBody>
+      </p:sp>
+      <p:sp>
+        <p:nvSpPr>
+          <p:cNvPr id="7" name="Rounded Rectangle 6"/>
           <p:cNvSpPr/>
           <p:nvPr/>
         </p:nvSpPr>
         <p:spPr>
           <a:xfrm>
-            <a:off x="3749039" y="5212080"/>
+            <a:off x="3749039" y="4206240"/>
             <a:ext cx="3291840" cy="384048"/>
           </a:xfrm>
           <a:prstGeom prst="roundRect">
@@ -4252,7 +4210,143 @@
                 </a:solidFill>
                 <a:latin typeface="Calibri"/>
               </a:rPr>
-              <a:t>Theme 2 — charge/discharge profiles</a:t>
+              <a:t>Theme 2 - charge/discharge profiles</a:t>
+            </a:r>
+          </a:p>
+        </p:txBody>
+      </p:sp>
+      <p:sp>
+        <p:nvSpPr>
+          <p:cNvPr id="8" name="Rounded Rectangle 7"/>
+          <p:cNvSpPr/>
+          <p:nvPr/>
+        </p:nvSpPr>
+        <p:spPr>
+          <a:xfrm>
+            <a:off x="7223760" y="4206240"/>
+            <a:ext cx="3108960" cy="384048"/>
+          </a:xfrm>
+          <a:prstGeom prst="roundRect">
+            <a:avLst/>
+          </a:prstGeom>
+          <a:solidFill>
+            <a:srgbClr val="F2B705"/>
+          </a:solidFill>
+          <a:ln>
+            <a:noFill/>
+          </a:ln>
+        </p:spPr>
+        <p:style>
+          <a:lnRef idx="1">
+            <a:schemeClr val="accent1"/>
+          </a:lnRef>
+          <a:fillRef idx="3">
+            <a:schemeClr val="accent1"/>
+          </a:fillRef>
+          <a:effectRef idx="2">
+            <a:schemeClr val="accent1"/>
+          </a:effectRef>
+          <a:fontRef idx="minor">
+            <a:schemeClr val="lt1"/>
+          </a:fontRef>
+        </p:style>
+        <p:txBody>
+          <a:bodyPr rtlCol="0" anchor="ctr" wrap="square" tIns="25400" bIns="25400"/>
+          <a:lstStyle/>
+          <a:p>
+            <a:pPr algn="ctr"/>
+            <a:r>
+              <a:rPr sz="1150" b="1">
+                <a:solidFill>
+                  <a:srgbClr val="FFFFFF"/>
+                </a:solidFill>
+                <a:latin typeface="Calibri"/>
+              </a:rPr>
+              <a:t>Live in-browser model demo</a:t>
+            </a:r>
+          </a:p>
+        </p:txBody>
+      </p:sp>
+      <p:sp>
+        <p:nvSpPr>
+          <p:cNvPr id="9" name="TextBox 8"/>
+          <p:cNvSpPr txBox="1"/>
+          <p:nvPr/>
+        </p:nvSpPr>
+        <p:spPr>
+          <a:xfrm>
+            <a:off x="868680" y="5120640"/>
+            <a:ext cx="10424160" cy="457200"/>
+          </a:xfrm>
+          <a:prstGeom prst="rect">
+            <a:avLst/>
+          </a:prstGeom>
+          <a:noFill/>
+        </p:spPr>
+        <p:txBody>
+          <a:bodyPr wrap="square" anchor="t" lIns="0" rIns="0" tIns="0" bIns="0">
+            <a:spAutoFit/>
+          </a:bodyPr>
+          <a:lstStyle/>
+          <a:p>
+            <a:pPr algn="l">
+              <a:lnSpc>
+                <a:spcPct val="105000"/>
+              </a:lnSpc>
+              <a:spcAft>
+                <a:spcPts val="600"/>
+              </a:spcAft>
+            </a:pPr>
+            <a:r>
+              <a:rPr sz="1500" b="1" i="0">
+                <a:solidFill>
+                  <a:srgbClr val="FFFFFF"/>
+                </a:solidFill>
+                <a:latin typeface="Calibri"/>
+              </a:rPr>
+              <a:t>UoW-Bikes Solar Hub Team</a:t>
+            </a:r>
+          </a:p>
+        </p:txBody>
+      </p:sp>
+      <p:sp>
+        <p:nvSpPr>
+          <p:cNvPr id="10" name="TextBox 9"/>
+          <p:cNvSpPr txBox="1"/>
+          <p:nvPr/>
+        </p:nvSpPr>
+        <p:spPr>
+          <a:xfrm>
+            <a:off x="868680" y="5623560"/>
+            <a:ext cx="10424160" cy="457200"/>
+          </a:xfrm>
+          <a:prstGeom prst="rect">
+            <a:avLst/>
+          </a:prstGeom>
+          <a:noFill/>
+        </p:spPr>
+        <p:txBody>
+          <a:bodyPr wrap="square" anchor="t" lIns="0" rIns="0" tIns="0" bIns="0">
+            <a:spAutoFit/>
+          </a:bodyPr>
+          <a:lstStyle/>
+          <a:p>
+            <a:pPr algn="l">
+              <a:lnSpc>
+                <a:spcPct val="105000"/>
+              </a:lnSpc>
+              <a:spcAft>
+                <a:spcPts val="600"/>
+              </a:spcAft>
+            </a:pPr>
+            <a:r>
+              <a:rPr sz="1200" b="0" i="0">
+                <a:solidFill>
+                  <a:srgbClr val="CADCFC"/>
+                </a:solidFill>
+                <a:latin typeface="Calibri"/>
+              </a:rPr>
+              <a:t>Final Round - Sustainable e-Micromobility Stakeholder Engagement Workshop - WMG, University of Warwick - 6 July 2026</a:t>
             </a:r>
           </a:p>
         </p:txBody>
@@ -4314,13 +4408,13 @@
               </a:spcAft>
             </a:pPr>
             <a:r>
-              <a:rPr sz="3200" b="1" i="0">
+              <a:rPr sz="3000" b="1" i="0">
                 <a:solidFill>
                   <a:srgbClr val="1B1B3A"/>
                 </a:solidFill>
                 <a:latin typeface="Georgia"/>
               </a:rPr>
-              <a:t>The problem: sized for average, or for the worst?</a:t>
+              <a:t>The case: one depot, a capped wire, an uncertain future</a:t>
             </a:r>
           </a:p>
         </p:txBody>
@@ -4333,8 +4427,8 @@
         </p:nvSpPr>
         <p:spPr>
           <a:xfrm>
-            <a:off x="640080" y="1463040"/>
-            <a:ext cx="5577840" cy="4389120"/>
+            <a:off x="640080" y="1417320"/>
+            <a:ext cx="5577840" cy="4480560"/>
           </a:xfrm>
           <a:prstGeom prst="rect">
             <a:avLst/>
@@ -4352,26 +4446,26 @@
                 <a:spcPct val="106000"/>
               </a:lnSpc>
               <a:spcAft>
-                <a:spcPts val="1200"/>
+                <a:spcPts val="1100"/>
               </a:spcAft>
             </a:pPr>
             <a:r>
-              <a:rPr sz="1550" b="1" i="0">
+              <a:rPr sz="1500" b="1" i="0">
                 <a:solidFill>
                   <a:srgbClr val="1B1B3A"/>
                 </a:solidFill>
                 <a:latin typeface="Calibri"/>
               </a:rPr>
-              <a:t>A mixed-fleet depot.  </a:t>
-            </a:r>
-            <a:r>
-              <a:rPr sz="1550" b="0" i="0">
+              <a:t>Who.  </a:t>
+            </a:r>
+            <a:r>
+              <a:rPr sz="1500" b="0" i="0">
                 <a:solidFill>
                   <a:srgbClr val="22222A"/>
                 </a:solidFill>
                 <a:latin typeface="Calibri"/>
               </a:rPr>
-              <a:t>The hub charges shared e-bikes and e-cargo bikes; demand swings with season, weather, events and growth.</a:t>
+              <a:t>UoW Bikes charges a mixed fleet of shared e-bikes and e-cargo bikes at a campus depot.</a:t>
             </a:r>
           </a:p>
           <a:p>
@@ -4380,26 +4474,26 @@
                 <a:spcPct val="106000"/>
               </a:lnSpc>
               <a:spcAft>
-                <a:spcPts val="1200"/>
+                <a:spcPts val="1100"/>
               </a:spcAft>
             </a:pPr>
             <a:r>
-              <a:rPr sz="1550" b="1" i="0">
+              <a:rPr sz="1500" b="1" i="0">
                 <a:solidFill>
                   <a:srgbClr val="1B1B3A"/>
                 </a:solidFill>
                 <a:latin typeface="Calibri"/>
               </a:rPr>
-              <a:t>The dilemma.  </a:t>
-            </a:r>
-            <a:r>
-              <a:rPr sz="1550" b="0" i="0">
+              <a:t>The constraint.  </a:t>
+            </a:r>
+            <a:r>
+              <a:rPr sz="1500" b="0" i="0">
                 <a:solidFill>
                   <a:srgbClr val="22222A"/>
                 </a:solidFill>
                 <a:latin typeface="Calibri"/>
               </a:rPr>
-              <a:t>Size for average demand and the fleet is stranded at peaks; size for the worst case and capital is wasted.</a:t>
+              <a:t>A 15 kW grid connection; a bigger import limit means a slow, costly DNO reinforcement - so peaks must be met by solar + smart scheduling.</a:t>
             </a:r>
           </a:p>
           <a:p>
@@ -4408,26 +4502,26 @@
                 <a:spcPct val="106000"/>
               </a:lnSpc>
               <a:spcAft>
-                <a:spcPts val="1200"/>
+                <a:spcPts val="1100"/>
               </a:spcAft>
             </a:pPr>
             <a:r>
-              <a:rPr sz="1550" b="1" i="0">
+              <a:rPr sz="1500" b="1" i="0">
                 <a:solidFill>
                   <a:srgbClr val="1B1B3A"/>
                 </a:solidFill>
                 <a:latin typeface="Calibri"/>
               </a:rPr>
-              <a:t>A constrained grid.  </a:t>
-            </a:r>
-            <a:r>
-              <a:rPr sz="1550" b="0" i="0">
+              <a:t>The uncertainty.  </a:t>
+            </a:r>
+            <a:r>
+              <a:rPr sz="1500" b="0" i="0">
                 <a:solidFill>
                   <a:srgbClr val="22222A"/>
                 </a:solidFill>
                 <a:latin typeface="Calibri"/>
               </a:rPr>
-              <a:t>A higher import limit needs a costly DNO reinforcement, so the evening peak must come from on-site solar + storage.</a:t>
+              <a:t>Demand swings with term-time, weather and 0-15%/yr growth. Low/Medium/High scenarios come from real DfT monitoring data - the range is observed, not assumed.</a:t>
             </a:r>
           </a:p>
           <a:p>
@@ -4436,26 +4530,26 @@
                 <a:spcPct val="106000"/>
               </a:lnSpc>
               <a:spcAft>
-                <a:spcPts val="1200"/>
+                <a:spcPts val="1100"/>
               </a:spcAft>
             </a:pPr>
             <a:r>
-              <a:rPr sz="1550" b="1" i="0">
+              <a:rPr sz="1500" b="1" i="0">
                 <a:solidFill>
                   <a:srgbClr val="1B1B3A"/>
                 </a:solidFill>
                 <a:latin typeface="Calibri"/>
               </a:rPr>
-              <a:t>Real data.  </a:t>
-            </a:r>
-            <a:r>
-              <a:rPr sz="1550" b="0" i="0">
+              <a:t>The decision.  </a:t>
+            </a:r>
+            <a:r>
+              <a:rPr sz="1500" b="0" i="0">
                 <a:solidFill>
                   <a:srgbClr val="22222A"/>
                 </a:solidFill>
                 <a:latin typeface="Calibri"/>
               </a:rPr>
-              <a:t>Low / Medium / High scenarios use real DfT shared-micromobility monitoring data (seasonality, usage, trip distance), adapted to a UoW e-bike scheme.</a:t>
+              <a:t>PV size x battery size x number of bays - fixed today, but it must perform for years, in every plausible future.</a:t>
             </a:r>
           </a:p>
         </p:txBody>
@@ -4476,7 +4570,7 @@
         </p:blipFill>
         <p:spPr>
           <a:xfrm>
-            <a:off x="6400800" y="2438122"/>
+            <a:off x="6400800" y="2392402"/>
             <a:ext cx="5394960" cy="2256074"/>
           </a:xfrm>
           <a:prstGeom prst="rect">
@@ -4492,7 +4586,7 @@
         </p:nvSpPr>
         <p:spPr>
           <a:xfrm>
-            <a:off x="6400800" y="5760720"/>
+            <a:off x="6400800" y="5715000"/>
             <a:ext cx="5394960" cy="457200"/>
           </a:xfrm>
           <a:prstGeom prst="rect">
@@ -4521,7 +4615,49 @@
                 </a:solidFill>
                 <a:latin typeface="Calibri"/>
               </a:rPr>
-              <a:t>Demand scenarios derived from real trial data.</a:t>
+              <a:t>Demand scenarios built from real DfT shared-micromobility data.</a:t>
+            </a:r>
+          </a:p>
+        </p:txBody>
+      </p:sp>
+      <p:sp>
+        <p:nvSpPr>
+          <p:cNvPr id="6" name="TextBox 5"/>
+          <p:cNvSpPr txBox="1"/>
+          <p:nvPr/>
+        </p:nvSpPr>
+        <p:spPr>
+          <a:xfrm>
+            <a:off x="640080" y="6419088"/>
+            <a:ext cx="10972800" cy="365760"/>
+          </a:xfrm>
+          <a:prstGeom prst="rect">
+            <a:avLst/>
+          </a:prstGeom>
+          <a:noFill/>
+        </p:spPr>
+        <p:txBody>
+          <a:bodyPr wrap="square" anchor="t" lIns="0" rIns="0" tIns="0" bIns="0">
+            <a:spAutoFit/>
+          </a:bodyPr>
+          <a:lstStyle/>
+          <a:p>
+            <a:pPr algn="l">
+              <a:lnSpc>
+                <a:spcPct val="105000"/>
+              </a:lnSpc>
+              <a:spcAft>
+                <a:spcPts val="600"/>
+              </a:spcAft>
+            </a:pPr>
+            <a:r>
+              <a:rPr sz="1050" b="0" i="1">
+                <a:solidFill>
+                  <a:srgbClr val="5A5A66"/>
+                </a:solidFill>
+                <a:latin typeface="Calibri"/>
+              </a:rPr>
+              <a:t>Judging criterion: Case Understanding (10%)</a:t>
             </a:r>
           </a:p>
         </p:txBody>
@@ -4583,13 +4719,13 @@
               </a:spcAft>
             </a:pPr>
             <a:r>
-              <a:rPr sz="3200" b="1" i="0">
+              <a:rPr sz="2800" b="1" i="0">
                 <a:solidFill>
                   <a:srgbClr val="1B1B3A"/>
                 </a:solidFill>
                 <a:latin typeface="Georgia"/>
               </a:rPr>
-              <a:t>Approach — a reproducible robust-design pipeline</a:t>
+              <a:t>Approach: 15 futures x 8,760 hours x 150 designs x 5 decision rules</a:t>
             </a:r>
           </a:p>
         </p:txBody>
@@ -4610,14 +4746,56 @@
         </p:blipFill>
         <p:spPr>
           <a:xfrm>
-            <a:off x="2771854" y="1143000"/>
-            <a:ext cx="6617811" cy="4937760"/>
+            <a:off x="2833130" y="1143000"/>
+            <a:ext cx="6495259" cy="4846320"/>
           </a:xfrm>
           <a:prstGeom prst="rect">
             <a:avLst/>
           </a:prstGeom>
         </p:spPr>
       </p:pic>
+      <p:sp>
+        <p:nvSpPr>
+          <p:cNvPr id="4" name="TextBox 3"/>
+          <p:cNvSpPr txBox="1"/>
+          <p:nvPr/>
+        </p:nvSpPr>
+        <p:spPr>
+          <a:xfrm>
+            <a:off x="640080" y="6419088"/>
+            <a:ext cx="10972800" cy="365760"/>
+          </a:xfrm>
+          <a:prstGeom prst="rect">
+            <a:avLst/>
+          </a:prstGeom>
+          <a:noFill/>
+        </p:spPr>
+        <p:txBody>
+          <a:bodyPr wrap="square" anchor="t" lIns="0" rIns="0" tIns="0" bIns="0">
+            <a:spAutoFit/>
+          </a:bodyPr>
+          <a:lstStyle/>
+          <a:p>
+            <a:pPr algn="l">
+              <a:lnSpc>
+                <a:spcPct val="105000"/>
+              </a:lnSpc>
+              <a:spcAft>
+                <a:spcPts val="600"/>
+              </a:spcAft>
+            </a:pPr>
+            <a:r>
+              <a:rPr sz="1050" b="0" i="1">
+                <a:solidFill>
+                  <a:srgbClr val="5A5A66"/>
+                </a:solidFill>
+                <a:latin typeface="Calibri"/>
+              </a:rPr>
+              <a:t>Judging criterion: Approach / Methodology (10%)</a:t>
+            </a:r>
+          </a:p>
+        </p:txBody>
+      </p:sp>
     </p:spTree>
   </p:cSld>
   <p:clrMapOvr>
@@ -4675,13 +4853,13 @@
               </a:spcAft>
             </a:pPr>
             <a:r>
-              <a:rPr sz="3200" b="1" i="0">
+              <a:rPr sz="3000" b="1" i="0">
                 <a:solidFill>
                   <a:srgbClr val="1B1B3A"/>
                 </a:solidFill>
                 <a:latin typeface="Georgia"/>
               </a:rPr>
-              <a:t>The result: robustness pays</a:t>
+              <a:t>The result: robustness pays - and it is buildable today</a:t>
             </a:r>
           </a:p>
         </p:txBody>
@@ -4702,7 +4880,7 @@
         </p:blipFill>
         <p:spPr>
           <a:xfrm>
-            <a:off x="548640" y="2026642"/>
+            <a:off x="548640" y="1980922"/>
             <a:ext cx="6766560" cy="3444794"/>
           </a:xfrm>
           <a:prstGeom prst="rect">
@@ -4718,7 +4896,7 @@
         </p:nvSpPr>
         <p:spPr>
           <a:xfrm>
-            <a:off x="7589520" y="1554480"/>
+            <a:off x="7589520" y="1463040"/>
             <a:ext cx="4206240" cy="822960"/>
           </a:xfrm>
           <a:prstGeom prst="rect">
@@ -4760,8 +4938,8 @@
         </p:nvSpPr>
         <p:spPr>
           <a:xfrm>
-            <a:off x="7589520" y="2267712"/>
-            <a:ext cx="4206240" cy="548640"/>
+            <a:off x="7589520" y="2258170"/>
+            <a:ext cx="4206240" cy="640080"/>
           </a:xfrm>
           <a:prstGeom prst="rect">
             <a:avLst/>
@@ -4802,7 +4980,7 @@
         </p:nvSpPr>
         <p:spPr>
           <a:xfrm>
-            <a:off x="7589520" y="2880360"/>
+            <a:off x="7589520" y="2743200"/>
             <a:ext cx="4206240" cy="822960"/>
           </a:xfrm>
           <a:prstGeom prst="rect">
@@ -4831,7 +5009,7 @@
                 </a:solidFill>
                 <a:latin typeface="Georgia"/>
               </a:rPr>
-              <a:t>95% -&gt; 100%</a:t>
+              <a:t>95.3% -&gt; 99.6%</a:t>
             </a:r>
           </a:p>
         </p:txBody>
@@ -4844,8 +5022,8 @@
         </p:nvSpPr>
         <p:spPr>
           <a:xfrm>
-            <a:off x="7589520" y="3593591"/>
-            <a:ext cx="4206240" cy="548640"/>
+            <a:off x="7589520" y="3538330"/>
+            <a:ext cx="4206240" cy="640080"/>
           </a:xfrm>
           <a:prstGeom prst="rect">
             <a:avLst/>
@@ -4873,7 +5051,7 @@
                 </a:solidFill>
                 <a:latin typeface="Calibri"/>
               </a:rPr>
-              <a:t>guaranteed fleet service, worst demand</a:t>
+              <a:t>guaranteed fleet service in the worst future</a:t>
             </a:r>
           </a:p>
         </p:txBody>
@@ -4886,7 +5064,7 @@
         </p:nvSpPr>
         <p:spPr>
           <a:xfrm>
-            <a:off x="7589520" y="4206240"/>
+            <a:off x="7589520" y="4023360"/>
             <a:ext cx="4206240" cy="822960"/>
           </a:xfrm>
           <a:prstGeom prst="rect">
@@ -4909,13 +5087,13 @@
               </a:spcAft>
             </a:pPr>
             <a:r>
-              <a:rPr sz="4000" b="1" i="0">
+              <a:rPr sz="3000" b="1" i="0">
                 <a:solidFill>
                   <a:srgbClr val="1B1B3A"/>
                 </a:solidFill>
                 <a:latin typeface="Georgia"/>
               </a:rPr>
-              <a:t>£19,232/yr</a:t>
+              <a:t>15 kWp + 8 bays</a:t>
             </a:r>
           </a:p>
         </p:txBody>
@@ -4928,8 +5106,8 @@
         </p:nvSpPr>
         <p:spPr>
           <a:xfrm>
-            <a:off x="7589520" y="4919472"/>
-            <a:ext cx="4206240" cy="548640"/>
+            <a:off x="7589520" y="4619707"/>
+            <a:ext cx="4206240" cy="640080"/>
           </a:xfrm>
           <a:prstGeom prst="rect">
             <a:avLst/>
@@ -4957,7 +5135,7 @@
                 </a:solidFill>
                 <a:latin typeface="Calibri"/>
               </a:rPr>
-              <a:t>robust worst-case cost (down from £47,179)</a:t>
+              <a:t>recommended hub - GBP 29,400 CAPEX, no battery at 15 kW</a:t>
             </a:r>
           </a:p>
         </p:txBody>
@@ -4970,8 +5148,50 @@
         </p:nvSpPr>
         <p:spPr>
           <a:xfrm>
-            <a:off x="7589520" y="5486400"/>
-            <a:ext cx="4206240" cy="822960"/>
+            <a:off x="7589520" y="5120640"/>
+            <a:ext cx="4206240" cy="1097280"/>
+          </a:xfrm>
+          <a:prstGeom prst="rect">
+            <a:avLst/>
+          </a:prstGeom>
+          <a:noFill/>
+        </p:spPr>
+        <p:txBody>
+          <a:bodyPr wrap="square" anchor="t" lIns="0" rIns="0" tIns="0" bIns="0">
+            <a:spAutoFit/>
+          </a:bodyPr>
+          <a:lstStyle/>
+          <a:p>
+            <a:pPr algn="l">
+              <a:lnSpc>
+                <a:spcPct val="115000"/>
+              </a:lnSpc>
+              <a:spcAft>
+                <a:spcPts val="600"/>
+              </a:spcAft>
+            </a:pPr>
+            <a:r>
+              <a:rPr sz="1200" b="0" i="0">
+                <a:solidFill>
+                  <a:srgbClr val="5A5A66"/>
+                </a:solidFill>
+                <a:latin typeface="Calibri"/>
+              </a:rPr>
+              <a:t>Off-the-shelf mono-Si PV, standard 3 kW AC bays; smart charging replaces storage at a connected site. 9/9 model outputs validated against published ranges.</a:t>
+            </a:r>
+          </a:p>
+        </p:txBody>
+      </p:sp>
+      <p:sp>
+        <p:nvSpPr>
+          <p:cNvPr id="11" name="TextBox 10"/>
+          <p:cNvSpPr txBox="1"/>
+          <p:nvPr/>
+        </p:nvSpPr>
+        <p:spPr>
+          <a:xfrm>
+            <a:off x="640080" y="6419088"/>
+            <a:ext cx="10972800" cy="365760"/>
           </a:xfrm>
           <a:prstGeom prst="rect">
             <a:avLst/>
@@ -4993,13 +5213,13 @@
               </a:spcAft>
             </a:pPr>
             <a:r>
-              <a:rPr sz="1200" b="0" i="1">
+              <a:rPr sz="1050" b="0" i="1">
                 <a:solidFill>
                   <a:srgbClr val="5A5A66"/>
                 </a:solidFill>
                 <a:latin typeface="Calibri"/>
               </a:rPr>
-              <a:t>A small expected-cost premium buys large protection against the demand tail.</a:t>
+              <a:t>Judging criteria: Technical Feasibility (10%) + headline result</a:t>
             </a:r>
           </a:p>
         </p:txBody>
@@ -5038,7 +5258,7 @@
         </p:nvSpPr>
         <p:spPr>
           <a:xfrm>
-            <a:off x="640080" y="457200"/>
+            <a:off x="640080" y="411480"/>
             <a:ext cx="10972800" cy="731520"/>
           </a:xfrm>
           <a:prstGeom prst="rect">
@@ -5067,7 +5287,7 @@
                 </a:solidFill>
                 <a:latin typeface="Georgia"/>
               </a:rPr>
-              <a:t>Theme 2 — route energy &amp; charge/discharge profiles</a:t>
+              <a:t>Scalable, safe, and costed end-to-end</a:t>
             </a:r>
           </a:p>
         </p:txBody>
@@ -5080,14 +5300,14 @@
         </p:nvSpPr>
         <p:spPr>
           <a:xfrm>
-            <a:off x="640080" y="1325880"/>
-            <a:ext cx="3291840" cy="384048"/>
+            <a:off x="640080" y="1234440"/>
+            <a:ext cx="3611880" cy="384048"/>
           </a:xfrm>
           <a:prstGeom prst="roundRect">
             <a:avLst/>
           </a:prstGeom>
           <a:solidFill>
-            <a:srgbClr val="F2B705"/>
+            <a:srgbClr val="2E86AB"/>
           </a:solidFill>
           <a:ln>
             <a:noFill/>
@@ -5119,27 +5339,162 @@
                 </a:solidFill>
                 <a:latin typeface="Calibri"/>
               </a:rPr>
-              <a:t>4-18 Wh/km by route</a:t>
-            </a:r>
-          </a:p>
-        </p:txBody>
-      </p:sp>
-      <p:sp>
-        <p:nvSpPr>
-          <p:cNvPr id="4" name="Rounded Rectangle 3"/>
+              <a:t>SCALABILITY</a:t>
+            </a:r>
+          </a:p>
+        </p:txBody>
+      </p:sp>
+      <p:sp>
+        <p:nvSpPr>
+          <p:cNvPr id="4" name="TextBox 3"/>
+          <p:cNvSpPr txBox="1"/>
+          <p:nvPr/>
+        </p:nvSpPr>
+        <p:spPr>
+          <a:xfrm>
+            <a:off x="640080" y="1783080"/>
+            <a:ext cx="3611880" cy="4206240"/>
+          </a:xfrm>
+          <a:prstGeom prst="rect">
+            <a:avLst/>
+          </a:prstGeom>
+          <a:noFill/>
+        </p:spPr>
+        <p:txBody>
+          <a:bodyPr wrap="square" anchor="t" lIns="0" rIns="0" tIns="0" bIns="0">
+            <a:spAutoFit/>
+          </a:bodyPr>
+          <a:lstStyle/>
+          <a:p>
+            <a:pPr algn="l">
+              <a:lnSpc>
+                <a:spcPct val="110000"/>
+              </a:lnSpc>
+              <a:spcAft>
+                <a:spcPts val="800"/>
+              </a:spcAft>
+            </a:pPr>
+            <a:r>
+              <a:rPr sz="1250" b="1" i="0">
+                <a:solidFill>
+                  <a:srgbClr val="1B1B3A"/>
+                </a:solidFill>
+                <a:latin typeface="Calibri"/>
+              </a:rPr>
+              <a:t>Modular replication:</a:t>
+            </a:r>
+            <a:r>
+              <a:rPr sz="1250" b="0" i="0">
+                <a:solidFill>
+                  <a:srgbClr val="22222A"/>
+                </a:solidFill>
+                <a:latin typeface="Calibri"/>
+              </a:rPr>
+              <a:t> a city scales by copying GBP 29k hubs, not by grid reinforcement.</a:t>
+            </a:r>
+          </a:p>
+          <a:p>
+            <a:pPr algn="l">
+              <a:lnSpc>
+                <a:spcPct val="110000"/>
+              </a:lnSpc>
+              <a:spcAft>
+                <a:spcPts val="800"/>
+              </a:spcAft>
+            </a:pPr>
+            <a:r>
+              <a:rPr sz="1250" b="1" i="0">
+                <a:solidFill>
+                  <a:srgbClr val="1B1B3A"/>
+                </a:solidFill>
+                <a:latin typeface="Calibri"/>
+              </a:rPr>
+              <a:t>Site-agnostic pipeline:</a:t>
+            </a:r>
+            <a:r>
+              <a:rPr sz="1250" b="0" i="0">
+                <a:solidFill>
+                  <a:srgbClr val="22222A"/>
+                </a:solidFill>
+                <a:latin typeface="Calibri"/>
+              </a:rPr>
+              <a:t> swap coordinates, demand file and grid cap - the model re-sizes any site.</a:t>
+            </a:r>
+          </a:p>
+          <a:p>
+            <a:pPr algn="l">
+              <a:lnSpc>
+                <a:spcPct val="110000"/>
+              </a:lnSpc>
+              <a:spcAft>
+                <a:spcPts val="800"/>
+              </a:spcAft>
+            </a:pPr>
+            <a:r>
+              <a:rPr sz="1250" b="1" i="0">
+                <a:solidFill>
+                  <a:srgbClr val="1B1B3A"/>
+                </a:solidFill>
+                <a:latin typeface="Calibri"/>
+              </a:rPr>
+              <a:t>UK &lt;-&gt; India transfer:</a:t>
+            </a:r>
+            <a:r>
+              <a:rPr sz="1250" b="0" i="0">
+                <a:solidFill>
+                  <a:srgbClr val="22222A"/>
+                </a:solidFill>
+                <a:latin typeface="Calibri"/>
+              </a:rPr>
+              <a:t> re-run with Indian solar (~1.6x yield) and 2/3-wheeler fleets; the weak-grid battery case becomes the binding one.</a:t>
+            </a:r>
+          </a:p>
+          <a:p>
+            <a:pPr algn="l">
+              <a:lnSpc>
+                <a:spcPct val="110000"/>
+              </a:lnSpc>
+              <a:spcAft>
+                <a:spcPts val="800"/>
+              </a:spcAft>
+            </a:pPr>
+            <a:r>
+              <a:rPr sz="1250" b="1" i="0">
+                <a:solidFill>
+                  <a:srgbClr val="1B1B3A"/>
+                </a:solidFill>
+                <a:latin typeface="Calibri"/>
+              </a:rPr>
+              <a:t>Growth priced in:</a:t>
+            </a:r>
+            <a:r>
+              <a:rPr sz="1250" b="0" i="0">
+                <a:solidFill>
+                  <a:srgbClr val="22222A"/>
+                </a:solidFill>
+                <a:latin typeface="Calibri"/>
+              </a:rPr>
+              <a:t> sized across 0-15%/yr growth with saturation.</a:t>
+            </a:r>
+          </a:p>
+        </p:txBody>
+      </p:sp>
+      <p:sp>
+        <p:nvSpPr>
+          <p:cNvPr id="5" name="Rounded Rectangle 4"/>
           <p:cNvSpPr/>
           <p:nvPr/>
         </p:nvSpPr>
         <p:spPr>
           <a:xfrm>
-            <a:off x="4206240" y="1325880"/>
-            <a:ext cx="3749039" cy="384048"/>
+            <a:off x="4434840" y="1234440"/>
+            <a:ext cx="3611880" cy="384048"/>
           </a:xfrm>
           <a:prstGeom prst="roundRect">
             <a:avLst/>
           </a:prstGeom>
           <a:solidFill>
-            <a:srgbClr val="43AA8B"/>
+            <a:srgbClr val="D9534F"/>
           </a:solidFill>
           <a:ln>
             <a:noFill/>
@@ -5171,27 +5526,162 @@
                 </a:solidFill>
                 <a:latin typeface="Calibri"/>
               </a:rPr>
-              <a:t>shared bikes cycle 1.3x more</a:t>
-            </a:r>
-          </a:p>
-        </p:txBody>
-      </p:sp>
-      <p:sp>
-        <p:nvSpPr>
-          <p:cNvPr id="5" name="Rounded Rectangle 4"/>
+              <a:t>SAFETY</a:t>
+            </a:r>
+          </a:p>
+        </p:txBody>
+      </p:sp>
+      <p:sp>
+        <p:nvSpPr>
+          <p:cNvPr id="6" name="TextBox 5"/>
+          <p:cNvSpPr txBox="1"/>
+          <p:nvPr/>
+        </p:nvSpPr>
+        <p:spPr>
+          <a:xfrm>
+            <a:off x="4434840" y="1783080"/>
+            <a:ext cx="3611880" cy="4206240"/>
+          </a:xfrm>
+          <a:prstGeom prst="rect">
+            <a:avLst/>
+          </a:prstGeom>
+          <a:noFill/>
+        </p:spPr>
+        <p:txBody>
+          <a:bodyPr wrap="square" anchor="t" lIns="0" rIns="0" tIns="0" bIns="0">
+            <a:spAutoFit/>
+          </a:bodyPr>
+          <a:lstStyle/>
+          <a:p>
+            <a:pPr algn="l">
+              <a:lnSpc>
+                <a:spcPct val="110000"/>
+              </a:lnSpc>
+              <a:spcAft>
+                <a:spcPts val="800"/>
+              </a:spcAft>
+            </a:pPr>
+            <a:r>
+              <a:rPr sz="1250" b="1" i="0">
+                <a:solidFill>
+                  <a:srgbClr val="1B1B3A"/>
+                </a:solidFill>
+                <a:latin typeface="Calibri"/>
+              </a:rPr>
+              <a:t>LFP chemistry</a:t>
+            </a:r>
+            <a:r>
+              <a:rPr sz="1250" b="0" i="0">
+                <a:solidFill>
+                  <a:srgbClr val="22222A"/>
+                </a:solidFill>
+                <a:latin typeface="Calibri"/>
+              </a:rPr>
+              <a:t> where storage is used - cobalt-free, higher thermal-runaway onset than NMC.</a:t>
+            </a:r>
+          </a:p>
+          <a:p>
+            <a:pPr algn="l">
+              <a:lnSpc>
+                <a:spcPct val="110000"/>
+              </a:lnSpc>
+              <a:spcAft>
+                <a:spcPts val="800"/>
+              </a:spcAft>
+            </a:pPr>
+            <a:r>
+              <a:rPr sz="1250" b="1" i="0">
+                <a:solidFill>
+                  <a:srgbClr val="1B1B3A"/>
+                </a:solidFill>
+                <a:latin typeface="Calibri"/>
+              </a:rPr>
+              <a:t>Standards-mapped:</a:t>
+            </a:r>
+            <a:r>
+              <a:rPr sz="1250" b="0" i="0">
+                <a:solidFill>
+                  <a:srgbClr val="22222A"/>
+                </a:solidFill>
+                <a:latin typeface="Calibri"/>
+              </a:rPr>
+              <a:t> BS EN 62485-5, BS EN 50604-1, BS 7671; IP65 outdoor bays; Type-B RCD per circuit.</a:t>
+            </a:r>
+          </a:p>
+          <a:p>
+            <a:pPr algn="l">
+              <a:lnSpc>
+                <a:spcPct val="110000"/>
+              </a:lnSpc>
+              <a:spcAft>
+                <a:spcPts val="800"/>
+              </a:spcAft>
+            </a:pPr>
+            <a:r>
+              <a:rPr sz="1250" b="1" i="0">
+                <a:solidFill>
+                  <a:srgbClr val="1B1B3A"/>
+                </a:solidFill>
+                <a:latin typeface="Calibri"/>
+              </a:rPr>
+              <a:t>Layout &amp; fire:</a:t>
+            </a:r>
+            <a:r>
+              <a:rPr sz="1250" b="0" i="0">
+                <a:solidFill>
+                  <a:srgbClr val="22222A"/>
+                </a:solidFill>
+                <a:latin typeface="Calibri"/>
+              </a:rPr>
+              <a:t> outdoor battery cabinet, 1 m clearance, thermal cut-off; sheltered, ventilated bays away from escape routes.</a:t>
+            </a:r>
+          </a:p>
+          <a:p>
+            <a:pPr algn="l">
+              <a:lnSpc>
+                <a:spcPct val="110000"/>
+              </a:lnSpc>
+              <a:spcAft>
+                <a:spcPts val="800"/>
+              </a:spcAft>
+            </a:pPr>
+            <a:r>
+              <a:rPr sz="1250" b="1" i="0">
+                <a:solidFill>
+                  <a:srgbClr val="1B1B3A"/>
+                </a:solidFill>
+                <a:latin typeface="Calibri"/>
+              </a:rPr>
+              <a:t>Peak enforced twice:</a:t>
+            </a:r>
+            <a:r>
+              <a:rPr sz="1250" b="0" i="0">
+                <a:solidFill>
+                  <a:srgbClr val="22222A"/>
+                </a:solidFill>
+                <a:latin typeface="Calibri"/>
+              </a:rPr>
+              <a:t> in software (EMS schedule) and hardware (supply fusing).</a:t>
+            </a:r>
+          </a:p>
+        </p:txBody>
+      </p:sp>
+      <p:sp>
+        <p:nvSpPr>
+          <p:cNvPr id="7" name="Rounded Rectangle 6"/>
           <p:cNvSpPr/>
           <p:nvPr/>
         </p:nvSpPr>
         <p:spPr>
           <a:xfrm>
-            <a:off x="8229600" y="1325880"/>
-            <a:ext cx="3291840" cy="384048"/>
+            <a:off x="8229600" y="1234440"/>
+            <a:ext cx="3611880" cy="384048"/>
           </a:xfrm>
           <a:prstGeom prst="roundRect">
             <a:avLst/>
           </a:prstGeom>
           <a:solidFill>
-            <a:srgbClr val="2E86AB"/>
+            <a:srgbClr val="43AA8B"/>
           </a:solidFill>
           <a:ln>
             <a:noFill/>
@@ -5223,45 +5713,21 @@
                 </a:solidFill>
                 <a:latin typeface="Calibri"/>
               </a:rPr>
-              <a:t>battery only if grid &lt;= 9 kW</a:t>
-            </a:r>
-          </a:p>
-        </p:txBody>
-      </p:sp>
-      <p:pic>
-        <p:nvPicPr>
-          <p:cNvPr id="6" name="Picture 5" descr="13_route_profiles.png"/>
-          <p:cNvPicPr>
-            <a:picLocks noChangeAspect="1"/>
-          </p:cNvPicPr>
-          <p:nvPr/>
-        </p:nvPicPr>
-        <p:blipFill>
-          <a:blip r:embed="rId2"/>
-          <a:stretch>
-            <a:fillRect/>
-          </a:stretch>
-        </p:blipFill>
-        <p:spPr>
-          <a:xfrm>
-            <a:off x="731520" y="2173938"/>
-            <a:ext cx="10698480" cy="3515963"/>
-          </a:xfrm>
-          <a:prstGeom prst="rect">
-            <a:avLst/>
-          </a:prstGeom>
-        </p:spPr>
-      </p:pic>
-      <p:sp>
-        <p:nvSpPr>
-          <p:cNvPr id="7" name="TextBox 6"/>
+              <a:t>COST ANALYSIS</a:t>
+            </a:r>
+          </a:p>
+        </p:txBody>
+      </p:sp>
+      <p:sp>
+        <p:nvSpPr>
+          <p:cNvPr id="8" name="TextBox 7"/>
           <p:cNvSpPr txBox="1"/>
           <p:nvPr/>
         </p:nvSpPr>
         <p:spPr>
           <a:xfrm>
-            <a:off x="731520" y="5943600"/>
-            <a:ext cx="10698480" cy="548640"/>
+            <a:off x="8229600" y="1783080"/>
+            <a:ext cx="3611880" cy="4206240"/>
           </a:xfrm>
           <a:prstGeom prst="rect">
             <a:avLst/>
@@ -5274,7 +5740,142 @@
           </a:bodyPr>
           <a:lstStyle/>
           <a:p>
-            <a:pPr algn="ctr">
+            <a:pPr algn="l">
+              <a:lnSpc>
+                <a:spcPct val="110000"/>
+              </a:lnSpc>
+              <a:spcAft>
+                <a:spcPts val="800"/>
+              </a:spcAft>
+            </a:pPr>
+            <a:r>
+              <a:rPr sz="1250" b="1" i="0">
+                <a:solidFill>
+                  <a:srgbClr val="1B1B3A"/>
+                </a:solidFill>
+                <a:latin typeface="Calibri"/>
+              </a:rPr>
+              <a:t>GBP 29,400 CAPEX</a:t>
+            </a:r>
+            <a:r>
+              <a:rPr sz="1250" b="0" i="0">
+                <a:solidFill>
+                  <a:srgbClr val="22222A"/>
+                </a:solidFill>
+                <a:latin typeface="Calibri"/>
+              </a:rPr>
+              <a:t> - PV, bays, installation; battery-free at 15 kW.</a:t>
+            </a:r>
+          </a:p>
+          <a:p>
+            <a:pPr algn="l">
+              <a:lnSpc>
+                <a:spcPct val="110000"/>
+              </a:lnSpc>
+              <a:spcAft>
+                <a:spcPts val="800"/>
+              </a:spcAft>
+            </a:pPr>
+            <a:r>
+              <a:rPr sz="1250" b="1" i="0">
+                <a:solidFill>
+                  <a:srgbClr val="1B1B3A"/>
+                </a:solidFill>
+                <a:latin typeface="Calibri"/>
+              </a:rPr>
+              <a:t>GBP 19,232/yr worst-case</a:t>
+            </a:r>
+            <a:r>
+              <a:rPr sz="1250" b="0" i="0">
+                <a:solidFill>
+                  <a:srgbClr val="22222A"/>
+                </a:solidFill>
+                <a:latin typeface="Calibri"/>
+              </a:rPr>
+              <a:t> vs GBP 47,179 naive - the premium repays in the first bad year.</a:t>
+            </a:r>
+          </a:p>
+          <a:p>
+            <a:pPr algn="l">
+              <a:lnSpc>
+                <a:spcPct val="110000"/>
+              </a:lnSpc>
+              <a:spcAft>
+                <a:spcPts val="800"/>
+              </a:spcAft>
+            </a:pPr>
+            <a:r>
+              <a:rPr sz="1250" b="1" i="0">
+                <a:solidFill>
+                  <a:srgbClr val="1B1B3A"/>
+                </a:solidFill>
+                <a:latin typeface="Calibri"/>
+              </a:rPr>
+              <a:t>LCOE GBP 0.253/kWh</a:t>
+            </a:r>
+            <a:r>
+              <a:rPr sz="1250" b="0" i="0">
+                <a:solidFill>
+                  <a:srgbClr val="22222A"/>
+                </a:solidFill>
+                <a:latin typeface="Calibri"/>
+              </a:rPr>
+              <a:t> delivered, incl. time-of-use tariff, GBP 80/kW-yr demand charge, PV residual value, DoD-aware battery ageing.</a:t>
+            </a:r>
+          </a:p>
+          <a:p>
+            <a:pPr algn="l">
+              <a:lnSpc>
+                <a:spcPct val="110000"/>
+              </a:lnSpc>
+              <a:spcAft>
+                <a:spcPts val="800"/>
+              </a:spcAft>
+            </a:pPr>
+            <a:r>
+              <a:rPr sz="1250" b="1" i="0">
+                <a:solidFill>
+                  <a:srgbClr val="1B1B3A"/>
+                </a:solidFill>
+                <a:latin typeface="Calibri"/>
+              </a:rPr>
+              <a:t>3.7 tCO2/yr avoided</a:t>
+            </a:r>
+            <a:r>
+              <a:rPr sz="1250" b="0" i="0">
+                <a:solidFill>
+                  <a:srgbClr val="22222A"/>
+                </a:solidFill>
+                <a:latin typeface="Calibri"/>
+              </a:rPr>
+              <a:t> (15% vs grid-only, marginal basis) - 55 t over the PV lifetime.</a:t>
+            </a:r>
+          </a:p>
+        </p:txBody>
+      </p:sp>
+      <p:sp>
+        <p:nvSpPr>
+          <p:cNvPr id="9" name="TextBox 8"/>
+          <p:cNvSpPr txBox="1"/>
+          <p:nvPr/>
+        </p:nvSpPr>
+        <p:spPr>
+          <a:xfrm>
+            <a:off x="640080" y="6419088"/>
+            <a:ext cx="10972800" cy="365760"/>
+          </a:xfrm>
+          <a:prstGeom prst="rect">
+            <a:avLst/>
+          </a:prstGeom>
+          <a:noFill/>
+        </p:spPr>
+        <p:txBody>
+          <a:bodyPr wrap="square" anchor="t" lIns="0" rIns="0" tIns="0" bIns="0">
+            <a:spAutoFit/>
+          </a:bodyPr>
+          <a:lstStyle/>
+          <a:p>
+            <a:pPr algn="l">
               <a:lnSpc>
                 <a:spcPct val="105000"/>
               </a:lnSpc>
@@ -5283,13 +5884,13 @@
               </a:spcAft>
             </a:pPr>
             <a:r>
-              <a:rPr sz="1100" b="0" i="1">
+              <a:rPr sz="1050" b="0" i="1">
                 <a:solidFill>
                   <a:srgbClr val="5A5A66"/>
                 </a:solidFill>
                 <a:latin typeface="Calibri"/>
               </a:rPr>
-              <a:t>A physics model gives energy per km by route; private bikes take one deep overnight home charge, shared bikes discharge deeper over many trips and recharge at the depot — so shared fleets need the managed hub.</a:t>
+              <a:t>Judging criterion: Scalability, Safety &amp; Cost Analysis (10%)</a:t>
             </a:r>
           </a:p>
         </p:txBody>
@@ -5308,7 +5909,7 @@
     <p:bg>
       <p:bgPr>
         <a:solidFill>
-          <a:srgbClr val="FFFFFF"/>
+          <a:srgbClr val="1B1B3A"/>
         </a:solidFill>
         <a:effectLst/>
       </p:bgPr>
@@ -5328,8 +5929,8 @@
         </p:nvSpPr>
         <p:spPr>
           <a:xfrm>
-            <a:off x="640080" y="457200"/>
-            <a:ext cx="10972800" cy="731520"/>
+            <a:off x="822960" y="640080"/>
+            <a:ext cx="10515600" cy="822960"/>
           </a:xfrm>
           <a:prstGeom prst="rect">
             <a:avLst/>
@@ -5351,27 +5952,78 @@
               </a:spcAft>
             </a:pPr>
             <a:r>
-              <a:rPr sz="3200" b="1" i="0">
+              <a:rPr sz="3600" b="1" i="0">
+                <a:solidFill>
+                  <a:srgbClr val="F2B705"/>
+                </a:solidFill>
+                <a:latin typeface="Georgia"/>
+              </a:rPr>
+              <a:t>Now - the model itself, live</a:t>
+            </a:r>
+          </a:p>
+        </p:txBody>
+      </p:sp>
+      <p:sp>
+        <p:nvSpPr>
+          <p:cNvPr id="3" name="Oval 2"/>
+          <p:cNvSpPr/>
+          <p:nvPr/>
+        </p:nvSpPr>
+        <p:spPr>
+          <a:xfrm>
+            <a:off x="868680" y="1737360"/>
+            <a:ext cx="457200" cy="457200"/>
+          </a:xfrm>
+          <a:prstGeom prst="ellipse">
+            <a:avLst/>
+          </a:prstGeom>
+          <a:solidFill>
+            <a:srgbClr val="F2B705"/>
+          </a:solidFill>
+          <a:ln>
+            <a:noFill/>
+          </a:ln>
+        </p:spPr>
+        <p:style>
+          <a:lnRef idx="1">
+            <a:schemeClr val="accent1"/>
+          </a:lnRef>
+          <a:fillRef idx="3">
+            <a:schemeClr val="accent1"/>
+          </a:fillRef>
+          <a:effectRef idx="2">
+            <a:schemeClr val="accent1"/>
+          </a:effectRef>
+          <a:fontRef idx="minor">
+            <a:schemeClr val="lt1"/>
+          </a:fontRef>
+        </p:style>
+        <p:txBody>
+          <a:bodyPr rtlCol="0" anchor="ctr"/>
+          <a:lstStyle/>
+          <a:p>
+            <a:pPr algn="ctr"/>
+            <a:r>
+              <a:rPr b="1" sz="1800">
                 <a:solidFill>
                   <a:srgbClr val="1B1B3A"/>
                 </a:solidFill>
-                <a:latin typeface="Georgia"/>
-              </a:rPr>
-              <a:t>Feasible today — and sustainable</a:t>
-            </a:r>
-          </a:p>
-        </p:txBody>
-      </p:sp>
-      <p:sp>
-        <p:nvSpPr>
-          <p:cNvPr id="3" name="TextBox 2"/>
+              </a:rPr>
+              <a:t>1</a:t>
+            </a:r>
+          </a:p>
+        </p:txBody>
+      </p:sp>
+      <p:sp>
+        <p:nvSpPr>
+          <p:cNvPr id="4" name="TextBox 3"/>
           <p:cNvSpPr txBox="1"/>
           <p:nvPr/>
         </p:nvSpPr>
         <p:spPr>
           <a:xfrm>
-            <a:off x="731520" y="1554480"/>
-            <a:ext cx="5486400" cy="822960"/>
+            <a:off x="1554480" y="1700784"/>
+            <a:ext cx="6035040" cy="457200"/>
           </a:xfrm>
           <a:prstGeom prst="rect">
             <a:avLst/>
@@ -5393,27 +6045,27 @@
               </a:spcAft>
             </a:pPr>
             <a:r>
-              <a:rPr sz="4000" b="1" i="0">
-                <a:solidFill>
-                  <a:srgbClr val="1B1B3A"/>
-                </a:solidFill>
-                <a:latin typeface="Georgia"/>
-              </a:rPr>
-              <a:t>~£29,400</a:t>
-            </a:r>
-          </a:p>
-        </p:txBody>
-      </p:sp>
-      <p:sp>
-        <p:nvSpPr>
-          <p:cNvPr id="4" name="TextBox 3"/>
+              <a:rPr sz="1700" b="1" i="0">
+                <a:solidFill>
+                  <a:srgbClr val="FFFFFF"/>
+                </a:solidFill>
+                <a:latin typeface="Calibri"/>
+              </a:rPr>
+              <a:t>The hub, animated</a:t>
+            </a:r>
+          </a:p>
+        </p:txBody>
+      </p:sp>
+      <p:sp>
+        <p:nvSpPr>
+          <p:cNvPr id="5" name="TextBox 4"/>
           <p:cNvSpPr txBox="1"/>
           <p:nvPr/>
         </p:nvSpPr>
         <p:spPr>
           <a:xfrm>
-            <a:off x="731520" y="2267712"/>
-            <a:ext cx="5486400" cy="548640"/>
+            <a:off x="1554480" y="2084831"/>
+            <a:ext cx="6035040" cy="548640"/>
           </a:xfrm>
           <a:prstGeom prst="rect">
             <a:avLst/>
@@ -5437,25 +6089,76 @@
             <a:r>
               <a:rPr sz="1250" b="0" i="0">
                 <a:solidFill>
-                  <a:srgbClr val="5A5A66"/>
+                  <a:srgbClr val="CADCFC"/>
                 </a:solidFill>
                 <a:latin typeface="Calibri"/>
               </a:rPr>
-              <a:t>capital cost — off-the-shelf PV, Li-ion &amp; AC chargers</a:t>
-            </a:r>
-          </a:p>
-        </p:txBody>
-      </p:sp>
-      <p:sp>
-        <p:nvSpPr>
-          <p:cNvPr id="5" name="TextBox 4"/>
+              <a:t>hour-by-hour dispatch of the real model - sun up, bikes out, smart charging into the sun</a:t>
+            </a:r>
+          </a:p>
+        </p:txBody>
+      </p:sp>
+      <p:sp>
+        <p:nvSpPr>
+          <p:cNvPr id="6" name="Oval 5"/>
+          <p:cNvSpPr/>
+          <p:nvPr/>
+        </p:nvSpPr>
+        <p:spPr>
+          <a:xfrm>
+            <a:off x="868680" y="2761488"/>
+            <a:ext cx="457200" cy="457200"/>
+          </a:xfrm>
+          <a:prstGeom prst="ellipse">
+            <a:avLst/>
+          </a:prstGeom>
+          <a:solidFill>
+            <a:srgbClr val="F2B705"/>
+          </a:solidFill>
+          <a:ln>
+            <a:noFill/>
+          </a:ln>
+        </p:spPr>
+        <p:style>
+          <a:lnRef idx="1">
+            <a:schemeClr val="accent1"/>
+          </a:lnRef>
+          <a:fillRef idx="3">
+            <a:schemeClr val="accent1"/>
+          </a:fillRef>
+          <a:effectRef idx="2">
+            <a:schemeClr val="accent1"/>
+          </a:effectRef>
+          <a:fontRef idx="minor">
+            <a:schemeClr val="lt1"/>
+          </a:fontRef>
+        </p:style>
+        <p:txBody>
+          <a:bodyPr rtlCol="0" anchor="ctr"/>
+          <a:lstStyle/>
+          <a:p>
+            <a:pPr algn="ctr"/>
+            <a:r>
+              <a:rPr b="1" sz="1800">
+                <a:solidFill>
+                  <a:srgbClr val="1B1B3A"/>
+                </a:solidFill>
+              </a:rPr>
+              <a:t>2</a:t>
+            </a:r>
+          </a:p>
+        </p:txBody>
+      </p:sp>
+      <p:sp>
+        <p:nvSpPr>
+          <p:cNvPr id="7" name="TextBox 6"/>
           <p:cNvSpPr txBox="1"/>
           <p:nvPr/>
         </p:nvSpPr>
         <p:spPr>
           <a:xfrm>
-            <a:off x="731520" y="2880360"/>
-            <a:ext cx="5486400" cy="822960"/>
+            <a:off x="1554480" y="2724912"/>
+            <a:ext cx="6035040" cy="457200"/>
           </a:xfrm>
           <a:prstGeom prst="rect">
             <a:avLst/>
@@ -5477,27 +6180,27 @@
               </a:spcAft>
             </a:pPr>
             <a:r>
-              <a:rPr sz="4000" b="1" i="0">
-                <a:solidFill>
-                  <a:srgbClr val="43AA8B"/>
-                </a:solidFill>
-                <a:latin typeface="Georgia"/>
-              </a:rPr>
-              <a:t>-15% CO2</a:t>
-            </a:r>
-          </a:p>
-        </p:txBody>
-      </p:sp>
-      <p:sp>
-        <p:nvSpPr>
-          <p:cNvPr id="6" name="TextBox 5"/>
+              <a:rPr sz="1700" b="1" i="0">
+                <a:solidFill>
+                  <a:srgbClr val="FFFFFF"/>
+                </a:solidFill>
+                <a:latin typeface="Calibri"/>
+              </a:rPr>
+              <a:t>Break it, then fix it</a:t>
+            </a:r>
+          </a:p>
+        </p:txBody>
+      </p:sp>
+      <p:sp>
+        <p:nvSpPr>
+          <p:cNvPr id="8" name="TextBox 7"/>
           <p:cNvSpPr txBox="1"/>
           <p:nvPr/>
         </p:nvSpPr>
         <p:spPr>
           <a:xfrm>
-            <a:off x="731520" y="3593591"/>
-            <a:ext cx="5486400" cy="548640"/>
+            <a:off x="1554480" y="3108960"/>
+            <a:ext cx="6035040" cy="548640"/>
           </a:xfrm>
           <a:prstGeom prst="rect">
             <a:avLst/>
@@ -5521,25 +6224,76 @@
             <a:r>
               <a:rPr sz="1250" b="0" i="0">
                 <a:solidFill>
-                  <a:srgbClr val="5A5A66"/>
+                  <a:srgbClr val="CADCFC"/>
                 </a:solidFill>
                 <a:latin typeface="Calibri"/>
               </a:rPr>
-              <a:t>vs grid-only charging (3.7 tCO2/yr saved)</a:t>
-            </a:r>
-          </a:p>
-        </p:txBody>
-      </p:sp>
-      <p:sp>
-        <p:nvSpPr>
-          <p:cNvPr id="7" name="TextBox 6"/>
+              <a:t>the naive design collapses in the worst future; the robust design holds at 99.6%</a:t>
+            </a:r>
+          </a:p>
+        </p:txBody>
+      </p:sp>
+      <p:sp>
+        <p:nvSpPr>
+          <p:cNvPr id="9" name="Oval 8"/>
+          <p:cNvSpPr/>
+          <p:nvPr/>
+        </p:nvSpPr>
+        <p:spPr>
+          <a:xfrm>
+            <a:off x="868680" y="3785616"/>
+            <a:ext cx="457200" cy="457200"/>
+          </a:xfrm>
+          <a:prstGeom prst="ellipse">
+            <a:avLst/>
+          </a:prstGeom>
+          <a:solidFill>
+            <a:srgbClr val="F2B705"/>
+          </a:solidFill>
+          <a:ln>
+            <a:noFill/>
+          </a:ln>
+        </p:spPr>
+        <p:style>
+          <a:lnRef idx="1">
+            <a:schemeClr val="accent1"/>
+          </a:lnRef>
+          <a:fillRef idx="3">
+            <a:schemeClr val="accent1"/>
+          </a:fillRef>
+          <a:effectRef idx="2">
+            <a:schemeClr val="accent1"/>
+          </a:effectRef>
+          <a:fontRef idx="minor">
+            <a:schemeClr val="lt1"/>
+          </a:fontRef>
+        </p:style>
+        <p:txBody>
+          <a:bodyPr rtlCol="0" anchor="ctr"/>
+          <a:lstStyle/>
+          <a:p>
+            <a:pPr algn="ctr"/>
+            <a:r>
+              <a:rPr b="1" sz="1800">
+                <a:solidFill>
+                  <a:srgbClr val="1B1B3A"/>
+                </a:solidFill>
+              </a:rPr>
+              <a:t>3</a:t>
+            </a:r>
+          </a:p>
+        </p:txBody>
+      </p:sp>
+      <p:sp>
+        <p:nvSpPr>
+          <p:cNvPr id="10" name="TextBox 9"/>
           <p:cNvSpPr txBox="1"/>
           <p:nvPr/>
         </p:nvSpPr>
         <p:spPr>
           <a:xfrm>
-            <a:off x="731520" y="4206240"/>
-            <a:ext cx="5486400" cy="822960"/>
+            <a:off x="1554480" y="3749040"/>
+            <a:ext cx="6035040" cy="457200"/>
           </a:xfrm>
           <a:prstGeom prst="rect">
             <a:avLst/>
@@ -5561,27 +6315,27 @@
               </a:spcAft>
             </a:pPr>
             <a:r>
-              <a:rPr sz="4000" b="1" i="0">
-                <a:solidFill>
-                  <a:srgbClr val="2E86AB"/>
-                </a:solidFill>
-                <a:latin typeface="Georgia"/>
-              </a:rPr>
-              <a:t>9/9 validated</a:t>
-            </a:r>
-          </a:p>
-        </p:txBody>
-      </p:sp>
-      <p:sp>
-        <p:nvSpPr>
-          <p:cNvPr id="8" name="TextBox 7"/>
+              <a:rPr sz="1700" b="1" i="0">
+                <a:solidFill>
+                  <a:srgbClr val="FFFFFF"/>
+                </a:solidFill>
+                <a:latin typeface="Calibri"/>
+              </a:rPr>
+              <a:t>150 designs, searched live</a:t>
+            </a:r>
+          </a:p>
+        </p:txBody>
+      </p:sp>
+      <p:sp>
+        <p:nvSpPr>
+          <p:cNvPr id="11" name="TextBox 10"/>
           <p:cNvSpPr txBox="1"/>
           <p:nvPr/>
         </p:nvSpPr>
         <p:spPr>
           <a:xfrm>
-            <a:off x="731520" y="4919472"/>
-            <a:ext cx="5486400" cy="548640"/>
+            <a:off x="1554480" y="4133088"/>
+            <a:ext cx="6035040" cy="548640"/>
           </a:xfrm>
           <a:prstGeom prst="rect">
             <a:avLst/>
@@ -5605,18 +6359,153 @@
             <a:r>
               <a:rPr sz="1250" b="0" i="0">
                 <a:solidFill>
-                  <a:srgbClr val="5A5A66"/>
+                  <a:srgbClr val="CADCFC"/>
                 </a:solidFill>
                 <a:latin typeface="Calibri"/>
               </a:rPr>
-              <a:t>outputs &amp; demand inputs within published ranges; 1-command rebuild</a:t>
+              <a:t>the browser re-runs the full robust optimisation - 20 million simulated hours - in about a second</a:t>
+            </a:r>
+          </a:p>
+        </p:txBody>
+      </p:sp>
+      <p:sp>
+        <p:nvSpPr>
+          <p:cNvPr id="12" name="Oval 11"/>
+          <p:cNvSpPr/>
+          <p:nvPr/>
+        </p:nvSpPr>
+        <p:spPr>
+          <a:xfrm>
+            <a:off x="868680" y="4809744"/>
+            <a:ext cx="457200" cy="457200"/>
+          </a:xfrm>
+          <a:prstGeom prst="ellipse">
+            <a:avLst/>
+          </a:prstGeom>
+          <a:solidFill>
+            <a:srgbClr val="F2B705"/>
+          </a:solidFill>
+          <a:ln>
+            <a:noFill/>
+          </a:ln>
+        </p:spPr>
+        <p:style>
+          <a:lnRef idx="1">
+            <a:schemeClr val="accent1"/>
+          </a:lnRef>
+          <a:fillRef idx="3">
+            <a:schemeClr val="accent1"/>
+          </a:fillRef>
+          <a:effectRef idx="2">
+            <a:schemeClr val="accent1"/>
+          </a:effectRef>
+          <a:fontRef idx="minor">
+            <a:schemeClr val="lt1"/>
+          </a:fontRef>
+        </p:style>
+        <p:txBody>
+          <a:bodyPr rtlCol="0" anchor="ctr"/>
+          <a:lstStyle/>
+          <a:p>
+            <a:pPr algn="ctr"/>
+            <a:r>
+              <a:rPr b="1" sz="1800">
+                <a:solidFill>
+                  <a:srgbClr val="1B1B3A"/>
+                </a:solidFill>
+              </a:rPr>
+              <a:t>4</a:t>
+            </a:r>
+          </a:p>
+        </p:txBody>
+      </p:sp>
+      <p:sp>
+        <p:nvSpPr>
+          <p:cNvPr id="13" name="TextBox 12"/>
+          <p:cNvSpPr txBox="1"/>
+          <p:nvPr/>
+        </p:nvSpPr>
+        <p:spPr>
+          <a:xfrm>
+            <a:off x="1554480" y="4773168"/>
+            <a:ext cx="6035040" cy="457200"/>
+          </a:xfrm>
+          <a:prstGeom prst="rect">
+            <a:avLst/>
+          </a:prstGeom>
+          <a:noFill/>
+        </p:spPr>
+        <p:txBody>
+          <a:bodyPr wrap="square" anchor="t" lIns="0" rIns="0" tIns="0" bIns="0">
+            <a:spAutoFit/>
+          </a:bodyPr>
+          <a:lstStyle/>
+          <a:p>
+            <a:pPr algn="l">
+              <a:lnSpc>
+                <a:spcPct val="105000"/>
+              </a:lnSpc>
+              <a:spcAft>
+                <a:spcPts val="600"/>
+              </a:spcAft>
+            </a:pPr>
+            <a:r>
+              <a:rPr sz="1700" b="1" i="0">
+                <a:solidFill>
+                  <a:srgbClr val="FFFFFF"/>
+                </a:solidFill>
+                <a:latin typeface="Calibri"/>
+              </a:rPr>
+              <a:t>The storage boundary</a:t>
+            </a:r>
+          </a:p>
+        </p:txBody>
+      </p:sp>
+      <p:sp>
+        <p:nvSpPr>
+          <p:cNvPr id="14" name="TextBox 13"/>
+          <p:cNvSpPr txBox="1"/>
+          <p:nvPr/>
+        </p:nvSpPr>
+        <p:spPr>
+          <a:xfrm>
+            <a:off x="1554480" y="5157216"/>
+            <a:ext cx="6035040" cy="548640"/>
+          </a:xfrm>
+          <a:prstGeom prst="rect">
+            <a:avLst/>
+          </a:prstGeom>
+          <a:noFill/>
+        </p:spPr>
+        <p:txBody>
+          <a:bodyPr wrap="square" anchor="t" lIns="0" rIns="0" tIns="0" bIns="0">
+            <a:spAutoFit/>
+          </a:bodyPr>
+          <a:lstStyle/>
+          <a:p>
+            <a:pPr algn="l">
+              <a:lnSpc>
+                <a:spcPct val="105000"/>
+              </a:lnSpc>
+              <a:spcAft>
+                <a:spcPts val="600"/>
+              </a:spcAft>
+            </a:pPr>
+            <a:r>
+              <a:rPr sz="1250" b="0" i="0">
+                <a:solidFill>
+                  <a:srgbClr val="CADCFC"/>
+                </a:solidFill>
+                <a:latin typeface="Calibri"/>
+              </a:rPr>
+              <a:t>weaken the grid to 8 kW and watch a battery enter the optimal design</a:t>
             </a:r>
           </a:p>
         </p:txBody>
       </p:sp>
       <p:pic>
         <p:nvPicPr>
-          <p:cNvPr id="9" name="Picture 8" descr="08_energy_sources.png"/>
+          <p:cNvPr id="15" name="Picture 14" descr="_demo_qr.png"/>
           <p:cNvPicPr>
             <a:picLocks noChangeAspect="1"/>
           </p:cNvPicPr>
@@ -5630,14 +6519,182 @@
         </p:blipFill>
         <p:spPr>
           <a:xfrm>
-            <a:off x="6309360" y="2606040"/>
-            <a:ext cx="5486400" cy="2194560"/>
+            <a:off x="8503920" y="1828800"/>
+            <a:ext cx="2377440" cy="2377440"/>
           </a:xfrm>
           <a:prstGeom prst="rect">
             <a:avLst/>
           </a:prstGeom>
         </p:spPr>
       </p:pic>
+      <p:sp>
+        <p:nvSpPr>
+          <p:cNvPr id="16" name="TextBox 15"/>
+          <p:cNvSpPr txBox="1"/>
+          <p:nvPr/>
+        </p:nvSpPr>
+        <p:spPr>
+          <a:xfrm>
+            <a:off x="8046720" y="4343400"/>
+            <a:ext cx="3291840" cy="457200"/>
+          </a:xfrm>
+          <a:prstGeom prst="rect">
+            <a:avLst/>
+          </a:prstGeom>
+          <a:noFill/>
+        </p:spPr>
+        <p:txBody>
+          <a:bodyPr wrap="square" anchor="t" lIns="0" rIns="0" tIns="0" bIns="0">
+            <a:spAutoFit/>
+          </a:bodyPr>
+          <a:lstStyle/>
+          <a:p>
+            <a:pPr algn="ctr">
+              <a:lnSpc>
+                <a:spcPct val="105000"/>
+              </a:lnSpc>
+              <a:spcAft>
+                <a:spcPts val="600"/>
+              </a:spcAft>
+            </a:pPr>
+            <a:r>
+              <a:rPr sz="1150" b="0" i="0">
+                <a:solidFill>
+                  <a:srgbClr val="CADCFC"/>
+                </a:solidFill>
+                <a:latin typeface="Calibri"/>
+              </a:rPr>
+              <a:t>scan to open on your phone</a:t>
+            </a:r>
+          </a:p>
+        </p:txBody>
+      </p:sp>
+      <p:sp>
+        <p:nvSpPr>
+          <p:cNvPr id="17" name="TextBox 16"/>
+          <p:cNvSpPr txBox="1"/>
+          <p:nvPr/>
+        </p:nvSpPr>
+        <p:spPr>
+          <a:xfrm>
+            <a:off x="8046720" y="4846320"/>
+            <a:ext cx="3291840" cy="731520"/>
+          </a:xfrm>
+          <a:prstGeom prst="rect">
+            <a:avLst/>
+          </a:prstGeom>
+          <a:noFill/>
+        </p:spPr>
+        <p:txBody>
+          <a:bodyPr wrap="square" anchor="t" lIns="0" rIns="0" tIns="0" bIns="0">
+            <a:spAutoFit/>
+          </a:bodyPr>
+          <a:lstStyle/>
+          <a:p>
+            <a:pPr algn="ctr">
+              <a:lnSpc>
+                <a:spcPct val="105000"/>
+              </a:lnSpc>
+              <a:spcAft>
+                <a:spcPts val="600"/>
+              </a:spcAft>
+            </a:pPr>
+            <a:r>
+              <a:rPr sz="1300" b="1" i="0">
+                <a:solidFill>
+                  <a:srgbClr val="F2B705"/>
+                </a:solidFill>
+                <a:latin typeface="Calibri"/>
+              </a:rPr>
+              <a:t>gourav88502.github.io/emicromobility-robust-charging</a:t>
+            </a:r>
+          </a:p>
+        </p:txBody>
+      </p:sp>
+      <p:sp>
+        <p:nvSpPr>
+          <p:cNvPr id="18" name="TextBox 17"/>
+          <p:cNvSpPr txBox="1"/>
+          <p:nvPr/>
+        </p:nvSpPr>
+        <p:spPr>
+          <a:xfrm>
+            <a:off x="868680" y="5897880"/>
+            <a:ext cx="10424160" cy="457200"/>
+          </a:xfrm>
+          <a:prstGeom prst="rect">
+            <a:avLst/>
+          </a:prstGeom>
+          <a:noFill/>
+        </p:spPr>
+        <p:txBody>
+          <a:bodyPr wrap="square" anchor="t" lIns="0" rIns="0" tIns="0" bIns="0">
+            <a:spAutoFit/>
+          </a:bodyPr>
+          <a:lstStyle/>
+          <a:p>
+            <a:pPr algn="l">
+              <a:lnSpc>
+                <a:spcPct val="105000"/>
+              </a:lnSpc>
+              <a:spcAft>
+                <a:spcPts val="600"/>
+              </a:spcAft>
+            </a:pPr>
+            <a:r>
+              <a:rPr sz="1200" b="0" i="1">
+                <a:solidFill>
+                  <a:srgbClr val="CADCFC"/>
+                </a:solidFill>
+                <a:latin typeface="Calibri"/>
+              </a:rPr>
+              <a:t>Runs in any browser - no install, works offline; every number re-derived by the page and checked against the Python pipeline at load.</a:t>
+            </a:r>
+          </a:p>
+        </p:txBody>
+      </p:sp>
+      <p:sp>
+        <p:nvSpPr>
+          <p:cNvPr id="19" name="TextBox 18"/>
+          <p:cNvSpPr txBox="1"/>
+          <p:nvPr/>
+        </p:nvSpPr>
+        <p:spPr>
+          <a:xfrm>
+            <a:off x="640080" y="6419088"/>
+            <a:ext cx="10972800" cy="365760"/>
+          </a:xfrm>
+          <a:prstGeom prst="rect">
+            <a:avLst/>
+          </a:prstGeom>
+          <a:noFill/>
+        </p:spPr>
+        <p:txBody>
+          <a:bodyPr wrap="square" anchor="t" lIns="0" rIns="0" tIns="0" bIns="0">
+            <a:spAutoFit/>
+          </a:bodyPr>
+          <a:lstStyle/>
+          <a:p>
+            <a:pPr algn="l">
+              <a:lnSpc>
+                <a:spcPct val="105000"/>
+              </a:lnSpc>
+              <a:spcAft>
+                <a:spcPts val="600"/>
+              </a:spcAft>
+            </a:pPr>
+            <a:r>
+              <a:rPr sz="1050" b="0" i="1">
+                <a:solidFill>
+                  <a:srgbClr val="CADCFC"/>
+                </a:solidFill>
+                <a:latin typeface="Calibri"/>
+              </a:rPr>
+              <a:t>Judging criterion: Demonstration of Model (40%) - handoff to the live demo</a:t>
+            </a:r>
+          </a:p>
+        </p:txBody>
+      </p:sp>
     </p:spTree>
   </p:cSld>
   <p:clrMapOvr>
@@ -5672,7 +6729,7 @@
         </p:nvSpPr>
         <p:spPr>
           <a:xfrm>
-            <a:off x="822960" y="1097280"/>
+            <a:off x="822960" y="640080"/>
             <a:ext cx="10515600" cy="731520"/>
           </a:xfrm>
           <a:prstGeom prst="rect">
@@ -5695,13 +6752,13 @@
               </a:spcAft>
             </a:pPr>
             <a:r>
-              <a:rPr sz="3000" b="1" i="0">
+              <a:rPr sz="3400" b="1" i="0">
                 <a:solidFill>
                   <a:srgbClr val="F2B705"/>
                 </a:solidFill>
                 <a:latin typeface="Georgia"/>
               </a:rPr>
-              <a:t>Original, authentic, reproducible</a:t>
+              <a:t>Questions welcome</a:t>
             </a:r>
           </a:p>
         </p:txBody>
@@ -5714,8 +6771,8 @@
         </p:nvSpPr>
         <p:spPr>
           <a:xfrm>
-            <a:off x="868680" y="2011680"/>
-            <a:ext cx="10424160" cy="1463040"/>
+            <a:off x="868680" y="1600200"/>
+            <a:ext cx="10424160" cy="822960"/>
           </a:xfrm>
           <a:prstGeom prst="rect">
             <a:avLst/>
@@ -5730,64 +6787,63 @@
           <a:p>
             <a:pPr algn="l">
               <a:lnSpc>
-                <a:spcPct val="115000"/>
+                <a:spcPct val="105000"/>
               </a:lnSpc>
               <a:spcAft>
                 <a:spcPts val="600"/>
               </a:spcAft>
             </a:pPr>
             <a:r>
-              <a:rPr sz="1550" b="0" i="0">
+              <a:rPr sz="1900" b="0" i="1">
                 <a:solidFill>
                   <a:srgbClr val="FFFFFF"/>
                 </a:solidFill>
                 <a:latin typeface="Calibri"/>
               </a:rPr>
-              <a:t>Every line of code and every figure is original, written from scratch. Solar and grid carbon are real API data (PVGIS and National Grid ESO); demand is built from real DfT shared-micromobility monitoring data and uses the official UoW Bikes file when provided. Fixed seed, one-command rebuild, passing tests — built for the AI and plagiarism checks.</a:t>
-            </a:r>
-          </a:p>
-        </p:txBody>
-      </p:sp>
-      <p:sp>
-        <p:nvSpPr>
-          <p:cNvPr id="4" name="Rectangle 3"/>
-          <p:cNvSpPr/>
+              <a:t>We turn demand uncertainty from a risk into a design input - and show that robustness pays.</a:t>
+            </a:r>
+          </a:p>
+        </p:txBody>
+      </p:sp>
+      <p:sp>
+        <p:nvSpPr>
+          <p:cNvPr id="4" name="TextBox 3"/>
+          <p:cNvSpPr txBox="1"/>
           <p:nvPr/>
         </p:nvSpPr>
         <p:spPr>
           <a:xfrm>
-            <a:off x="868680" y="3977639"/>
-            <a:ext cx="256032" cy="1097280"/>
+            <a:off x="868680" y="2651760"/>
+            <a:ext cx="3566160" cy="640080"/>
           </a:xfrm>
           <a:prstGeom prst="rect">
             <a:avLst/>
           </a:prstGeom>
-          <a:solidFill>
-            <a:srgbClr val="43AA8B"/>
-          </a:solidFill>
-          <a:ln>
-            <a:noFill/>
-          </a:ln>
-        </p:spPr>
-        <p:style>
-          <a:lnRef idx="1">
-            <a:schemeClr val="accent1"/>
-          </a:lnRef>
-          <a:fillRef idx="3">
-            <a:schemeClr val="accent1"/>
-          </a:fillRef>
-          <a:effectRef idx="2">
-            <a:schemeClr val="accent1"/>
-          </a:effectRef>
-          <a:fontRef idx="minor">
-            <a:schemeClr val="lt1"/>
-          </a:fontRef>
-        </p:style>
-        <p:txBody>
-          <a:bodyPr rtlCol="0" anchor="ctr"/>
-          <a:lstStyle/>
-          <a:p>
-            <a:pPr algn="ctr"/>
+          <a:noFill/>
+        </p:spPr>
+        <p:txBody>
+          <a:bodyPr wrap="square" anchor="t" lIns="0" rIns="0" tIns="0" bIns="0">
+            <a:spAutoFit/>
+          </a:bodyPr>
+          <a:lstStyle/>
+          <a:p>
+            <a:pPr algn="l">
+              <a:lnSpc>
+                <a:spcPct val="105000"/>
+              </a:lnSpc>
+              <a:spcAft>
+                <a:spcPts val="600"/>
+              </a:spcAft>
+            </a:pPr>
+            <a:r>
+              <a:rPr sz="1900" b="1" i="0">
+                <a:solidFill>
+                  <a:srgbClr val="F2B705"/>
+                </a:solidFill>
+                <a:latin typeface="Georgia"/>
+              </a:rPr>
+              <a:t>15 kWp / 0 kWh / 8 bays</a:t>
+            </a:r>
           </a:p>
         </p:txBody>
       </p:sp>
@@ -5799,8 +6855,8 @@
         </p:nvSpPr>
         <p:spPr>
           <a:xfrm>
-            <a:off x="1280160" y="4023360"/>
-            <a:ext cx="10058400" cy="1097280"/>
+            <a:off x="868680" y="3127248"/>
+            <a:ext cx="3566160" cy="731520"/>
           </a:xfrm>
           <a:prstGeom prst="rect">
             <a:avLst/>
@@ -5822,15 +6878,80 @@
               </a:spcAft>
             </a:pPr>
             <a:r>
-              <a:rPr sz="2600" b="1" i="0">
-                <a:solidFill>
-                  <a:srgbClr val="FFFFFF"/>
+              <a:rPr sz="1150" b="0" i="0">
+                <a:solidFill>
+                  <a:srgbClr val="CADCFC"/>
+                </a:solidFill>
+                <a:latin typeface="Calibri"/>
+              </a:rPr>
+              <a:t>recommended robust hub (maximin)</a:t>
+            </a:r>
+          </a:p>
+        </p:txBody>
+      </p:sp>
+      <p:sp>
+        <p:nvSpPr>
+          <p:cNvPr id="6" name="TextBox 5"/>
+          <p:cNvSpPr txBox="1"/>
+          <p:nvPr/>
+        </p:nvSpPr>
+        <p:spPr>
+          <a:xfrm>
+            <a:off x="4709160" y="2651760"/>
+            <a:ext cx="3566160" cy="640080"/>
+          </a:xfrm>
+          <a:prstGeom prst="rect">
+            <a:avLst/>
+          </a:prstGeom>
+          <a:noFill/>
+        </p:spPr>
+        <p:txBody>
+          <a:bodyPr wrap="square" anchor="t" lIns="0" rIns="0" tIns="0" bIns="0">
+            <a:spAutoFit/>
+          </a:bodyPr>
+          <a:lstStyle/>
+          <a:p>
+            <a:pPr algn="l">
+              <a:lnSpc>
+                <a:spcPct val="105000"/>
+              </a:lnSpc>
+              <a:spcAft>
+                <a:spcPts val="600"/>
+              </a:spcAft>
+            </a:pPr>
+            <a:r>
+              <a:rPr sz="1900" b="1" i="0">
+                <a:solidFill>
+                  <a:srgbClr val="F2B705"/>
                 </a:solidFill>
                 <a:latin typeface="Georgia"/>
               </a:rPr>
-              <a:t>We turn demand uncertainty from a risk</a:t>
-            </a:r>
-          </a:p>
+              <a:t>-59%  worst-case cost</a:t>
+            </a:r>
+          </a:p>
+        </p:txBody>
+      </p:sp>
+      <p:sp>
+        <p:nvSpPr>
+          <p:cNvPr id="7" name="TextBox 6"/>
+          <p:cNvSpPr txBox="1"/>
+          <p:nvPr/>
+        </p:nvSpPr>
+        <p:spPr>
+          <a:xfrm>
+            <a:off x="4709160" y="3127248"/>
+            <a:ext cx="3566160" cy="731520"/>
+          </a:xfrm>
+          <a:prstGeom prst="rect">
+            <a:avLst/>
+          </a:prstGeom>
+          <a:noFill/>
+        </p:spPr>
+        <p:txBody>
+          <a:bodyPr wrap="square" anchor="t" lIns="0" rIns="0" tIns="0" bIns="0">
+            <a:spAutoFit/>
+          </a:bodyPr>
+          <a:lstStyle/>
           <a:p>
             <a:pPr algn="l">
               <a:lnSpc>
@@ -5841,27 +6962,27 @@
               </a:spcAft>
             </a:pPr>
             <a:r>
-              <a:rPr sz="2600" b="1" i="0">
-                <a:solidFill>
-                  <a:srgbClr val="F2B705"/>
-                </a:solidFill>
-                <a:latin typeface="Georgia"/>
-              </a:rPr>
-              <a:t>into a design input — and show that robustness pays.</a:t>
-            </a:r>
-          </a:p>
-        </p:txBody>
-      </p:sp>
-      <p:sp>
-        <p:nvSpPr>
-          <p:cNvPr id="6" name="TextBox 5"/>
+              <a:rPr sz="1150" b="0" i="0">
+                <a:solidFill>
+                  <a:srgbClr val="CADCFC"/>
+                </a:solidFill>
+                <a:latin typeface="Calibri"/>
+              </a:rPr>
+              <a:t>GBP 47,179 -&gt; GBP 19,232 per year</a:t>
+            </a:r>
+          </a:p>
+        </p:txBody>
+      </p:sp>
+      <p:sp>
+        <p:nvSpPr>
+          <p:cNvPr id="8" name="TextBox 7"/>
           <p:cNvSpPr txBox="1"/>
           <p:nvPr/>
         </p:nvSpPr>
         <p:spPr>
           <a:xfrm>
-            <a:off x="868680" y="5943600"/>
-            <a:ext cx="10424160" cy="457200"/>
+            <a:off x="8549640" y="2651760"/>
+            <a:ext cx="3566160" cy="640080"/>
           </a:xfrm>
           <a:prstGeom prst="rect">
             <a:avLst/>
@@ -5883,13 +7004,349 @@
               </a:spcAft>
             </a:pPr>
             <a:r>
-              <a:rPr sz="1600" b="0" i="1">
+              <a:rPr sz="1900" b="1" i="0">
+                <a:solidFill>
+                  <a:srgbClr val="F2B705"/>
+                </a:solidFill>
+                <a:latin typeface="Georgia"/>
+              </a:rPr>
+              <a:t>99.6% service</a:t>
+            </a:r>
+          </a:p>
+        </p:txBody>
+      </p:sp>
+      <p:sp>
+        <p:nvSpPr>
+          <p:cNvPr id="9" name="TextBox 8"/>
+          <p:cNvSpPr txBox="1"/>
+          <p:nvPr/>
+        </p:nvSpPr>
+        <p:spPr>
+          <a:xfrm>
+            <a:off x="8549640" y="3127248"/>
+            <a:ext cx="3566160" cy="731520"/>
+          </a:xfrm>
+          <a:prstGeom prst="rect">
+            <a:avLst/>
+          </a:prstGeom>
+          <a:noFill/>
+        </p:spPr>
+        <p:txBody>
+          <a:bodyPr wrap="square" anchor="t" lIns="0" rIns="0" tIns="0" bIns="0">
+            <a:spAutoFit/>
+          </a:bodyPr>
+          <a:lstStyle/>
+          <a:p>
+            <a:pPr algn="l">
+              <a:lnSpc>
+                <a:spcPct val="110000"/>
+              </a:lnSpc>
+              <a:spcAft>
+                <a:spcPts val="600"/>
+              </a:spcAft>
+            </a:pPr>
+            <a:r>
+              <a:rPr sz="1150" b="0" i="0">
                 <a:solidFill>
                   <a:srgbClr val="CADCFC"/>
                 </a:solidFill>
                 <a:latin typeface="Calibri"/>
               </a:rPr>
-              <a:t>Thank you.</a:t>
+              <a:t>guaranteed in every one of 15 futures</a:t>
+            </a:r>
+          </a:p>
+        </p:txBody>
+      </p:sp>
+      <p:sp>
+        <p:nvSpPr>
+          <p:cNvPr id="10" name="TextBox 9"/>
+          <p:cNvSpPr txBox="1"/>
+          <p:nvPr/>
+        </p:nvSpPr>
+        <p:spPr>
+          <a:xfrm>
+            <a:off x="868680" y="4297680"/>
+            <a:ext cx="3566160" cy="640080"/>
+          </a:xfrm>
+          <a:prstGeom prst="rect">
+            <a:avLst/>
+          </a:prstGeom>
+          <a:noFill/>
+        </p:spPr>
+        <p:txBody>
+          <a:bodyPr wrap="square" anchor="t" lIns="0" rIns="0" tIns="0" bIns="0">
+            <a:spAutoFit/>
+          </a:bodyPr>
+          <a:lstStyle/>
+          <a:p>
+            <a:pPr algn="l">
+              <a:lnSpc>
+                <a:spcPct val="105000"/>
+              </a:lnSpc>
+              <a:spcAft>
+                <a:spcPts val="600"/>
+              </a:spcAft>
+            </a:pPr>
+            <a:r>
+              <a:rPr sz="1900" b="1" i="0">
+                <a:solidFill>
+                  <a:srgbClr val="F2B705"/>
+                </a:solidFill>
+                <a:latin typeface="Georgia"/>
+              </a:rPr>
+              <a:t>battery only if grid &lt;= 9 kW</a:t>
+            </a:r>
+          </a:p>
+        </p:txBody>
+      </p:sp>
+      <p:sp>
+        <p:nvSpPr>
+          <p:cNvPr id="11" name="TextBox 10"/>
+          <p:cNvSpPr txBox="1"/>
+          <p:nvPr/>
+        </p:nvSpPr>
+        <p:spPr>
+          <a:xfrm>
+            <a:off x="868680" y="4773168"/>
+            <a:ext cx="3566160" cy="731520"/>
+          </a:xfrm>
+          <a:prstGeom prst="rect">
+            <a:avLst/>
+          </a:prstGeom>
+          <a:noFill/>
+        </p:spPr>
+        <p:txBody>
+          <a:bodyPr wrap="square" anchor="t" lIns="0" rIns="0" tIns="0" bIns="0">
+            <a:spAutoFit/>
+          </a:bodyPr>
+          <a:lstStyle/>
+          <a:p>
+            <a:pPr algn="l">
+              <a:lnSpc>
+                <a:spcPct val="110000"/>
+              </a:lnSpc>
+              <a:spcAft>
+                <a:spcPts val="600"/>
+              </a:spcAft>
+            </a:pPr>
+            <a:r>
+              <a:rPr sz="1150" b="0" i="0">
+                <a:solidFill>
+                  <a:srgbClr val="CADCFC"/>
+                </a:solidFill>
+                <a:latin typeface="Calibri"/>
+              </a:rPr>
+              <a:t>the storage boundary, located by sweep</a:t>
+            </a:r>
+          </a:p>
+        </p:txBody>
+      </p:sp>
+      <p:sp>
+        <p:nvSpPr>
+          <p:cNvPr id="12" name="TextBox 11"/>
+          <p:cNvSpPr txBox="1"/>
+          <p:nvPr/>
+        </p:nvSpPr>
+        <p:spPr>
+          <a:xfrm>
+            <a:off x="4709160" y="4297680"/>
+            <a:ext cx="3566160" cy="640080"/>
+          </a:xfrm>
+          <a:prstGeom prst="rect">
+            <a:avLst/>
+          </a:prstGeom>
+          <a:noFill/>
+        </p:spPr>
+        <p:txBody>
+          <a:bodyPr wrap="square" anchor="t" lIns="0" rIns="0" tIns="0" bIns="0">
+            <a:spAutoFit/>
+          </a:bodyPr>
+          <a:lstStyle/>
+          <a:p>
+            <a:pPr algn="l">
+              <a:lnSpc>
+                <a:spcPct val="105000"/>
+              </a:lnSpc>
+              <a:spcAft>
+                <a:spcPts val="600"/>
+              </a:spcAft>
+            </a:pPr>
+            <a:r>
+              <a:rPr sz="1900" b="1" i="0">
+                <a:solidFill>
+                  <a:srgbClr val="F2B705"/>
+                </a:solidFill>
+                <a:latin typeface="Georgia"/>
+              </a:rPr>
+              <a:t>9/9 validated</a:t>
+            </a:r>
+          </a:p>
+        </p:txBody>
+      </p:sp>
+      <p:sp>
+        <p:nvSpPr>
+          <p:cNvPr id="13" name="TextBox 12"/>
+          <p:cNvSpPr txBox="1"/>
+          <p:nvPr/>
+        </p:nvSpPr>
+        <p:spPr>
+          <a:xfrm>
+            <a:off x="4709160" y="4773168"/>
+            <a:ext cx="3566160" cy="731520"/>
+          </a:xfrm>
+          <a:prstGeom prst="rect">
+            <a:avLst/>
+          </a:prstGeom>
+          <a:noFill/>
+        </p:spPr>
+        <p:txBody>
+          <a:bodyPr wrap="square" anchor="t" lIns="0" rIns="0" tIns="0" bIns="0">
+            <a:spAutoFit/>
+          </a:bodyPr>
+          <a:lstStyle/>
+          <a:p>
+            <a:pPr algn="l">
+              <a:lnSpc>
+                <a:spcPct val="110000"/>
+              </a:lnSpc>
+              <a:spcAft>
+                <a:spcPts val="600"/>
+              </a:spcAft>
+            </a:pPr>
+            <a:r>
+              <a:rPr sz="1150" b="0" i="0">
+                <a:solidFill>
+                  <a:srgbClr val="CADCFC"/>
+                </a:solidFill>
+                <a:latin typeface="Calibri"/>
+              </a:rPr>
+              <a:t>outputs &amp; inputs within published ranges</a:t>
+            </a:r>
+          </a:p>
+        </p:txBody>
+      </p:sp>
+      <p:sp>
+        <p:nvSpPr>
+          <p:cNvPr id="14" name="TextBox 13"/>
+          <p:cNvSpPr txBox="1"/>
+          <p:nvPr/>
+        </p:nvSpPr>
+        <p:spPr>
+          <a:xfrm>
+            <a:off x="8549640" y="4297680"/>
+            <a:ext cx="3566160" cy="640080"/>
+          </a:xfrm>
+          <a:prstGeom prst="rect">
+            <a:avLst/>
+          </a:prstGeom>
+          <a:noFill/>
+        </p:spPr>
+        <p:txBody>
+          <a:bodyPr wrap="square" anchor="t" lIns="0" rIns="0" tIns="0" bIns="0">
+            <a:spAutoFit/>
+          </a:bodyPr>
+          <a:lstStyle/>
+          <a:p>
+            <a:pPr algn="l">
+              <a:lnSpc>
+                <a:spcPct val="105000"/>
+              </a:lnSpc>
+              <a:spcAft>
+                <a:spcPts val="600"/>
+              </a:spcAft>
+            </a:pPr>
+            <a:r>
+              <a:rPr sz="1900" b="1" i="0">
+                <a:solidFill>
+                  <a:srgbClr val="F2B705"/>
+                </a:solidFill>
+                <a:latin typeface="Georgia"/>
+              </a:rPr>
+              <a:t>3.7 tCO2/yr avoided</a:t>
+            </a:r>
+          </a:p>
+        </p:txBody>
+      </p:sp>
+      <p:sp>
+        <p:nvSpPr>
+          <p:cNvPr id="15" name="TextBox 14"/>
+          <p:cNvSpPr txBox="1"/>
+          <p:nvPr/>
+        </p:nvSpPr>
+        <p:spPr>
+          <a:xfrm>
+            <a:off x="8549640" y="4773168"/>
+            <a:ext cx="3566160" cy="731520"/>
+          </a:xfrm>
+          <a:prstGeom prst="rect">
+            <a:avLst/>
+          </a:prstGeom>
+          <a:noFill/>
+        </p:spPr>
+        <p:txBody>
+          <a:bodyPr wrap="square" anchor="t" lIns="0" rIns="0" tIns="0" bIns="0">
+            <a:spAutoFit/>
+          </a:bodyPr>
+          <a:lstStyle/>
+          <a:p>
+            <a:pPr algn="l">
+              <a:lnSpc>
+                <a:spcPct val="110000"/>
+              </a:lnSpc>
+              <a:spcAft>
+                <a:spcPts val="600"/>
+              </a:spcAft>
+            </a:pPr>
+            <a:r>
+              <a:rPr sz="1150" b="0" i="0">
+                <a:solidFill>
+                  <a:srgbClr val="CADCFC"/>
+                </a:solidFill>
+                <a:latin typeface="Calibri"/>
+              </a:rPr>
+              <a:t>15% vs grid-only, marginal basis</a:t>
+            </a:r>
+          </a:p>
+        </p:txBody>
+      </p:sp>
+      <p:sp>
+        <p:nvSpPr>
+          <p:cNvPr id="16" name="TextBox 15"/>
+          <p:cNvSpPr txBox="1"/>
+          <p:nvPr/>
+        </p:nvSpPr>
+        <p:spPr>
+          <a:xfrm>
+            <a:off x="868680" y="5943600"/>
+            <a:ext cx="10424160" cy="457200"/>
+          </a:xfrm>
+          <a:prstGeom prst="rect">
+            <a:avLst/>
+          </a:prstGeom>
+          <a:noFill/>
+        </p:spPr>
+        <p:txBody>
+          <a:bodyPr wrap="square" anchor="t" lIns="0" rIns="0" tIns="0" bIns="0">
+            <a:spAutoFit/>
+          </a:bodyPr>
+          <a:lstStyle/>
+          <a:p>
+            <a:pPr algn="l">
+              <a:lnSpc>
+                <a:spcPct val="105000"/>
+              </a:lnSpc>
+              <a:spcAft>
+                <a:spcPts val="600"/>
+              </a:spcAft>
+            </a:pPr>
+            <a:r>
+              <a:rPr sz="1200" b="0" i="0">
+                <a:solidFill>
+                  <a:srgbClr val="FFFFFF"/>
+                </a:solidFill>
+                <a:latin typeface="Calibri"/>
+              </a:rPr>
+              <a:t>Live demo: gourav88502.github.io/emicromobility-robust-charging    -    Code, data &amp; tests: github.com/Gourav88502/emicromobility-robust-charging  (MIT, one-command reproducible)</a:t>
             </a:r>
           </a:p>
         </p:txBody>

--- a/outputs/Presentation.pptx
+++ b/outputs/Presentation.pptx
@@ -11,7 +11,6 @@
     <p:sldId id="259" r:id="rId10"/>
     <p:sldId id="260" r:id="rId11"/>
     <p:sldId id="261" r:id="rId12"/>
-    <p:sldId id="262" r:id="rId13"/>
   </p:sldIdLst>
   <p:sldSz cx="12191695" cy="6858000" type="screen4x3"/>
   <p:notesSz cx="6858000" cy="9144000"/>
@@ -508,7 +507,7 @@
           <a:lstStyle/>
           <a:p>
             <a:r>
-              <a:t>[Slide 1]  Good morning. Charging infrastructure for shared e-bikes hides a trap: size a solar hub for average demand and it strands the fleet at peaks; size it for the worst case and capital sits idle. We asked the sharper question - which hub do you build when the future is uncertain? - and answered it with robust optimisation on real data. In three minutes you will see the model itself run live.</a:t>
+              <a:t>[Slide 1]  Good morning. Instead of asking how large a charger should be for average demand, our prototype asks what design still works when demand, grid limits and future growth change. A hub sized for the average strands bikes on busy days; an oversized one wastes capital. We answer this with robust optimisation on open data - and in three minutes you will see it run live.</a:t>
             </a:r>
           </a:p>
         </p:txBody>
@@ -578,7 +577,7 @@
           <a:lstStyle/>
           <a:p>
             <a:r>
-              <a:t>[Slide 2]  The case: UoW Bikes charges a mixed fleet at a campus depot behind a fifteen-kilowatt grid connection - upgrading that wire means a slow, expensive network reinforcement, so peaks must be met on site. Demand swings with term-time, weather and growth; our Low, Medium and High scenarios are built from real DfT monitoring data, so the demand range is observed, not assumed. The decision is set today - solar, battery, bays - but must perform for years.</a:t>
+              <a:t>[Slide 2]  The method in one breath. Demand is calibrated to the UoW Bikes use case from open shared-micromobility evidence; solar comes from PVGIS for Coventry and grid carbon from National Grid ESO. Every candidate hub is simulated over all eight thousand seven hundred and sixty hours of a year. One hundred and fifty designs are scored across fifteen futures under five decision rules - and we recommend the one that still performs well when the future is worse than expected.</a:t>
             </a:r>
           </a:p>
         </p:txBody>
@@ -648,7 +647,7 @@
           <a:lstStyle/>
           <a:p>
             <a:r>
-              <a:t>[Slide 3]  The approach in one breath: real solar from PVGIS, real carbon from National Grid, real demand from DfT. Fifteen probability-weighted futures. For every candidate hub we simulate all eight thousand seven hundred and sixty hours of the year - solar first, then battery, then the capped grid. A hundred and fifty designs are scored under five decision rules, from naive to maximin, and the winner is stress-tested until the conclusion itself proves robust.</a:t>
+              <a:t>[Slide 3]  The recommended design is 15 kilowatt-peak of solar, zero kilowatt-hours of battery, and 8 smart-managed bays. Twenty-nine thousand four hundred pounds of capital, twenty-five pence per kilowatt-hour delivered, and three point seven tonnes of CO2 avoided each year. The reason there is no battery: a returned bike only needs to be ready by morning, so smart charging schedules the energy into sunny and off-peak hours and the load never breaks the fifteen-kilowatt connection.</a:t>
             </a:r>
           </a:p>
         </p:txBody>
@@ -718,7 +717,7 @@
           <a:lstStyle/>
           <a:p>
             <a:r>
-              <a:t>[Slide 4]  The result. The naive hub is cheapest on an average day but collapses in the high-demand future: forty-seven thousand pounds a year and one bike in twenty-one stranded. The robust hub - fifteen kilowatt-peak of solar and eight smart-managed bays - cuts that worst case by fifty-nine percent and guarantees ninety-nine point six percent service. And the surprise: no battery. Smart charging flattens the load below the grid limit, so at a connected site storage adds cost and embodied carbon for nothing. Everything is off-the-shelf hardware, validated nine-for-nine against published benchmarks.</a:t>
+              <a:t>[Slide 4]  What does robustness buy? The average-demand design looks cheapest on a normal day, but in the worst demand future its cost reaches forty-seven thousand pounds a year and it strands one bike in twenty-one. The robust design cuts that worst case by nearly sixty percent and lifts guaranteed service from ninety-five point three to ninety-nine point six percent. And we stress-tested the conclusion itself: it held in one hundred percent of thirty-five assumption combinations.</a:t>
             </a:r>
           </a:p>
         </p:txBody>
@@ -788,7 +787,7 @@
           <a:lstStyle/>
           <a:p>
             <a:r>
-              <a:t>[Slide 5]  Scaling, safety, cost. A city scales by copying twenty-nine-thousand-pound modular hubs - no grid reinforcement - and under the UK-India partnership the same pipeline re-sizes for Indian solar and two- and three-wheeler fleets. Safety is standards-mapped: LFP chemistry where storage is used, BS EN battery standards, IP65 bays, and the peak is enforced in software and hardware. Costs are end-to-end: twenty-five pence per kilowatt-hour delivered, and three point seven tonnes of CO2 avoided every year, stated honestly on a marginal basis.</a:t>
+              <a:t>[Slide 5]  This result is not anti-battery. It shows that for a connected Warwick campus hub, smart charging gives the required robustness without extra battery cost, degradation or material impact. We swept the grid connection to find exactly where that changes: at roughly eight to ten kilowatts, storage starts entering the optimal design - and there we specify LFP chemistry with second-life reuse. The most sustainable battery is sometimes the one you do not need to install.</a:t>
             </a:r>
           </a:p>
         </p:txBody>
@@ -858,77 +857,7 @@
           <a:lstStyle/>
           <a:p>
             <a:r>
-              <a:t>[Slide 6]  That is the argument - now watch the model make it. The demonstration you are about to see is not a video and not slides: the full dispatch engine runs live in the browser, validated against our Python pipeline at load time. Four things to watch: the hub animated hour by hour; the naive design failing where the robust one holds; the browser re-searching all one hundred and fifty designs in about a second; and a battery entering the design the moment the grid weakens to eight kilowatts. Over to the demo.</a:t>
-            </a:r>
-          </a:p>
-        </p:txBody>
-      </p:sp>
-      <p:sp>
-        <p:nvSpPr>
-          <p:cNvPr id="4" name="Slide Number Placeholder 3"/>
-          <p:cNvSpPr>
-            <a:spLocks noGrp="1"/>
-          </p:cNvSpPr>
-          <p:nvPr>
-            <p:ph type="sldNum" idx="5" sz="quarter"/>
-          </p:nvPr>
-        </p:nvSpPr>
-        <p:spPr/>
-      </p:sp>
-    </p:spTree>
-  </p:cSld>
-  <p:clrMapOvr>
-    <a:masterClrMapping/>
-  </p:clrMapOvr>
-</p:notes>
-</file>
-
-<file path=ppt/notesSlides/notesSlide7.xml><?xml version="1.0" encoding="utf-8"?>
-<p:notes xmlns:a="http://schemas.openxmlformats.org/drawingml/2006/main" xmlns:p="http://schemas.openxmlformats.org/presentationml/2006/main" xmlns:r="http://schemas.openxmlformats.org/officeDocument/2006/relationships">
-  <p:cSld>
-    <p:spTree>
-      <p:nvGrpSpPr>
-        <p:cNvPr id="1" name=""/>
-        <p:cNvGrpSpPr/>
-        <p:nvPr/>
-      </p:nvGrpSpPr>
-      <p:grpSpPr>
-        <a:xfrm>
-          <a:off x="0" y="0"/>
-          <a:ext cx="0" cy="0"/>
-          <a:chOff x="0" y="0"/>
-          <a:chExt cx="0" cy="0"/>
-        </a:xfrm>
-      </p:grpSpPr>
-      <p:sp>
-        <p:nvSpPr>
-          <p:cNvPr id="2" name="Slide Image Placeholder 1"/>
-          <p:cNvSpPr>
-            <a:spLocks noGrp="1"/>
-          </p:cNvSpPr>
-          <p:nvPr>
-            <p:ph type="sldImg" idx="2"/>
-          </p:nvPr>
-        </p:nvSpPr>
-        <p:spPr/>
-      </p:sp>
-      <p:sp>
-        <p:nvSpPr>
-          <p:cNvPr id="3" name="Notes Placeholder 2"/>
-          <p:cNvSpPr>
-            <a:spLocks noGrp="1"/>
-          </p:cNvSpPr>
-          <p:nvPr>
-            <p:ph type="body" idx="3" sz="quarter"/>
-          </p:nvPr>
-        </p:nvSpPr>
-        <p:spPr/>
-        <p:txBody>
-          <a:bodyPr/>
-          <a:lstStyle/>
-          <a:p>
-            <a:r>
-              <a:t>[Slide 7]  (Q&amp;A backdrop - leave on screen. Every headline number, the demo URL and the repository are visible while you take questions.)</a:t>
+              <a:t>[Slide 6]  That is the argument - now the prototype makes it live: the full model runs in the browser, checks itself against our Python pipeline, and works offline. Watch four things: the recommendation recomputed in front of you; the average-demand design failing where the robust one holds; a battery entering the design when the grid weakens to eight kilowatts; and the validation behind every number. Over to the demo.</a:t>
             </a:r>
           </a:p>
         </p:txBody>
@@ -3950,7 +3879,7 @@
         </p:nvSpPr>
         <p:spPr>
           <a:xfrm>
-            <a:off x="0" y="2514600"/>
+            <a:off x="0" y="2240280"/>
             <a:ext cx="256032" cy="1371600"/>
           </a:xfrm>
           <a:prstGeom prst="rect">
@@ -3993,7 +3922,7 @@
         </p:nvSpPr>
         <p:spPr>
           <a:xfrm>
-            <a:off x="822960" y="1463040"/>
+            <a:off x="822960" y="1234440"/>
             <a:ext cx="10515600" cy="914400"/>
           </a:xfrm>
           <a:prstGeom prst="rect">
@@ -4016,13 +3945,13 @@
               </a:spcAft>
             </a:pPr>
             <a:r>
-              <a:rPr sz="3800" b="1" i="0">
+              <a:rPr sz="3600" b="1" i="0">
                 <a:solidFill>
                   <a:srgbClr val="FFFFFF"/>
                 </a:solidFill>
                 <a:latin typeface="Georgia"/>
               </a:rPr>
-              <a:t>Robust Solar Charging for a Shared e-Bike Fleet</a:t>
+              <a:t>Which solar charging hub should Warwick build</a:t>
             </a:r>
           </a:p>
         </p:txBody>
@@ -4035,7 +3964,7 @@
         </p:nvSpPr>
         <p:spPr>
           <a:xfrm>
-            <a:off x="822960" y="2286000"/>
+            <a:off x="822960" y="2011680"/>
             <a:ext cx="10515600" cy="822960"/>
           </a:xfrm>
           <a:prstGeom prst="rect">
@@ -4058,13 +3987,13 @@
               </a:spcAft>
             </a:pPr>
             <a:r>
-              <a:rPr sz="3000" b="1" i="0">
+              <a:rPr sz="3600" b="1" i="0">
                 <a:solidFill>
                   <a:srgbClr val="F2B705"/>
                 </a:solidFill>
                 <a:latin typeface="Georgia"/>
               </a:rPr>
-              <a:t>which hub do you build when the future is uncertain?</a:t>
+              <a:t>when e-bike demand is uncertain?</a:t>
             </a:r>
           </a:p>
         </p:txBody>
@@ -4077,8 +4006,8 @@
         </p:nvSpPr>
         <p:spPr>
           <a:xfrm>
-            <a:off x="868680" y="3429000"/>
-            <a:ext cx="10424160" cy="548640"/>
+            <a:off x="868680" y="3154680"/>
+            <a:ext cx="10424160" cy="822960"/>
           </a:xfrm>
           <a:prstGeom prst="rect">
             <a:avLst/>
@@ -4096,7 +4025,7 @@
                 <a:spcPct val="105000"/>
               </a:lnSpc>
               <a:spcAft>
-                <a:spcPts val="600"/>
+                <a:spcPts val="800"/>
               </a:spcAft>
             </a:pPr>
             <a:r>
@@ -4106,7 +4035,26 @@
                 </a:solidFill>
                 <a:latin typeface="Calibri"/>
               </a:rPr>
-              <a:t>University of Warwick campus - UoW Bikes - a 15 kW grid connection - 15 demand futures</a:t>
+              <a:t>Size a hub for average demand and it strands bikes on busy days. Oversize it and capital sits idle.</a:t>
+            </a:r>
+          </a:p>
+          <a:p>
+            <a:pPr algn="l">
+              <a:lnSpc>
+                <a:spcPct val="105000"/>
+              </a:lnSpc>
+              <a:spcAft>
+                <a:spcPts val="800"/>
+              </a:spcAft>
+            </a:pPr>
+            <a:r>
+              <a:rPr sz="1700" b="0" i="0">
+                <a:solidFill>
+                  <a:srgbClr val="CADCFC"/>
+                </a:solidFill>
+                <a:latin typeface="Calibri"/>
+              </a:rPr>
+              <a:t>Our prototype asks a sharper question: which design still works when demand, grid limits and growth change?</a:t>
             </a:r>
           </a:p>
         </p:txBody>
@@ -4119,8 +4067,8 @@
         </p:nvSpPr>
         <p:spPr>
           <a:xfrm>
-            <a:off x="868680" y="4206240"/>
-            <a:ext cx="2743200" cy="384048"/>
+            <a:off x="868680" y="4434840"/>
+            <a:ext cx="2926080" cy="384048"/>
           </a:xfrm>
           <a:prstGeom prst="roundRect">
             <a:avLst/>
@@ -4171,7 +4119,7 @@
         </p:nvSpPr>
         <p:spPr>
           <a:xfrm>
-            <a:off x="3749039" y="4206240"/>
+            <a:off x="3977639" y="4434840"/>
             <a:ext cx="3291840" cy="384048"/>
           </a:xfrm>
           <a:prstGeom prst="roundRect">
@@ -4223,8 +4171,8 @@
         </p:nvSpPr>
         <p:spPr>
           <a:xfrm>
-            <a:off x="7223760" y="4206240"/>
-            <a:ext cx="3108960" cy="384048"/>
+            <a:off x="7452360" y="4434840"/>
+            <a:ext cx="2926080" cy="384048"/>
           </a:xfrm>
           <a:prstGeom prst="roundRect">
             <a:avLst/>
@@ -4262,7 +4210,7 @@
                 </a:solidFill>
                 <a:latin typeface="Calibri"/>
               </a:rPr>
-              <a:t>Live in-browser model demo</a:t>
+              <a:t>Live in-browser prototype</a:t>
             </a:r>
           </a:p>
         </p:txBody>
@@ -4275,7 +4223,7 @@
         </p:nvSpPr>
         <p:spPr>
           <a:xfrm>
-            <a:off x="868680" y="5120640"/>
+            <a:off x="868680" y="5257800"/>
             <a:ext cx="10424160" cy="457200"/>
           </a:xfrm>
           <a:prstGeom prst="rect">
@@ -4317,7 +4265,7 @@
         </p:nvSpPr>
         <p:spPr>
           <a:xfrm>
-            <a:off x="868680" y="5623560"/>
+            <a:off x="868680" y="5760720"/>
             <a:ext cx="10424160" cy="457200"/>
           </a:xfrm>
           <a:prstGeom prst="rect">
@@ -4346,7 +4294,7 @@
                 </a:solidFill>
                 <a:latin typeface="Calibri"/>
               </a:rPr>
-              <a:t>Final Round - Sustainable e-Micromobility Stakeholder Engagement Workshop - WMG, University of Warwick - 6 July 2026</a:t>
+              <a:t>Sustainable e-Micromobility Stakeholder Engagement Workshop - WMG, University of Warwick - 6 July 2026</a:t>
             </a:r>
           </a:p>
         </p:txBody>
@@ -4385,7 +4333,7 @@
         </p:nvSpPr>
         <p:spPr>
           <a:xfrm>
-            <a:off x="640080" y="457200"/>
+            <a:off x="640080" y="411480"/>
             <a:ext cx="10972800" cy="731520"/>
           </a:xfrm>
           <a:prstGeom prst="rect">
@@ -4408,13 +4356,13 @@
               </a:spcAft>
             </a:pPr>
             <a:r>
-              <a:rPr sz="3000" b="1" i="0">
+              <a:rPr sz="2800" b="1" i="0">
                 <a:solidFill>
                   <a:srgbClr val="1B1B3A"/>
                 </a:solidFill>
                 <a:latin typeface="Georgia"/>
               </a:rPr>
-              <a:t>The case: one depot, a capped wire, an uncertain future</a:t>
+              <a:t>Method: open data, one full year, every design, five decision rules</a:t>
             </a:r>
           </a:p>
         </p:txBody>
@@ -4427,8 +4375,8 @@
         </p:nvSpPr>
         <p:spPr>
           <a:xfrm>
-            <a:off x="640080" y="1417320"/>
-            <a:ext cx="5577840" cy="4480560"/>
+            <a:off x="640080" y="1051560"/>
+            <a:ext cx="10972800" cy="457200"/>
           </a:xfrm>
           <a:prstGeom prst="rect">
             <a:avLst/>
@@ -4443,120 +4391,27 @@
           <a:p>
             <a:pPr algn="l">
               <a:lnSpc>
-                <a:spcPct val="106000"/>
+                <a:spcPct val="105000"/>
               </a:lnSpc>
               <a:spcAft>
-                <a:spcPts val="1100"/>
+                <a:spcPts val="600"/>
               </a:spcAft>
             </a:pPr>
             <a:r>
-              <a:rPr sz="1500" b="1" i="0">
-                <a:solidFill>
-                  <a:srgbClr val="1B1B3A"/>
+              <a:rPr sz="1450" b="0" i="1">
+                <a:solidFill>
+                  <a:srgbClr val="5A5A66"/>
                 </a:solidFill>
                 <a:latin typeface="Calibri"/>
               </a:rPr>
-              <a:t>Who.  </a:t>
-            </a:r>
-            <a:r>
-              <a:rPr sz="1500" b="0" i="0">
-                <a:solidFill>
-                  <a:srgbClr val="22222A"/>
-                </a:solidFill>
-                <a:latin typeface="Calibri"/>
-              </a:rPr>
-              <a:t>UoW Bikes charges a mixed fleet of shared e-bikes and e-cargo bikes at a campus depot.</a:t>
-            </a:r>
-          </a:p>
-          <a:p>
-            <a:pPr algn="l">
-              <a:lnSpc>
-                <a:spcPct val="106000"/>
-              </a:lnSpc>
-              <a:spcAft>
-                <a:spcPts val="1100"/>
-              </a:spcAft>
-            </a:pPr>
-            <a:r>
-              <a:rPr sz="1500" b="1" i="0">
-                <a:solidFill>
-                  <a:srgbClr val="1B1B3A"/>
-                </a:solidFill>
-                <a:latin typeface="Calibri"/>
-              </a:rPr>
-              <a:t>The constraint.  </a:t>
-            </a:r>
-            <a:r>
-              <a:rPr sz="1500" b="0" i="0">
-                <a:solidFill>
-                  <a:srgbClr val="22222A"/>
-                </a:solidFill>
-                <a:latin typeface="Calibri"/>
-              </a:rPr>
-              <a:t>A 15 kW grid connection; a bigger import limit means a slow, costly DNO reinforcement - so peaks must be met by solar + smart scheduling.</a:t>
-            </a:r>
-          </a:p>
-          <a:p>
-            <a:pPr algn="l">
-              <a:lnSpc>
-                <a:spcPct val="106000"/>
-              </a:lnSpc>
-              <a:spcAft>
-                <a:spcPts val="1100"/>
-              </a:spcAft>
-            </a:pPr>
-            <a:r>
-              <a:rPr sz="1500" b="1" i="0">
-                <a:solidFill>
-                  <a:srgbClr val="1B1B3A"/>
-                </a:solidFill>
-                <a:latin typeface="Calibri"/>
-              </a:rPr>
-              <a:t>The uncertainty.  </a:t>
-            </a:r>
-            <a:r>
-              <a:rPr sz="1500" b="0" i="0">
-                <a:solidFill>
-                  <a:srgbClr val="22222A"/>
-                </a:solidFill>
-                <a:latin typeface="Calibri"/>
-              </a:rPr>
-              <a:t>Demand swings with term-time, weather and 0-15%/yr growth. Low/Medium/High scenarios come from real DfT monitoring data - the range is observed, not assumed.</a:t>
-            </a:r>
-          </a:p>
-          <a:p>
-            <a:pPr algn="l">
-              <a:lnSpc>
-                <a:spcPct val="106000"/>
-              </a:lnSpc>
-              <a:spcAft>
-                <a:spcPts val="1100"/>
-              </a:spcAft>
-            </a:pPr>
-            <a:r>
-              <a:rPr sz="1500" b="1" i="0">
-                <a:solidFill>
-                  <a:srgbClr val="1B1B3A"/>
-                </a:solidFill>
-                <a:latin typeface="Calibri"/>
-              </a:rPr>
-              <a:t>The decision.  </a:t>
-            </a:r>
-            <a:r>
-              <a:rPr sz="1500" b="0" i="0">
-                <a:solidFill>
-                  <a:srgbClr val="22222A"/>
-                </a:solidFill>
-                <a:latin typeface="Calibri"/>
-              </a:rPr>
-              <a:t>PV size x battery size x number of bays - fixed today, but it must perform for years, in every plausible future.</a:t>
+              <a:t>The model chooses the design that still performs well when the future is worse than expected.</a:t>
             </a:r>
           </a:p>
         </p:txBody>
       </p:sp>
       <p:pic>
         <p:nvPicPr>
-          <p:cNvPr id="4" name="Picture 3" descr="01_scenario_demand.png"/>
+          <p:cNvPr id="4" name="Picture 3" descr="methodology_flow.png"/>
           <p:cNvPicPr>
             <a:picLocks noChangeAspect="1"/>
           </p:cNvPicPr>
@@ -4570,8 +4425,8 @@
         </p:blipFill>
         <p:spPr>
           <a:xfrm>
-            <a:off x="6400800" y="2392402"/>
-            <a:ext cx="5394960" cy="2256074"/>
+            <a:off x="3078234" y="1600200"/>
+            <a:ext cx="6005051" cy="4480560"/>
           </a:xfrm>
           <a:prstGeom prst="rect">
             <a:avLst/>
@@ -4586,8 +4441,8 @@
         </p:nvSpPr>
         <p:spPr>
           <a:xfrm>
-            <a:off x="6400800" y="5715000"/>
-            <a:ext cx="5394960" cy="457200"/>
+            <a:off x="640080" y="6172200"/>
+            <a:ext cx="10972800" cy="457200"/>
           </a:xfrm>
           <a:prstGeom prst="rect">
             <a:avLst/>
@@ -4609,55 +4464,13 @@
               </a:spcAft>
             </a:pPr>
             <a:r>
-              <a:rPr sz="1100" b="0" i="1">
-                <a:solidFill>
-                  <a:srgbClr val="5A5A66"/>
+              <a:rPr sz="1200" b="1" i="0">
+                <a:solidFill>
+                  <a:srgbClr val="2E86AB"/>
                 </a:solidFill>
                 <a:latin typeface="Calibri"/>
               </a:rPr>
-              <a:t>Demand scenarios built from real DfT shared-micromobility data.</a:t>
-            </a:r>
-          </a:p>
-        </p:txBody>
-      </p:sp>
-      <p:sp>
-        <p:nvSpPr>
-          <p:cNvPr id="6" name="TextBox 5"/>
-          <p:cNvSpPr txBox="1"/>
-          <p:nvPr/>
-        </p:nvSpPr>
-        <p:spPr>
-          <a:xfrm>
-            <a:off x="640080" y="6419088"/>
-            <a:ext cx="10972800" cy="365760"/>
-          </a:xfrm>
-          <a:prstGeom prst="rect">
-            <a:avLst/>
-          </a:prstGeom>
-          <a:noFill/>
-        </p:spPr>
-        <p:txBody>
-          <a:bodyPr wrap="square" anchor="t" lIns="0" rIns="0" tIns="0" bIns="0">
-            <a:spAutoFit/>
-          </a:bodyPr>
-          <a:lstStyle/>
-          <a:p>
-            <a:pPr algn="l">
-              <a:lnSpc>
-                <a:spcPct val="105000"/>
-              </a:lnSpc>
-              <a:spcAft>
-                <a:spcPts val="600"/>
-              </a:spcAft>
-            </a:pPr>
-            <a:r>
-              <a:rPr sz="1050" b="0" i="1">
-                <a:solidFill>
-                  <a:srgbClr val="5A5A66"/>
-                </a:solidFill>
-                <a:latin typeface="Calibri"/>
-              </a:rPr>
-              <a:t>Judging criterion: Case Understanding (10%)</a:t>
+              <a:t>UoW e-bike demand  &gt;  Coventry solar (PVGIS)  &gt;  West Midlands carbon (ESO)  &gt;  8,760-hour simulation  &gt;  150 designs  &gt;  5 decision rules  &gt;  robust recommendation</a:t>
             </a:r>
           </a:p>
         </p:txBody>
@@ -4696,7 +4509,7 @@
         </p:nvSpPr>
         <p:spPr>
           <a:xfrm>
-            <a:off x="640080" y="411480"/>
+            <a:off x="640080" y="457200"/>
             <a:ext cx="10972800" cy="731520"/>
           </a:xfrm>
           <a:prstGeom prst="rect">
@@ -4719,41 +4532,60 @@
               </a:spcAft>
             </a:pPr>
             <a:r>
-              <a:rPr sz="2800" b="1" i="0">
+              <a:rPr sz="2900" b="1" i="0">
                 <a:solidFill>
                   <a:srgbClr val="1B1B3A"/>
                 </a:solidFill>
                 <a:latin typeface="Georgia"/>
               </a:rPr>
-              <a:t>Approach: 15 futures x 8,760 hours x 150 designs x 5 decision rules</a:t>
-            </a:r>
-          </a:p>
-        </p:txBody>
-      </p:sp>
-      <p:pic>
-        <p:nvPicPr>
-          <p:cNvPr id="3" name="Picture 2" descr="methodology_flow.png"/>
-          <p:cNvPicPr>
-            <a:picLocks noChangeAspect="1"/>
-          </p:cNvPicPr>
+              <a:t>The recommendation: 15 kWp solar - 0 kWh battery - 8 smart bays</a:t>
+            </a:r>
+          </a:p>
+        </p:txBody>
+      </p:sp>
+      <p:sp>
+        <p:nvSpPr>
+          <p:cNvPr id="3" name="Rounded Rectangle 2"/>
+          <p:cNvSpPr/>
           <p:nvPr/>
-        </p:nvPicPr>
-        <p:blipFill>
-          <a:blip r:embed="rId2"/>
-          <a:stretch>
-            <a:fillRect/>
-          </a:stretch>
-        </p:blipFill>
-        <p:spPr>
-          <a:xfrm>
-            <a:off x="2833130" y="1143000"/>
-            <a:ext cx="6495259" cy="4846320"/>
-          </a:xfrm>
-          <a:prstGeom prst="rect">
-            <a:avLst/>
-          </a:prstGeom>
-        </p:spPr>
-      </p:pic>
+        </p:nvSpPr>
+        <p:spPr>
+          <a:xfrm>
+            <a:off x="640080" y="1371600"/>
+            <a:ext cx="10972800" cy="1371600"/>
+          </a:xfrm>
+          <a:prstGeom prst="roundRect">
+            <a:avLst/>
+          </a:prstGeom>
+          <a:solidFill>
+            <a:srgbClr val="1B1B3A"/>
+          </a:solidFill>
+          <a:ln>
+            <a:noFill/>
+          </a:ln>
+        </p:spPr>
+        <p:style>
+          <a:lnRef idx="1">
+            <a:schemeClr val="accent1"/>
+          </a:lnRef>
+          <a:fillRef idx="3">
+            <a:schemeClr val="accent1"/>
+          </a:fillRef>
+          <a:effectRef idx="2">
+            <a:schemeClr val="accent1"/>
+          </a:effectRef>
+          <a:fontRef idx="minor">
+            <a:schemeClr val="lt1"/>
+          </a:fontRef>
+        </p:style>
+        <p:txBody>
+          <a:bodyPr rtlCol="0" anchor="ctr"/>
+          <a:lstStyle/>
+          <a:p>
+            <a:pPr algn="ctr"/>
+          </a:p>
+        </p:txBody>
+      </p:sp>
       <p:sp>
         <p:nvSpPr>
           <p:cNvPr id="4" name="TextBox 3"/>
@@ -4762,8 +4594,191 @@
         </p:nvSpPr>
         <p:spPr>
           <a:xfrm>
-            <a:off x="640080" y="6419088"/>
-            <a:ext cx="10972800" cy="365760"/>
+            <a:off x="1005840" y="1627632"/>
+            <a:ext cx="3474720" cy="914400"/>
+          </a:xfrm>
+          <a:prstGeom prst="rect">
+            <a:avLst/>
+          </a:prstGeom>
+          <a:noFill/>
+        </p:spPr>
+        <p:txBody>
+          <a:bodyPr wrap="square" anchor="t" lIns="0" rIns="0" tIns="0" bIns="0">
+            <a:spAutoFit/>
+          </a:bodyPr>
+          <a:lstStyle/>
+          <a:p>
+            <a:pPr algn="l">
+              <a:lnSpc>
+                <a:spcPct val="105000"/>
+              </a:lnSpc>
+              <a:spcAft>
+                <a:spcPts val="200"/>
+              </a:spcAft>
+            </a:pPr>
+            <a:r>
+              <a:rPr sz="4000" b="1" i="0">
+                <a:solidFill>
+                  <a:srgbClr val="F2B705"/>
+                </a:solidFill>
+                <a:latin typeface="Georgia"/>
+              </a:rPr>
+              <a:t>15 kWp</a:t>
+            </a:r>
+          </a:p>
+          <a:p>
+            <a:pPr algn="l">
+              <a:lnSpc>
+                <a:spcPct val="105000"/>
+              </a:lnSpc>
+              <a:spcAft>
+                <a:spcPts val="200"/>
+              </a:spcAft>
+            </a:pPr>
+            <a:r>
+              <a:rPr sz="1300" b="0" i="0">
+                <a:solidFill>
+                  <a:srgbClr val="CADCFC"/>
+                </a:solidFill>
+                <a:latin typeface="Calibri"/>
+              </a:rPr>
+              <a:t>solar PV array</a:t>
+            </a:r>
+          </a:p>
+        </p:txBody>
+      </p:sp>
+      <p:sp>
+        <p:nvSpPr>
+          <p:cNvPr id="5" name="TextBox 4"/>
+          <p:cNvSpPr txBox="1"/>
+          <p:nvPr/>
+        </p:nvSpPr>
+        <p:spPr>
+          <a:xfrm>
+            <a:off x="4572000" y="1627632"/>
+            <a:ext cx="3474720" cy="914400"/>
+          </a:xfrm>
+          <a:prstGeom prst="rect">
+            <a:avLst/>
+          </a:prstGeom>
+          <a:noFill/>
+        </p:spPr>
+        <p:txBody>
+          <a:bodyPr wrap="square" anchor="t" lIns="0" rIns="0" tIns="0" bIns="0">
+            <a:spAutoFit/>
+          </a:bodyPr>
+          <a:lstStyle/>
+          <a:p>
+            <a:pPr algn="l">
+              <a:lnSpc>
+                <a:spcPct val="105000"/>
+              </a:lnSpc>
+              <a:spcAft>
+                <a:spcPts val="200"/>
+              </a:spcAft>
+            </a:pPr>
+            <a:r>
+              <a:rPr sz="4000" b="1" i="0">
+                <a:solidFill>
+                  <a:srgbClr val="F2B705"/>
+                </a:solidFill>
+                <a:latin typeface="Georgia"/>
+              </a:rPr>
+              <a:t>0 kWh</a:t>
+            </a:r>
+          </a:p>
+          <a:p>
+            <a:pPr algn="l">
+              <a:lnSpc>
+                <a:spcPct val="105000"/>
+              </a:lnSpc>
+              <a:spcAft>
+                <a:spcPts val="200"/>
+              </a:spcAft>
+            </a:pPr>
+            <a:r>
+              <a:rPr sz="1300" b="0" i="0">
+                <a:solidFill>
+                  <a:srgbClr val="CADCFC"/>
+                </a:solidFill>
+                <a:latin typeface="Calibri"/>
+              </a:rPr>
+              <a:t>battery - smart charging replaces it here</a:t>
+            </a:r>
+          </a:p>
+        </p:txBody>
+      </p:sp>
+      <p:sp>
+        <p:nvSpPr>
+          <p:cNvPr id="6" name="TextBox 5"/>
+          <p:cNvSpPr txBox="1"/>
+          <p:nvPr/>
+        </p:nvSpPr>
+        <p:spPr>
+          <a:xfrm>
+            <a:off x="8229600" y="1627632"/>
+            <a:ext cx="3200400" cy="914400"/>
+          </a:xfrm>
+          <a:prstGeom prst="rect">
+            <a:avLst/>
+          </a:prstGeom>
+          <a:noFill/>
+        </p:spPr>
+        <p:txBody>
+          <a:bodyPr wrap="square" anchor="t" lIns="0" rIns="0" tIns="0" bIns="0">
+            <a:spAutoFit/>
+          </a:bodyPr>
+          <a:lstStyle/>
+          <a:p>
+            <a:pPr algn="l">
+              <a:lnSpc>
+                <a:spcPct val="105000"/>
+              </a:lnSpc>
+              <a:spcAft>
+                <a:spcPts val="200"/>
+              </a:spcAft>
+            </a:pPr>
+            <a:r>
+              <a:rPr sz="4000" b="1" i="0">
+                <a:solidFill>
+                  <a:srgbClr val="F2B705"/>
+                </a:solidFill>
+                <a:latin typeface="Georgia"/>
+              </a:rPr>
+              <a:t>8 bays</a:t>
+            </a:r>
+          </a:p>
+          <a:p>
+            <a:pPr algn="l">
+              <a:lnSpc>
+                <a:spcPct val="105000"/>
+              </a:lnSpc>
+              <a:spcAft>
+                <a:spcPts val="200"/>
+              </a:spcAft>
+            </a:pPr>
+            <a:r>
+              <a:rPr sz="1300" b="0" i="0">
+                <a:solidFill>
+                  <a:srgbClr val="CADCFC"/>
+                </a:solidFill>
+                <a:latin typeface="Calibri"/>
+              </a:rPr>
+              <a:t>smart-managed 3 kW charging bays</a:t>
+            </a:r>
+          </a:p>
+        </p:txBody>
+      </p:sp>
+      <p:sp>
+        <p:nvSpPr>
+          <p:cNvPr id="7" name="TextBox 6"/>
+          <p:cNvSpPr txBox="1"/>
+          <p:nvPr/>
+        </p:nvSpPr>
+        <p:spPr>
+          <a:xfrm>
+            <a:off x="822960" y="3200400"/>
+            <a:ext cx="3657600" cy="822960"/>
           </a:xfrm>
           <a:prstGeom prst="rect">
             <a:avLst/>
@@ -4785,13 +4800,433 @@
               </a:spcAft>
             </a:pPr>
             <a:r>
-              <a:rPr sz="1050" b="0" i="1">
+              <a:rPr sz="3000" b="1" i="0">
+                <a:solidFill>
+                  <a:srgbClr val="1B1B3A"/>
+                </a:solidFill>
+                <a:latin typeface="Georgia"/>
+              </a:rPr>
+              <a:t>GBP 29,400</a:t>
+            </a:r>
+          </a:p>
+        </p:txBody>
+      </p:sp>
+      <p:sp>
+        <p:nvSpPr>
+          <p:cNvPr id="8" name="TextBox 7"/>
+          <p:cNvSpPr txBox="1"/>
+          <p:nvPr/>
+        </p:nvSpPr>
+        <p:spPr>
+          <a:xfrm>
+            <a:off x="822960" y="3796747"/>
+            <a:ext cx="3657600" cy="640080"/>
+          </a:xfrm>
+          <a:prstGeom prst="rect">
+            <a:avLst/>
+          </a:prstGeom>
+          <a:noFill/>
+        </p:spPr>
+        <p:txBody>
+          <a:bodyPr wrap="square" anchor="t" lIns="0" rIns="0" tIns="0" bIns="0">
+            <a:spAutoFit/>
+          </a:bodyPr>
+          <a:lstStyle/>
+          <a:p>
+            <a:pPr algn="l">
+              <a:lnSpc>
+                <a:spcPct val="105000"/>
+              </a:lnSpc>
+              <a:spcAft>
+                <a:spcPts val="600"/>
+              </a:spcAft>
+            </a:pPr>
+            <a:r>
+              <a:rPr sz="1250" b="0" i="0">
                 <a:solidFill>
                   <a:srgbClr val="5A5A66"/>
                 </a:solidFill>
                 <a:latin typeface="Calibri"/>
               </a:rPr>
-              <a:t>Judging criterion: Approach / Methodology (10%)</a:t>
+              <a:t>capital cost - off-the-shelf PV and AC bays</a:t>
+            </a:r>
+          </a:p>
+        </p:txBody>
+      </p:sp>
+      <p:sp>
+        <p:nvSpPr>
+          <p:cNvPr id="9" name="TextBox 8"/>
+          <p:cNvSpPr txBox="1"/>
+          <p:nvPr/>
+        </p:nvSpPr>
+        <p:spPr>
+          <a:xfrm>
+            <a:off x="4572000" y="3200400"/>
+            <a:ext cx="3657600" cy="822960"/>
+          </a:xfrm>
+          <a:prstGeom prst="rect">
+            <a:avLst/>
+          </a:prstGeom>
+          <a:noFill/>
+        </p:spPr>
+        <p:txBody>
+          <a:bodyPr wrap="square" anchor="t" lIns="0" rIns="0" tIns="0" bIns="0">
+            <a:spAutoFit/>
+          </a:bodyPr>
+          <a:lstStyle/>
+          <a:p>
+            <a:pPr algn="l">
+              <a:lnSpc>
+                <a:spcPct val="105000"/>
+              </a:lnSpc>
+              <a:spcAft>
+                <a:spcPts val="600"/>
+              </a:spcAft>
+            </a:pPr>
+            <a:r>
+              <a:rPr sz="3000" b="1" i="0">
+                <a:solidFill>
+                  <a:srgbClr val="2E86AB"/>
+                </a:solidFill>
+                <a:latin typeface="Georgia"/>
+              </a:rPr>
+              <a:t>GBP 0.253/kWh</a:t>
+            </a:r>
+          </a:p>
+        </p:txBody>
+      </p:sp>
+      <p:sp>
+        <p:nvSpPr>
+          <p:cNvPr id="10" name="TextBox 9"/>
+          <p:cNvSpPr txBox="1"/>
+          <p:nvPr/>
+        </p:nvSpPr>
+        <p:spPr>
+          <a:xfrm>
+            <a:off x="4572000" y="3796747"/>
+            <a:ext cx="3657600" cy="640080"/>
+          </a:xfrm>
+          <a:prstGeom prst="rect">
+            <a:avLst/>
+          </a:prstGeom>
+          <a:noFill/>
+        </p:spPr>
+        <p:txBody>
+          <a:bodyPr wrap="square" anchor="t" lIns="0" rIns="0" tIns="0" bIns="0">
+            <a:spAutoFit/>
+          </a:bodyPr>
+          <a:lstStyle/>
+          <a:p>
+            <a:pPr algn="l">
+              <a:lnSpc>
+                <a:spcPct val="105000"/>
+              </a:lnSpc>
+              <a:spcAft>
+                <a:spcPts val="600"/>
+              </a:spcAft>
+            </a:pPr>
+            <a:r>
+              <a:rPr sz="1250" b="0" i="0">
+                <a:solidFill>
+                  <a:srgbClr val="5A5A66"/>
+                </a:solidFill>
+                <a:latin typeface="Calibri"/>
+              </a:rPr>
+              <a:t>levelised cost of delivered energy</a:t>
+            </a:r>
+          </a:p>
+        </p:txBody>
+      </p:sp>
+      <p:sp>
+        <p:nvSpPr>
+          <p:cNvPr id="11" name="TextBox 10"/>
+          <p:cNvSpPr txBox="1"/>
+          <p:nvPr/>
+        </p:nvSpPr>
+        <p:spPr>
+          <a:xfrm>
+            <a:off x="8503920" y="3200400"/>
+            <a:ext cx="3291840" cy="822960"/>
+          </a:xfrm>
+          <a:prstGeom prst="rect">
+            <a:avLst/>
+          </a:prstGeom>
+          <a:noFill/>
+        </p:spPr>
+        <p:txBody>
+          <a:bodyPr wrap="square" anchor="t" lIns="0" rIns="0" tIns="0" bIns="0">
+            <a:spAutoFit/>
+          </a:bodyPr>
+          <a:lstStyle/>
+          <a:p>
+            <a:pPr algn="l">
+              <a:lnSpc>
+                <a:spcPct val="105000"/>
+              </a:lnSpc>
+              <a:spcAft>
+                <a:spcPts val="600"/>
+              </a:spcAft>
+            </a:pPr>
+            <a:r>
+              <a:rPr sz="3000" b="1" i="0">
+                <a:solidFill>
+                  <a:srgbClr val="43AA8B"/>
+                </a:solidFill>
+                <a:latin typeface="Georgia"/>
+              </a:rPr>
+              <a:t>3.7 tCO2/yr</a:t>
+            </a:r>
+          </a:p>
+        </p:txBody>
+      </p:sp>
+      <p:sp>
+        <p:nvSpPr>
+          <p:cNvPr id="12" name="TextBox 11"/>
+          <p:cNvSpPr txBox="1"/>
+          <p:nvPr/>
+        </p:nvSpPr>
+        <p:spPr>
+          <a:xfrm>
+            <a:off x="8503920" y="3796747"/>
+            <a:ext cx="3291840" cy="640080"/>
+          </a:xfrm>
+          <a:prstGeom prst="rect">
+            <a:avLst/>
+          </a:prstGeom>
+          <a:noFill/>
+        </p:spPr>
+        <p:txBody>
+          <a:bodyPr wrap="square" anchor="t" lIns="0" rIns="0" tIns="0" bIns="0">
+            <a:spAutoFit/>
+          </a:bodyPr>
+          <a:lstStyle/>
+          <a:p>
+            <a:pPr algn="l">
+              <a:lnSpc>
+                <a:spcPct val="105000"/>
+              </a:lnSpc>
+              <a:spcAft>
+                <a:spcPts val="600"/>
+              </a:spcAft>
+            </a:pPr>
+            <a:r>
+              <a:rPr sz="1250" b="0" i="0">
+                <a:solidFill>
+                  <a:srgbClr val="5A5A66"/>
+                </a:solidFill>
+                <a:latin typeface="Calibri"/>
+              </a:rPr>
+              <a:t>avoided vs grid-only charging (15%, marginal basis)</a:t>
+            </a:r>
+          </a:p>
+        </p:txBody>
+      </p:sp>
+      <p:sp>
+        <p:nvSpPr>
+          <p:cNvPr id="13" name="TextBox 12"/>
+          <p:cNvSpPr txBox="1"/>
+          <p:nvPr/>
+        </p:nvSpPr>
+        <p:spPr>
+          <a:xfrm>
+            <a:off x="822960" y="4572000"/>
+            <a:ext cx="3657600" cy="822960"/>
+          </a:xfrm>
+          <a:prstGeom prst="rect">
+            <a:avLst/>
+          </a:prstGeom>
+          <a:noFill/>
+        </p:spPr>
+        <p:txBody>
+          <a:bodyPr wrap="square" anchor="t" lIns="0" rIns="0" tIns="0" bIns="0">
+            <a:spAutoFit/>
+          </a:bodyPr>
+          <a:lstStyle/>
+          <a:p>
+            <a:pPr algn="l">
+              <a:lnSpc>
+                <a:spcPct val="105000"/>
+              </a:lnSpc>
+              <a:spcAft>
+                <a:spcPts val="600"/>
+              </a:spcAft>
+            </a:pPr>
+            <a:r>
+              <a:rPr sz="3000" b="1" i="0">
+                <a:solidFill>
+                  <a:srgbClr val="43AA8B"/>
+                </a:solidFill>
+                <a:latin typeface="Georgia"/>
+              </a:rPr>
+              <a:t>99.6%</a:t>
+            </a:r>
+          </a:p>
+        </p:txBody>
+      </p:sp>
+      <p:sp>
+        <p:nvSpPr>
+          <p:cNvPr id="14" name="TextBox 13"/>
+          <p:cNvSpPr txBox="1"/>
+          <p:nvPr/>
+        </p:nvSpPr>
+        <p:spPr>
+          <a:xfrm>
+            <a:off x="822960" y="5168347"/>
+            <a:ext cx="3657600" cy="640080"/>
+          </a:xfrm>
+          <a:prstGeom prst="rect">
+            <a:avLst/>
+          </a:prstGeom>
+          <a:noFill/>
+        </p:spPr>
+        <p:txBody>
+          <a:bodyPr wrap="square" anchor="t" lIns="0" rIns="0" tIns="0" bIns="0">
+            <a:spAutoFit/>
+          </a:bodyPr>
+          <a:lstStyle/>
+          <a:p>
+            <a:pPr algn="l">
+              <a:lnSpc>
+                <a:spcPct val="105000"/>
+              </a:lnSpc>
+              <a:spcAft>
+                <a:spcPts val="600"/>
+              </a:spcAft>
+            </a:pPr>
+            <a:r>
+              <a:rPr sz="1250" b="0" i="0">
+                <a:solidFill>
+                  <a:srgbClr val="5A5A66"/>
+                </a:solidFill>
+                <a:latin typeface="Calibri"/>
+              </a:rPr>
+              <a:t>fleet service guaranteed in the worst future</a:t>
+            </a:r>
+          </a:p>
+        </p:txBody>
+      </p:sp>
+      <p:sp>
+        <p:nvSpPr>
+          <p:cNvPr id="15" name="TextBox 14"/>
+          <p:cNvSpPr txBox="1"/>
+          <p:nvPr/>
+        </p:nvSpPr>
+        <p:spPr>
+          <a:xfrm>
+            <a:off x="4572000" y="4572000"/>
+            <a:ext cx="3657600" cy="822960"/>
+          </a:xfrm>
+          <a:prstGeom prst="rect">
+            <a:avLst/>
+          </a:prstGeom>
+          <a:noFill/>
+        </p:spPr>
+        <p:txBody>
+          <a:bodyPr wrap="square" anchor="t" lIns="0" rIns="0" tIns="0" bIns="0">
+            <a:spAutoFit/>
+          </a:bodyPr>
+          <a:lstStyle/>
+          <a:p>
+            <a:pPr algn="l">
+              <a:lnSpc>
+                <a:spcPct val="105000"/>
+              </a:lnSpc>
+              <a:spcAft>
+                <a:spcPts val="600"/>
+              </a:spcAft>
+            </a:pPr>
+            <a:r>
+              <a:rPr sz="3000" b="1" i="0">
+                <a:solidFill>
+                  <a:srgbClr val="1B1B3A"/>
+                </a:solidFill>
+                <a:latin typeface="Georgia"/>
+              </a:rPr>
+              <a:t>GBP 19,232/yr</a:t>
+            </a:r>
+          </a:p>
+        </p:txBody>
+      </p:sp>
+      <p:sp>
+        <p:nvSpPr>
+          <p:cNvPr id="16" name="TextBox 15"/>
+          <p:cNvSpPr txBox="1"/>
+          <p:nvPr/>
+        </p:nvSpPr>
+        <p:spPr>
+          <a:xfrm>
+            <a:off x="4572000" y="5168347"/>
+            <a:ext cx="3657600" cy="640080"/>
+          </a:xfrm>
+          <a:prstGeom prst="rect">
+            <a:avLst/>
+          </a:prstGeom>
+          <a:noFill/>
+        </p:spPr>
+        <p:txBody>
+          <a:bodyPr wrap="square" anchor="t" lIns="0" rIns="0" tIns="0" bIns="0">
+            <a:spAutoFit/>
+          </a:bodyPr>
+          <a:lstStyle/>
+          <a:p>
+            <a:pPr algn="l">
+              <a:lnSpc>
+                <a:spcPct val="105000"/>
+              </a:lnSpc>
+              <a:spcAft>
+                <a:spcPts val="600"/>
+              </a:spcAft>
+            </a:pPr>
+            <a:r>
+              <a:rPr sz="1250" b="0" i="0">
+                <a:solidFill>
+                  <a:srgbClr val="5A5A66"/>
+                </a:solidFill>
+                <a:latin typeface="Calibri"/>
+              </a:rPr>
+              <a:t>worst-case annual cost, all futures</a:t>
+            </a:r>
+          </a:p>
+        </p:txBody>
+      </p:sp>
+      <p:sp>
+        <p:nvSpPr>
+          <p:cNvPr id="17" name="TextBox 16"/>
+          <p:cNvSpPr txBox="1"/>
+          <p:nvPr/>
+        </p:nvSpPr>
+        <p:spPr>
+          <a:xfrm>
+            <a:off x="8503920" y="4617720"/>
+            <a:ext cx="3291840" cy="1188720"/>
+          </a:xfrm>
+          <a:prstGeom prst="rect">
+            <a:avLst/>
+          </a:prstGeom>
+          <a:noFill/>
+        </p:spPr>
+        <p:txBody>
+          <a:bodyPr wrap="square" anchor="t" lIns="0" rIns="0" tIns="0" bIns="0">
+            <a:spAutoFit/>
+          </a:bodyPr>
+          <a:lstStyle/>
+          <a:p>
+            <a:pPr algn="l">
+              <a:lnSpc>
+                <a:spcPct val="115000"/>
+              </a:lnSpc>
+              <a:spcAft>
+                <a:spcPts val="600"/>
+              </a:spcAft>
+            </a:pPr>
+            <a:r>
+              <a:rPr sz="1250" b="0" i="0">
+                <a:solidFill>
+                  <a:srgbClr val="5A5A66"/>
+                </a:solidFill>
+                <a:latin typeface="Calibri"/>
+              </a:rPr>
+              <a:t>Smart charging schedules flexible charging into sunny, cheap off-peak hours - the load stays under the 15 kW connection without storage.</a:t>
             </a:r>
           </a:p>
         </p:txBody>
@@ -4853,13 +5288,13 @@
               </a:spcAft>
             </a:pPr>
             <a:r>
-              <a:rPr sz="3000" b="1" i="0">
+              <a:rPr sz="2900" b="1" i="0">
                 <a:solidFill>
                   <a:srgbClr val="1B1B3A"/>
                 </a:solidFill>
                 <a:latin typeface="Georgia"/>
               </a:rPr>
-              <a:t>The result: robustness pays - and it is buildable today</a:t>
+              <a:t>Robust vs average-demand design - what uncertainty costs</a:t>
             </a:r>
           </a:p>
         </p:txBody>
@@ -4925,7 +5360,7 @@
                 </a:solidFill>
                 <a:latin typeface="Georgia"/>
               </a:rPr>
-              <a:t>-59%</a:t>
+              <a:t>-59.2%</a:t>
             </a:r>
           </a:p>
         </p:txBody>
@@ -4967,7 +5402,7 @@
                 </a:solidFill>
                 <a:latin typeface="Calibri"/>
               </a:rPr>
-              <a:t>worst-case annual cost vs the naive design</a:t>
+              <a:t>worst-case annual cost vs the average-demand design</a:t>
             </a:r>
           </a:p>
         </p:txBody>
@@ -5093,7 +5528,7 @@
                 </a:solidFill>
                 <a:latin typeface="Georgia"/>
               </a:rPr>
-              <a:t>15 kWp + 8 bays</a:t>
+              <a:t>100% of 35</a:t>
             </a:r>
           </a:p>
         </p:txBody>
@@ -5135,7 +5570,7 @@
                 </a:solidFill>
                 <a:latin typeface="Calibri"/>
               </a:rPr>
-              <a:t>recommended hub - GBP 29,400 CAPEX, no battery at 15 kW</a:t>
+              <a:t>stress-test combinations in which the conclusion held</a:t>
             </a:r>
           </a:p>
         </p:txBody>
@@ -5148,8 +5583,8 @@
         </p:nvSpPr>
         <p:spPr>
           <a:xfrm>
-            <a:off x="7589520" y="5120640"/>
-            <a:ext cx="4206240" cy="1097280"/>
+            <a:off x="7589520" y="5029200"/>
+            <a:ext cx="4206240" cy="1188720"/>
           </a:xfrm>
           <a:prstGeom prst="rect">
             <a:avLst/>
@@ -5177,49 +5612,7 @@
                 </a:solidFill>
                 <a:latin typeface="Calibri"/>
               </a:rPr>
-              <a:t>Off-the-shelf mono-Si PV, standard 3 kW AC bays; smart charging replaces storage at a connected site. 9/9 model outputs validated against published ranges.</a:t>
-            </a:r>
-          </a:p>
-        </p:txBody>
-      </p:sp>
-      <p:sp>
-        <p:nvSpPr>
-          <p:cNvPr id="11" name="TextBox 10"/>
-          <p:cNvSpPr txBox="1"/>
-          <p:nvPr/>
-        </p:nvSpPr>
-        <p:spPr>
-          <a:xfrm>
-            <a:off x="640080" y="6419088"/>
-            <a:ext cx="10972800" cy="365760"/>
-          </a:xfrm>
-          <a:prstGeom prst="rect">
-            <a:avLst/>
-          </a:prstGeom>
-          <a:noFill/>
-        </p:spPr>
-        <p:txBody>
-          <a:bodyPr wrap="square" anchor="t" lIns="0" rIns="0" tIns="0" bIns="0">
-            <a:spAutoFit/>
-          </a:bodyPr>
-          <a:lstStyle/>
-          <a:p>
-            <a:pPr algn="l">
-              <a:lnSpc>
-                <a:spcPct val="105000"/>
-              </a:lnSpc>
-              <a:spcAft>
-                <a:spcPts val="600"/>
-              </a:spcAft>
-            </a:pPr>
-            <a:r>
-              <a:rPr sz="1050" b="0" i="1">
-                <a:solidFill>
-                  <a:srgbClr val="5A5A66"/>
-                </a:solidFill>
-                <a:latin typeface="Calibri"/>
-              </a:rPr>
-              <a:t>Judging criteria: Technical Feasibility (10%) + headline result</a:t>
+              <a:t>Same 500-run Monte-Carlo, Sobol sensitivity and penalty x grid x horizon sweep behind every number.</a:t>
             </a:r>
           </a:p>
         </p:txBody>
@@ -5258,7 +5651,7 @@
         </p:nvSpPr>
         <p:spPr>
           <a:xfrm>
-            <a:off x="640080" y="411480"/>
+            <a:off x="640080" y="457200"/>
             <a:ext cx="10972800" cy="731520"/>
           </a:xfrm>
           <a:prstGeom prst="rect">
@@ -5281,13 +5674,13 @@
               </a:spcAft>
             </a:pPr>
             <a:r>
-              <a:rPr sz="3000" b="1" i="0">
+              <a:rPr sz="2900" b="1" i="0">
                 <a:solidFill>
                   <a:srgbClr val="1B1B3A"/>
                 </a:solidFill>
                 <a:latin typeface="Georgia"/>
               </a:rPr>
-              <a:t>Scalable, safe, and costed end-to-end</a:t>
+              <a:t>When does a battery pay? Only when the grid is weak</a:t>
             </a:r>
           </a:p>
         </p:txBody>
@@ -5300,14 +5693,14 @@
         </p:nvSpPr>
         <p:spPr>
           <a:xfrm>
-            <a:off x="640080" y="1234440"/>
-            <a:ext cx="3611880" cy="384048"/>
+            <a:off x="822960" y="2057400"/>
+            <a:ext cx="566928" cy="2103120"/>
           </a:xfrm>
           <a:prstGeom prst="roundRect">
             <a:avLst/>
           </a:prstGeom>
           <a:solidFill>
-            <a:srgbClr val="2E86AB"/>
+            <a:srgbClr val="43AA8B"/>
           </a:solidFill>
           <a:ln>
             <a:noFill/>
@@ -5328,19 +5721,10 @@
           </a:fontRef>
         </p:style>
         <p:txBody>
-          <a:bodyPr rtlCol="0" anchor="ctr" wrap="square" tIns="25400" bIns="25400"/>
+          <a:bodyPr rtlCol="0" anchor="ctr"/>
           <a:lstStyle/>
           <a:p>
             <a:pPr algn="ctr"/>
-            <a:r>
-              <a:rPr sz="1150" b="1">
-                <a:solidFill>
-                  <a:srgbClr val="FFFFFF"/>
-                </a:solidFill>
-                <a:latin typeface="Calibri"/>
-              </a:rPr>
-              <a:t>SCALABILITY</a:t>
-            </a:r>
           </a:p>
         </p:txBody>
       </p:sp>
@@ -5352,8 +5736,8 @@
         </p:nvSpPr>
         <p:spPr>
           <a:xfrm>
-            <a:off x="640080" y="1783080"/>
-            <a:ext cx="3611880" cy="4206240"/>
+            <a:off x="749808" y="1746504"/>
+            <a:ext cx="749808" cy="274320"/>
           </a:xfrm>
           <a:prstGeom prst="rect">
             <a:avLst/>
@@ -5366,135 +5750,84 @@
           </a:bodyPr>
           <a:lstStyle/>
           <a:p>
-            <a:pPr algn="l">
+            <a:pPr algn="ctr">
               <a:lnSpc>
-                <a:spcPct val="110000"/>
+                <a:spcPct val="105000"/>
               </a:lnSpc>
               <a:spcAft>
-                <a:spcPts val="800"/>
+                <a:spcPts val="600"/>
               </a:spcAft>
             </a:pPr>
             <a:r>
-              <a:rPr sz="1250" b="1" i="0">
-                <a:solidFill>
-                  <a:srgbClr val="1B1B3A"/>
+              <a:rPr sz="1200" b="1" i="0">
+                <a:solidFill>
+                  <a:srgbClr val="43AA8B"/>
                 </a:solidFill>
                 <a:latin typeface="Calibri"/>
               </a:rPr>
-              <a:t>Modular replication:</a:t>
-            </a:r>
-            <a:r>
-              <a:rPr sz="1250" b="0" i="0">
-                <a:solidFill>
-                  <a:srgbClr val="22222A"/>
+              <a:t>50</a:t>
+            </a:r>
+          </a:p>
+        </p:txBody>
+      </p:sp>
+      <p:sp>
+        <p:nvSpPr>
+          <p:cNvPr id="5" name="TextBox 4"/>
+          <p:cNvSpPr txBox="1"/>
+          <p:nvPr/>
+        </p:nvSpPr>
+        <p:spPr>
+          <a:xfrm>
+            <a:off x="749808" y="4233672"/>
+            <a:ext cx="749808" cy="274320"/>
+          </a:xfrm>
+          <a:prstGeom prst="rect">
+            <a:avLst/>
+          </a:prstGeom>
+          <a:noFill/>
+        </p:spPr>
+        <p:txBody>
+          <a:bodyPr wrap="square" anchor="t" lIns="0" rIns="0" tIns="0" bIns="0">
+            <a:spAutoFit/>
+          </a:bodyPr>
+          <a:lstStyle/>
+          <a:p>
+            <a:pPr algn="ctr">
+              <a:lnSpc>
+                <a:spcPct val="105000"/>
+              </a:lnSpc>
+              <a:spcAft>
+                <a:spcPts val="600"/>
+              </a:spcAft>
+            </a:pPr>
+            <a:r>
+              <a:rPr sz="1100" b="0" i="0">
+                <a:solidFill>
+                  <a:srgbClr val="5A5A66"/>
                 </a:solidFill>
                 <a:latin typeface="Calibri"/>
               </a:rPr>
-              <a:t> a city scales by copying GBP 29k hubs, not by grid reinforcement.</a:t>
-            </a:r>
-          </a:p>
-          <a:p>
-            <a:pPr algn="l">
-              <a:lnSpc>
-                <a:spcPct val="110000"/>
-              </a:lnSpc>
-              <a:spcAft>
-                <a:spcPts val="800"/>
-              </a:spcAft>
-            </a:pPr>
-            <a:r>
-              <a:rPr sz="1250" b="1" i="0">
-                <a:solidFill>
-                  <a:srgbClr val="1B1B3A"/>
-                </a:solidFill>
-                <a:latin typeface="Calibri"/>
-              </a:rPr>
-              <a:t>Site-agnostic pipeline:</a:t>
-            </a:r>
-            <a:r>
-              <a:rPr sz="1250" b="0" i="0">
-                <a:solidFill>
-                  <a:srgbClr val="22222A"/>
-                </a:solidFill>
-                <a:latin typeface="Calibri"/>
-              </a:rPr>
-              <a:t> swap coordinates, demand file and grid cap - the model re-sizes any site.</a:t>
-            </a:r>
-          </a:p>
-          <a:p>
-            <a:pPr algn="l">
-              <a:lnSpc>
-                <a:spcPct val="110000"/>
-              </a:lnSpc>
-              <a:spcAft>
-                <a:spcPts val="800"/>
-              </a:spcAft>
-            </a:pPr>
-            <a:r>
-              <a:rPr sz="1250" b="1" i="0">
-                <a:solidFill>
-                  <a:srgbClr val="1B1B3A"/>
-                </a:solidFill>
-                <a:latin typeface="Calibri"/>
-              </a:rPr>
-              <a:t>UK &lt;-&gt; India transfer:</a:t>
-            </a:r>
-            <a:r>
-              <a:rPr sz="1250" b="0" i="0">
-                <a:solidFill>
-                  <a:srgbClr val="22222A"/>
-                </a:solidFill>
-                <a:latin typeface="Calibri"/>
-              </a:rPr>
-              <a:t> re-run with Indian solar (~1.6x yield) and 2/3-wheeler fleets; the weak-grid battery case becomes the binding one.</a:t>
-            </a:r>
-          </a:p>
-          <a:p>
-            <a:pPr algn="l">
-              <a:lnSpc>
-                <a:spcPct val="110000"/>
-              </a:lnSpc>
-              <a:spcAft>
-                <a:spcPts val="800"/>
-              </a:spcAft>
-            </a:pPr>
-            <a:r>
-              <a:rPr sz="1250" b="1" i="0">
-                <a:solidFill>
-                  <a:srgbClr val="1B1B3A"/>
-                </a:solidFill>
-                <a:latin typeface="Calibri"/>
-              </a:rPr>
-              <a:t>Growth priced in:</a:t>
-            </a:r>
-            <a:r>
-              <a:rPr sz="1250" b="0" i="0">
-                <a:solidFill>
-                  <a:srgbClr val="22222A"/>
-                </a:solidFill>
-                <a:latin typeface="Calibri"/>
-              </a:rPr>
-              <a:t> sized across 0-15%/yr growth with saturation.</a:t>
-            </a:r>
-          </a:p>
-        </p:txBody>
-      </p:sp>
-      <p:sp>
-        <p:nvSpPr>
-          <p:cNvPr id="5" name="Rounded Rectangle 4"/>
+              <a:t>4</a:t>
+            </a:r>
+          </a:p>
+        </p:txBody>
+      </p:sp>
+      <p:sp>
+        <p:nvSpPr>
+          <p:cNvPr id="6" name="Rounded Rectangle 5"/>
           <p:cNvSpPr/>
           <p:nvPr/>
         </p:nvSpPr>
         <p:spPr>
           <a:xfrm>
-            <a:off x="4434840" y="1234440"/>
-            <a:ext cx="3611880" cy="384048"/>
+            <a:off x="1645920" y="2057400"/>
+            <a:ext cx="566928" cy="2103120"/>
           </a:xfrm>
           <a:prstGeom prst="roundRect">
             <a:avLst/>
           </a:prstGeom>
           <a:solidFill>
-            <a:srgbClr val="D9534F"/>
+            <a:srgbClr val="43AA8B"/>
           </a:solidFill>
           <a:ln>
             <a:noFill/>
@@ -5515,32 +5848,23 @@
           </a:fontRef>
         </p:style>
         <p:txBody>
-          <a:bodyPr rtlCol="0" anchor="ctr" wrap="square" tIns="25400" bIns="25400"/>
+          <a:bodyPr rtlCol="0" anchor="ctr"/>
           <a:lstStyle/>
           <a:p>
             <a:pPr algn="ctr"/>
-            <a:r>
-              <a:rPr sz="1150" b="1">
-                <a:solidFill>
-                  <a:srgbClr val="FFFFFF"/>
-                </a:solidFill>
-                <a:latin typeface="Calibri"/>
-              </a:rPr>
-              <a:t>SAFETY</a:t>
-            </a:r>
-          </a:p>
-        </p:txBody>
-      </p:sp>
-      <p:sp>
-        <p:nvSpPr>
-          <p:cNvPr id="6" name="TextBox 5"/>
+          </a:p>
+        </p:txBody>
+      </p:sp>
+      <p:sp>
+        <p:nvSpPr>
+          <p:cNvPr id="7" name="TextBox 6"/>
           <p:cNvSpPr txBox="1"/>
           <p:nvPr/>
         </p:nvSpPr>
         <p:spPr>
           <a:xfrm>
-            <a:off x="4434840" y="1783080"/>
-            <a:ext cx="3611880" cy="4206240"/>
+            <a:off x="1572768" y="1746504"/>
+            <a:ext cx="749808" cy="274320"/>
           </a:xfrm>
           <a:prstGeom prst="rect">
             <a:avLst/>
@@ -5553,129 +5877,78 @@
           </a:bodyPr>
           <a:lstStyle/>
           <a:p>
-            <a:pPr algn="l">
+            <a:pPr algn="ctr">
               <a:lnSpc>
-                <a:spcPct val="110000"/>
+                <a:spcPct val="105000"/>
               </a:lnSpc>
               <a:spcAft>
-                <a:spcPts val="800"/>
+                <a:spcPts val="600"/>
               </a:spcAft>
             </a:pPr>
             <a:r>
-              <a:rPr sz="1250" b="1" i="0">
-                <a:solidFill>
-                  <a:srgbClr val="1B1B3A"/>
+              <a:rPr sz="1200" b="1" i="0">
+                <a:solidFill>
+                  <a:srgbClr val="43AA8B"/>
                 </a:solidFill>
                 <a:latin typeface="Calibri"/>
               </a:rPr>
-              <a:t>LFP chemistry</a:t>
-            </a:r>
-            <a:r>
-              <a:rPr sz="1250" b="0" i="0">
-                <a:solidFill>
-                  <a:srgbClr val="22222A"/>
+              <a:t>50</a:t>
+            </a:r>
+          </a:p>
+        </p:txBody>
+      </p:sp>
+      <p:sp>
+        <p:nvSpPr>
+          <p:cNvPr id="8" name="TextBox 7"/>
+          <p:cNvSpPr txBox="1"/>
+          <p:nvPr/>
+        </p:nvSpPr>
+        <p:spPr>
+          <a:xfrm>
+            <a:off x="1572768" y="4233672"/>
+            <a:ext cx="749808" cy="274320"/>
+          </a:xfrm>
+          <a:prstGeom prst="rect">
+            <a:avLst/>
+          </a:prstGeom>
+          <a:noFill/>
+        </p:spPr>
+        <p:txBody>
+          <a:bodyPr wrap="square" anchor="t" lIns="0" rIns="0" tIns="0" bIns="0">
+            <a:spAutoFit/>
+          </a:bodyPr>
+          <a:lstStyle/>
+          <a:p>
+            <a:pPr algn="ctr">
+              <a:lnSpc>
+                <a:spcPct val="105000"/>
+              </a:lnSpc>
+              <a:spcAft>
+                <a:spcPts val="600"/>
+              </a:spcAft>
+            </a:pPr>
+            <a:r>
+              <a:rPr sz="1100" b="0" i="0">
+                <a:solidFill>
+                  <a:srgbClr val="5A5A66"/>
                 </a:solidFill>
                 <a:latin typeface="Calibri"/>
               </a:rPr>
-              <a:t> where storage is used - cobalt-free, higher thermal-runaway onset than NMC.</a:t>
-            </a:r>
-          </a:p>
-          <a:p>
-            <a:pPr algn="l">
-              <a:lnSpc>
-                <a:spcPct val="110000"/>
-              </a:lnSpc>
-              <a:spcAft>
-                <a:spcPts val="800"/>
-              </a:spcAft>
-            </a:pPr>
-            <a:r>
-              <a:rPr sz="1250" b="1" i="0">
-                <a:solidFill>
-                  <a:srgbClr val="1B1B3A"/>
-                </a:solidFill>
-                <a:latin typeface="Calibri"/>
-              </a:rPr>
-              <a:t>Standards-mapped:</a:t>
-            </a:r>
-            <a:r>
-              <a:rPr sz="1250" b="0" i="0">
-                <a:solidFill>
-                  <a:srgbClr val="22222A"/>
-                </a:solidFill>
-                <a:latin typeface="Calibri"/>
-              </a:rPr>
-              <a:t> BS EN 62485-5, BS EN 50604-1, BS 7671; IP65 outdoor bays; Type-B RCD per circuit.</a:t>
-            </a:r>
-          </a:p>
-          <a:p>
-            <a:pPr algn="l">
-              <a:lnSpc>
-                <a:spcPct val="110000"/>
-              </a:lnSpc>
-              <a:spcAft>
-                <a:spcPts val="800"/>
-              </a:spcAft>
-            </a:pPr>
-            <a:r>
-              <a:rPr sz="1250" b="1" i="0">
-                <a:solidFill>
-                  <a:srgbClr val="1B1B3A"/>
-                </a:solidFill>
-                <a:latin typeface="Calibri"/>
-              </a:rPr>
-              <a:t>Layout &amp; fire:</a:t>
-            </a:r>
-            <a:r>
-              <a:rPr sz="1250" b="0" i="0">
-                <a:solidFill>
-                  <a:srgbClr val="22222A"/>
-                </a:solidFill>
-                <a:latin typeface="Calibri"/>
-              </a:rPr>
-              <a:t> outdoor battery cabinet, 1 m clearance, thermal cut-off; sheltered, ventilated bays away from escape routes.</a:t>
-            </a:r>
-          </a:p>
-          <a:p>
-            <a:pPr algn="l">
-              <a:lnSpc>
-                <a:spcPct val="110000"/>
-              </a:lnSpc>
-              <a:spcAft>
-                <a:spcPts val="800"/>
-              </a:spcAft>
-            </a:pPr>
-            <a:r>
-              <a:rPr sz="1250" b="1" i="0">
-                <a:solidFill>
-                  <a:srgbClr val="1B1B3A"/>
-                </a:solidFill>
-                <a:latin typeface="Calibri"/>
-              </a:rPr>
-              <a:t>Peak enforced twice:</a:t>
-            </a:r>
-            <a:r>
-              <a:rPr sz="1250" b="0" i="0">
-                <a:solidFill>
-                  <a:srgbClr val="22222A"/>
-                </a:solidFill>
-                <a:latin typeface="Calibri"/>
-              </a:rPr>
-              <a:t> in software (EMS schedule) and hardware (supply fusing).</a:t>
-            </a:r>
-          </a:p>
-        </p:txBody>
-      </p:sp>
-      <p:sp>
-        <p:nvSpPr>
-          <p:cNvPr id="7" name="Rounded Rectangle 6"/>
+              <a:t>6</a:t>
+            </a:r>
+          </a:p>
+        </p:txBody>
+      </p:sp>
+      <p:sp>
+        <p:nvSpPr>
+          <p:cNvPr id="9" name="Rounded Rectangle 8"/>
           <p:cNvSpPr/>
           <p:nvPr/>
         </p:nvSpPr>
         <p:spPr>
           <a:xfrm>
-            <a:off x="8229600" y="1234440"/>
-            <a:ext cx="3611880" cy="384048"/>
+            <a:off x="2468880" y="3319272"/>
+            <a:ext cx="566928" cy="841247"/>
           </a:xfrm>
           <a:prstGeom prst="roundRect">
             <a:avLst/>
@@ -5702,32 +5975,23 @@
           </a:fontRef>
         </p:style>
         <p:txBody>
-          <a:bodyPr rtlCol="0" anchor="ctr" wrap="square" tIns="25400" bIns="25400"/>
+          <a:bodyPr rtlCol="0" anchor="ctr"/>
           <a:lstStyle/>
           <a:p>
             <a:pPr algn="ctr"/>
-            <a:r>
-              <a:rPr sz="1150" b="1">
-                <a:solidFill>
-                  <a:srgbClr val="FFFFFF"/>
-                </a:solidFill>
-                <a:latin typeface="Calibri"/>
-              </a:rPr>
-              <a:t>COST ANALYSIS</a:t>
-            </a:r>
-          </a:p>
-        </p:txBody>
-      </p:sp>
-      <p:sp>
-        <p:nvSpPr>
-          <p:cNvPr id="8" name="TextBox 7"/>
+          </a:p>
+        </p:txBody>
+      </p:sp>
+      <p:sp>
+        <p:nvSpPr>
+          <p:cNvPr id="10" name="TextBox 9"/>
           <p:cNvSpPr txBox="1"/>
           <p:nvPr/>
         </p:nvSpPr>
         <p:spPr>
           <a:xfrm>
-            <a:off x="8229600" y="1783080"/>
-            <a:ext cx="3611880" cy="4206240"/>
+            <a:off x="2395728" y="3008376"/>
+            <a:ext cx="749808" cy="274320"/>
           </a:xfrm>
           <a:prstGeom prst="rect">
             <a:avLst/>
@@ -5740,129 +6004,503 @@
           </a:bodyPr>
           <a:lstStyle/>
           <a:p>
-            <a:pPr algn="l">
+            <a:pPr algn="ctr">
               <a:lnSpc>
-                <a:spcPct val="110000"/>
+                <a:spcPct val="105000"/>
               </a:lnSpc>
               <a:spcAft>
-                <a:spcPts val="800"/>
+                <a:spcPts val="600"/>
               </a:spcAft>
             </a:pPr>
             <a:r>
-              <a:rPr sz="1250" b="1" i="0">
-                <a:solidFill>
-                  <a:srgbClr val="1B1B3A"/>
+              <a:rPr sz="1200" b="1" i="0">
+                <a:solidFill>
+                  <a:srgbClr val="43AA8B"/>
                 </a:solidFill>
                 <a:latin typeface="Calibri"/>
               </a:rPr>
-              <a:t>GBP 29,400 CAPEX</a:t>
-            </a:r>
-            <a:r>
-              <a:rPr sz="1250" b="0" i="0">
-                <a:solidFill>
-                  <a:srgbClr val="22222A"/>
+              <a:t>20</a:t>
+            </a:r>
+          </a:p>
+        </p:txBody>
+      </p:sp>
+      <p:sp>
+        <p:nvSpPr>
+          <p:cNvPr id="11" name="TextBox 10"/>
+          <p:cNvSpPr txBox="1"/>
+          <p:nvPr/>
+        </p:nvSpPr>
+        <p:spPr>
+          <a:xfrm>
+            <a:off x="2395728" y="4233672"/>
+            <a:ext cx="749808" cy="274320"/>
+          </a:xfrm>
+          <a:prstGeom prst="rect">
+            <a:avLst/>
+          </a:prstGeom>
+          <a:noFill/>
+        </p:spPr>
+        <p:txBody>
+          <a:bodyPr wrap="square" anchor="t" lIns="0" rIns="0" tIns="0" bIns="0">
+            <a:spAutoFit/>
+          </a:bodyPr>
+          <a:lstStyle/>
+          <a:p>
+            <a:pPr algn="ctr">
+              <a:lnSpc>
+                <a:spcPct val="105000"/>
+              </a:lnSpc>
+              <a:spcAft>
+                <a:spcPts val="600"/>
+              </a:spcAft>
+            </a:pPr>
+            <a:r>
+              <a:rPr sz="1100" b="0" i="0">
+                <a:solidFill>
+                  <a:srgbClr val="5A5A66"/>
                 </a:solidFill>
                 <a:latin typeface="Calibri"/>
               </a:rPr>
-              <a:t> - PV, bays, installation; battery-free at 15 kW.</a:t>
-            </a:r>
-          </a:p>
-          <a:p>
-            <a:pPr algn="l">
+              <a:t>8</a:t>
+            </a:r>
+          </a:p>
+        </p:txBody>
+      </p:sp>
+      <p:sp>
+        <p:nvSpPr>
+          <p:cNvPr id="12" name="Rounded Rectangle 11"/>
+          <p:cNvSpPr/>
+          <p:nvPr/>
+        </p:nvSpPr>
+        <p:spPr>
+          <a:xfrm>
+            <a:off x="3291840" y="4105656"/>
+            <a:ext cx="566928" cy="54864"/>
+          </a:xfrm>
+          <a:prstGeom prst="roundRect">
+            <a:avLst/>
+          </a:prstGeom>
+          <a:solidFill>
+            <a:srgbClr val="D9DDE6"/>
+          </a:solidFill>
+          <a:ln>
+            <a:noFill/>
+          </a:ln>
+        </p:spPr>
+        <p:style>
+          <a:lnRef idx="1">
+            <a:schemeClr val="accent1"/>
+          </a:lnRef>
+          <a:fillRef idx="3">
+            <a:schemeClr val="accent1"/>
+          </a:fillRef>
+          <a:effectRef idx="2">
+            <a:schemeClr val="accent1"/>
+          </a:effectRef>
+          <a:fontRef idx="minor">
+            <a:schemeClr val="lt1"/>
+          </a:fontRef>
+        </p:style>
+        <p:txBody>
+          <a:bodyPr rtlCol="0" anchor="ctr"/>
+          <a:lstStyle/>
+          <a:p>
+            <a:pPr algn="ctr"/>
+          </a:p>
+        </p:txBody>
+      </p:sp>
+      <p:sp>
+        <p:nvSpPr>
+          <p:cNvPr id="13" name="TextBox 12"/>
+          <p:cNvSpPr txBox="1"/>
+          <p:nvPr/>
+        </p:nvSpPr>
+        <p:spPr>
+          <a:xfrm>
+            <a:off x="3218688" y="4233672"/>
+            <a:ext cx="749808" cy="274320"/>
+          </a:xfrm>
+          <a:prstGeom prst="rect">
+            <a:avLst/>
+          </a:prstGeom>
+          <a:noFill/>
+        </p:spPr>
+        <p:txBody>
+          <a:bodyPr wrap="square" anchor="t" lIns="0" rIns="0" tIns="0" bIns="0">
+            <a:spAutoFit/>
+          </a:bodyPr>
+          <a:lstStyle/>
+          <a:p>
+            <a:pPr algn="ctr">
               <a:lnSpc>
-                <a:spcPct val="110000"/>
+                <a:spcPct val="105000"/>
               </a:lnSpc>
               <a:spcAft>
-                <a:spcPts val="800"/>
+                <a:spcPts val="600"/>
               </a:spcAft>
             </a:pPr>
             <a:r>
-              <a:rPr sz="1250" b="1" i="0">
-                <a:solidFill>
-                  <a:srgbClr val="1B1B3A"/>
+              <a:rPr sz="1100" b="0" i="0">
+                <a:solidFill>
+                  <a:srgbClr val="5A5A66"/>
                 </a:solidFill>
                 <a:latin typeface="Calibri"/>
               </a:rPr>
-              <a:t>GBP 19,232/yr worst-case</a:t>
-            </a:r>
-            <a:r>
-              <a:rPr sz="1250" b="0" i="0">
-                <a:solidFill>
-                  <a:srgbClr val="22222A"/>
+              <a:t>10</a:t>
+            </a:r>
+          </a:p>
+        </p:txBody>
+      </p:sp>
+      <p:sp>
+        <p:nvSpPr>
+          <p:cNvPr id="14" name="Rounded Rectangle 13"/>
+          <p:cNvSpPr/>
+          <p:nvPr/>
+        </p:nvSpPr>
+        <p:spPr>
+          <a:xfrm>
+            <a:off x="4114800" y="4105656"/>
+            <a:ext cx="566928" cy="54864"/>
+          </a:xfrm>
+          <a:prstGeom prst="roundRect">
+            <a:avLst/>
+          </a:prstGeom>
+          <a:solidFill>
+            <a:srgbClr val="D9DDE6"/>
+          </a:solidFill>
+          <a:ln>
+            <a:noFill/>
+          </a:ln>
+        </p:spPr>
+        <p:style>
+          <a:lnRef idx="1">
+            <a:schemeClr val="accent1"/>
+          </a:lnRef>
+          <a:fillRef idx="3">
+            <a:schemeClr val="accent1"/>
+          </a:fillRef>
+          <a:effectRef idx="2">
+            <a:schemeClr val="accent1"/>
+          </a:effectRef>
+          <a:fontRef idx="minor">
+            <a:schemeClr val="lt1"/>
+          </a:fontRef>
+        </p:style>
+        <p:txBody>
+          <a:bodyPr rtlCol="0" anchor="ctr"/>
+          <a:lstStyle/>
+          <a:p>
+            <a:pPr algn="ctr"/>
+          </a:p>
+        </p:txBody>
+      </p:sp>
+      <p:sp>
+        <p:nvSpPr>
+          <p:cNvPr id="15" name="TextBox 14"/>
+          <p:cNvSpPr txBox="1"/>
+          <p:nvPr/>
+        </p:nvSpPr>
+        <p:spPr>
+          <a:xfrm>
+            <a:off x="4041648" y="4233672"/>
+            <a:ext cx="749808" cy="274320"/>
+          </a:xfrm>
+          <a:prstGeom prst="rect">
+            <a:avLst/>
+          </a:prstGeom>
+          <a:noFill/>
+        </p:spPr>
+        <p:txBody>
+          <a:bodyPr wrap="square" anchor="t" lIns="0" rIns="0" tIns="0" bIns="0">
+            <a:spAutoFit/>
+          </a:bodyPr>
+          <a:lstStyle/>
+          <a:p>
+            <a:pPr algn="ctr">
+              <a:lnSpc>
+                <a:spcPct val="105000"/>
+              </a:lnSpc>
+              <a:spcAft>
+                <a:spcPts val="600"/>
+              </a:spcAft>
+            </a:pPr>
+            <a:r>
+              <a:rPr sz="1100" b="0" i="0">
+                <a:solidFill>
+                  <a:srgbClr val="5A5A66"/>
                 </a:solidFill>
                 <a:latin typeface="Calibri"/>
               </a:rPr>
-              <a:t> vs GBP 47,179 naive - the premium repays in the first bad year.</a:t>
-            </a:r>
-          </a:p>
-          <a:p>
-            <a:pPr algn="l">
+              <a:t>12</a:t>
+            </a:r>
+          </a:p>
+        </p:txBody>
+      </p:sp>
+      <p:sp>
+        <p:nvSpPr>
+          <p:cNvPr id="16" name="Rounded Rectangle 15"/>
+          <p:cNvSpPr/>
+          <p:nvPr/>
+        </p:nvSpPr>
+        <p:spPr>
+          <a:xfrm>
+            <a:off x="4937760" y="4105656"/>
+            <a:ext cx="566928" cy="54864"/>
+          </a:xfrm>
+          <a:prstGeom prst="roundRect">
+            <a:avLst/>
+          </a:prstGeom>
+          <a:solidFill>
+            <a:srgbClr val="D9DDE6"/>
+          </a:solidFill>
+          <a:ln>
+            <a:noFill/>
+          </a:ln>
+        </p:spPr>
+        <p:style>
+          <a:lnRef idx="1">
+            <a:schemeClr val="accent1"/>
+          </a:lnRef>
+          <a:fillRef idx="3">
+            <a:schemeClr val="accent1"/>
+          </a:fillRef>
+          <a:effectRef idx="2">
+            <a:schemeClr val="accent1"/>
+          </a:effectRef>
+          <a:fontRef idx="minor">
+            <a:schemeClr val="lt1"/>
+          </a:fontRef>
+        </p:style>
+        <p:txBody>
+          <a:bodyPr rtlCol="0" anchor="ctr"/>
+          <a:lstStyle/>
+          <a:p>
+            <a:pPr algn="ctr"/>
+          </a:p>
+        </p:txBody>
+      </p:sp>
+      <p:sp>
+        <p:nvSpPr>
+          <p:cNvPr id="17" name="TextBox 16"/>
+          <p:cNvSpPr txBox="1"/>
+          <p:nvPr/>
+        </p:nvSpPr>
+        <p:spPr>
+          <a:xfrm>
+            <a:off x="4864608" y="4233672"/>
+            <a:ext cx="749808" cy="274320"/>
+          </a:xfrm>
+          <a:prstGeom prst="rect">
+            <a:avLst/>
+          </a:prstGeom>
+          <a:noFill/>
+        </p:spPr>
+        <p:txBody>
+          <a:bodyPr wrap="square" anchor="t" lIns="0" rIns="0" tIns="0" bIns="0">
+            <a:spAutoFit/>
+          </a:bodyPr>
+          <a:lstStyle/>
+          <a:p>
+            <a:pPr algn="ctr">
               <a:lnSpc>
-                <a:spcPct val="110000"/>
+                <a:spcPct val="105000"/>
               </a:lnSpc>
               <a:spcAft>
-                <a:spcPts val="800"/>
+                <a:spcPts val="600"/>
               </a:spcAft>
             </a:pPr>
             <a:r>
-              <a:rPr sz="1250" b="1" i="0">
-                <a:solidFill>
-                  <a:srgbClr val="1B1B3A"/>
+              <a:rPr sz="1100" b="0" i="0">
+                <a:solidFill>
+                  <a:srgbClr val="5A5A66"/>
                 </a:solidFill>
                 <a:latin typeface="Calibri"/>
               </a:rPr>
-              <a:t>LCOE GBP 0.253/kWh</a:t>
-            </a:r>
-            <a:r>
-              <a:rPr sz="1250" b="0" i="0">
-                <a:solidFill>
-                  <a:srgbClr val="22222A"/>
+              <a:t>15</a:t>
+            </a:r>
+          </a:p>
+        </p:txBody>
+      </p:sp>
+      <p:sp>
+        <p:nvSpPr>
+          <p:cNvPr id="18" name="Rounded Rectangle 17"/>
+          <p:cNvSpPr/>
+          <p:nvPr/>
+        </p:nvSpPr>
+        <p:spPr>
+          <a:xfrm>
+            <a:off x="5760720" y="4105656"/>
+            <a:ext cx="566928" cy="54864"/>
+          </a:xfrm>
+          <a:prstGeom prst="roundRect">
+            <a:avLst/>
+          </a:prstGeom>
+          <a:solidFill>
+            <a:srgbClr val="D9DDE6"/>
+          </a:solidFill>
+          <a:ln>
+            <a:noFill/>
+          </a:ln>
+        </p:spPr>
+        <p:style>
+          <a:lnRef idx="1">
+            <a:schemeClr val="accent1"/>
+          </a:lnRef>
+          <a:fillRef idx="3">
+            <a:schemeClr val="accent1"/>
+          </a:fillRef>
+          <a:effectRef idx="2">
+            <a:schemeClr val="accent1"/>
+          </a:effectRef>
+          <a:fontRef idx="minor">
+            <a:schemeClr val="lt1"/>
+          </a:fontRef>
+        </p:style>
+        <p:txBody>
+          <a:bodyPr rtlCol="0" anchor="ctr"/>
+          <a:lstStyle/>
+          <a:p>
+            <a:pPr algn="ctr"/>
+          </a:p>
+        </p:txBody>
+      </p:sp>
+      <p:sp>
+        <p:nvSpPr>
+          <p:cNvPr id="19" name="TextBox 18"/>
+          <p:cNvSpPr txBox="1"/>
+          <p:nvPr/>
+        </p:nvSpPr>
+        <p:spPr>
+          <a:xfrm>
+            <a:off x="5687568" y="4233672"/>
+            <a:ext cx="749808" cy="274320"/>
+          </a:xfrm>
+          <a:prstGeom prst="rect">
+            <a:avLst/>
+          </a:prstGeom>
+          <a:noFill/>
+        </p:spPr>
+        <p:txBody>
+          <a:bodyPr wrap="square" anchor="t" lIns="0" rIns="0" tIns="0" bIns="0">
+            <a:spAutoFit/>
+          </a:bodyPr>
+          <a:lstStyle/>
+          <a:p>
+            <a:pPr algn="ctr">
+              <a:lnSpc>
+                <a:spcPct val="105000"/>
+              </a:lnSpc>
+              <a:spcAft>
+                <a:spcPts val="600"/>
+              </a:spcAft>
+            </a:pPr>
+            <a:r>
+              <a:rPr sz="1100" b="0" i="0">
+                <a:solidFill>
+                  <a:srgbClr val="5A5A66"/>
                 </a:solidFill>
                 <a:latin typeface="Calibri"/>
               </a:rPr>
-              <a:t> delivered, incl. time-of-use tariff, GBP 80/kW-yr demand charge, PV residual value, DoD-aware battery ageing.</a:t>
-            </a:r>
-          </a:p>
-          <a:p>
-            <a:pPr algn="l">
+              <a:t>18</a:t>
+            </a:r>
+          </a:p>
+        </p:txBody>
+      </p:sp>
+      <p:sp>
+        <p:nvSpPr>
+          <p:cNvPr id="20" name="Rounded Rectangle 19"/>
+          <p:cNvSpPr/>
+          <p:nvPr/>
+        </p:nvSpPr>
+        <p:spPr>
+          <a:xfrm>
+            <a:off x="6583680" y="4105656"/>
+            <a:ext cx="566928" cy="54864"/>
+          </a:xfrm>
+          <a:prstGeom prst="roundRect">
+            <a:avLst/>
+          </a:prstGeom>
+          <a:solidFill>
+            <a:srgbClr val="D9DDE6"/>
+          </a:solidFill>
+          <a:ln>
+            <a:noFill/>
+          </a:ln>
+        </p:spPr>
+        <p:style>
+          <a:lnRef idx="1">
+            <a:schemeClr val="accent1"/>
+          </a:lnRef>
+          <a:fillRef idx="3">
+            <a:schemeClr val="accent1"/>
+          </a:fillRef>
+          <a:effectRef idx="2">
+            <a:schemeClr val="accent1"/>
+          </a:effectRef>
+          <a:fontRef idx="minor">
+            <a:schemeClr val="lt1"/>
+          </a:fontRef>
+        </p:style>
+        <p:txBody>
+          <a:bodyPr rtlCol="0" anchor="ctr"/>
+          <a:lstStyle/>
+          <a:p>
+            <a:pPr algn="ctr"/>
+          </a:p>
+        </p:txBody>
+      </p:sp>
+      <p:sp>
+        <p:nvSpPr>
+          <p:cNvPr id="21" name="TextBox 20"/>
+          <p:cNvSpPr txBox="1"/>
+          <p:nvPr/>
+        </p:nvSpPr>
+        <p:spPr>
+          <a:xfrm>
+            <a:off x="6510528" y="4233672"/>
+            <a:ext cx="749808" cy="274320"/>
+          </a:xfrm>
+          <a:prstGeom prst="rect">
+            <a:avLst/>
+          </a:prstGeom>
+          <a:noFill/>
+        </p:spPr>
+        <p:txBody>
+          <a:bodyPr wrap="square" anchor="t" lIns="0" rIns="0" tIns="0" bIns="0">
+            <a:spAutoFit/>
+          </a:bodyPr>
+          <a:lstStyle/>
+          <a:p>
+            <a:pPr algn="ctr">
               <a:lnSpc>
-                <a:spcPct val="110000"/>
+                <a:spcPct val="105000"/>
               </a:lnSpc>
               <a:spcAft>
-                <a:spcPts val="800"/>
+                <a:spcPts val="600"/>
               </a:spcAft>
             </a:pPr>
             <a:r>
-              <a:rPr sz="1250" b="1" i="0">
-                <a:solidFill>
-                  <a:srgbClr val="1B1B3A"/>
+              <a:rPr sz="1100" b="0" i="0">
+                <a:solidFill>
+                  <a:srgbClr val="5A5A66"/>
                 </a:solidFill>
                 <a:latin typeface="Calibri"/>
               </a:rPr>
-              <a:t>3.7 tCO2/yr avoided</a:t>
-            </a:r>
-            <a:r>
-              <a:rPr sz="1250" b="0" i="0">
-                <a:solidFill>
-                  <a:srgbClr val="22222A"/>
-                </a:solidFill>
-                <a:latin typeface="Calibri"/>
-              </a:rPr>
-              <a:t> (15% vs grid-only, marginal basis) - 55 t over the PV lifetime.</a:t>
-            </a:r>
-          </a:p>
-        </p:txBody>
-      </p:sp>
-      <p:sp>
-        <p:nvSpPr>
-          <p:cNvPr id="9" name="TextBox 8"/>
+              <a:t>20</a:t>
+            </a:r>
+          </a:p>
+        </p:txBody>
+      </p:sp>
+      <p:sp>
+        <p:nvSpPr>
+          <p:cNvPr id="22" name="TextBox 21"/>
           <p:cNvSpPr txBox="1"/>
           <p:nvPr/>
         </p:nvSpPr>
         <p:spPr>
           <a:xfrm>
-            <a:off x="640080" y="6419088"/>
-            <a:ext cx="10972800" cy="365760"/>
+            <a:off x="822960" y="4544568"/>
+            <a:ext cx="6400800" cy="365760"/>
           </a:xfrm>
           <a:prstGeom prst="rect">
             <a:avLst/>
@@ -5884,13 +6522,232 @@
               </a:spcAft>
             </a:pPr>
             <a:r>
-              <a:rPr sz="1050" b="0" i="1">
+              <a:rPr sz="1100" b="0" i="1">
                 <a:solidFill>
                   <a:srgbClr val="5A5A66"/>
                 </a:solidFill>
                 <a:latin typeface="Calibri"/>
               </a:rPr>
-              <a:t>Judging criterion: Scalability, Safety &amp; Cost Analysis (10%)</a:t>
+              <a:t>grid connection limit (kW)  -  bars show battery kWh in the robust design</a:t>
+            </a:r>
+          </a:p>
+        </p:txBody>
+      </p:sp>
+      <p:sp>
+        <p:nvSpPr>
+          <p:cNvPr id="23" name="TextBox 22"/>
+          <p:cNvSpPr txBox="1"/>
+          <p:nvPr/>
+        </p:nvSpPr>
+        <p:spPr>
+          <a:xfrm>
+            <a:off x="822960" y="1371600"/>
+            <a:ext cx="6583680" cy="548640"/>
+          </a:xfrm>
+          <a:prstGeom prst="rect">
+            <a:avLst/>
+          </a:prstGeom>
+          <a:noFill/>
+        </p:spPr>
+        <p:txBody>
+          <a:bodyPr wrap="square" anchor="t" lIns="0" rIns="0" tIns="0" bIns="0">
+            <a:spAutoFit/>
+          </a:bodyPr>
+          <a:lstStyle/>
+          <a:p>
+            <a:pPr algn="l">
+              <a:lnSpc>
+                <a:spcPct val="105000"/>
+              </a:lnSpc>
+              <a:spcAft>
+                <a:spcPts val="600"/>
+              </a:spcAft>
+            </a:pPr>
+            <a:r>
+              <a:rPr sz="1600" b="1" i="0">
+                <a:solidFill>
+                  <a:srgbClr val="1B1B3A"/>
+                </a:solidFill>
+                <a:latin typeface="Calibri"/>
+              </a:rPr>
+              <a:t>Battery enters the optimal design at &lt;= 8 kW and is gone by 10 kW.</a:t>
+            </a:r>
+          </a:p>
+        </p:txBody>
+      </p:sp>
+      <p:sp>
+        <p:nvSpPr>
+          <p:cNvPr id="24" name="TextBox 23"/>
+          <p:cNvSpPr txBox="1"/>
+          <p:nvPr/>
+        </p:nvSpPr>
+        <p:spPr>
+          <a:xfrm>
+            <a:off x="7635240" y="1371600"/>
+            <a:ext cx="4023360" cy="4754880"/>
+          </a:xfrm>
+          <a:prstGeom prst="rect">
+            <a:avLst/>
+          </a:prstGeom>
+          <a:noFill/>
+        </p:spPr>
+        <p:txBody>
+          <a:bodyPr wrap="square" anchor="t" lIns="0" rIns="0" tIns="0" bIns="0">
+            <a:spAutoFit/>
+          </a:bodyPr>
+          <a:lstStyle/>
+          <a:p>
+            <a:pPr algn="l">
+              <a:lnSpc>
+                <a:spcPct val="112000"/>
+              </a:lnSpc>
+              <a:spcAft>
+                <a:spcPts val="1000"/>
+              </a:spcAft>
+            </a:pPr>
+            <a:r>
+              <a:rPr sz="1300" b="1" i="0">
+                <a:solidFill>
+                  <a:srgbClr val="1B1B3A"/>
+                </a:solidFill>
+                <a:latin typeface="Calibri"/>
+              </a:rPr>
+              <a:t>Not an anti-battery result.  </a:t>
+            </a:r>
+            <a:r>
+              <a:rPr sz="1300" b="0" i="0">
+                <a:solidFill>
+                  <a:srgbClr val="22222A"/>
+                </a:solidFill>
+                <a:latin typeface="Calibri"/>
+              </a:rPr>
+              <a:t>For a connected campus hub, smart charging gives the required robustness without battery cost, degradation or material impact.</a:t>
+            </a:r>
+          </a:p>
+          <a:p>
+            <a:pPr algn="l">
+              <a:lnSpc>
+                <a:spcPct val="112000"/>
+              </a:lnSpc>
+              <a:spcAft>
+                <a:spcPts val="1000"/>
+              </a:spcAft>
+            </a:pPr>
+            <a:r>
+              <a:rPr sz="1300" b="1" i="0">
+                <a:solidFill>
+                  <a:srgbClr val="1B1B3A"/>
+                </a:solidFill>
+                <a:latin typeface="Calibri"/>
+              </a:rPr>
+              <a:t>Conditional storage.  </a:t>
+            </a:r>
+            <a:r>
+              <a:rPr sz="1300" b="0" i="0">
+                <a:solidFill>
+                  <a:srgbClr val="22222A"/>
+                </a:solidFill>
+                <a:latin typeface="Calibri"/>
+              </a:rPr>
+              <a:t>When the connection weakens to roughly 8-10 kW, the model starts recommending storage.</a:t>
+            </a:r>
+          </a:p>
+          <a:p>
+            <a:pPr algn="l">
+              <a:lnSpc>
+                <a:spcPct val="112000"/>
+              </a:lnSpc>
+              <a:spcAft>
+                <a:spcPts val="1000"/>
+              </a:spcAft>
+            </a:pPr>
+            <a:r>
+              <a:rPr sz="1300" b="1" i="0">
+                <a:solidFill>
+                  <a:srgbClr val="1B1B3A"/>
+                </a:solidFill>
+                <a:latin typeface="Calibri"/>
+              </a:rPr>
+              <a:t>LFP where needed.  </a:t>
+            </a:r>
+            <a:r>
+              <a:rPr sz="1300" b="0" i="0">
+                <a:solidFill>
+                  <a:srgbClr val="22222A"/>
+                </a:solidFill>
+                <a:latin typeface="Calibri"/>
+              </a:rPr>
+              <a:t>Cobalt- and nickel-free chemistry, long cycle life; second-life reuse and recycling planned for weak-grid sites.</a:t>
+            </a:r>
+          </a:p>
+          <a:p>
+            <a:pPr algn="l">
+              <a:lnSpc>
+                <a:spcPct val="112000"/>
+              </a:lnSpc>
+              <a:spcAft>
+                <a:spcPts val="1000"/>
+              </a:spcAft>
+            </a:pPr>
+            <a:r>
+              <a:rPr sz="1300" b="1" i="0">
+                <a:solidFill>
+                  <a:srgbClr val="1B1B3A"/>
+                </a:solidFill>
+                <a:latin typeface="Calibri"/>
+              </a:rPr>
+              <a:t>Avoided impact.  </a:t>
+            </a:r>
+            <a:r>
+              <a:rPr sz="1300" b="0" i="0">
+                <a:solidFill>
+                  <a:srgbClr val="22222A"/>
+                </a:solidFill>
+                <a:latin typeface="Calibri"/>
+              </a:rPr>
+              <a:t>Skipping an unnecessary pack avoids its materials and manufacturing footprint entirely.</a:t>
+            </a:r>
+          </a:p>
+        </p:txBody>
+      </p:sp>
+      <p:sp>
+        <p:nvSpPr>
+          <p:cNvPr id="25" name="TextBox 24"/>
+          <p:cNvSpPr txBox="1"/>
+          <p:nvPr/>
+        </p:nvSpPr>
+        <p:spPr>
+          <a:xfrm>
+            <a:off x="822960" y="5120640"/>
+            <a:ext cx="6583680" cy="822960"/>
+          </a:xfrm>
+          <a:prstGeom prst="rect">
+            <a:avLst/>
+          </a:prstGeom>
+          <a:noFill/>
+        </p:spPr>
+        <p:txBody>
+          <a:bodyPr wrap="square" anchor="t" lIns="0" rIns="0" tIns="0" bIns="0">
+            <a:spAutoFit/>
+          </a:bodyPr>
+          <a:lstStyle/>
+          <a:p>
+            <a:pPr algn="l">
+              <a:lnSpc>
+                <a:spcPct val="105000"/>
+              </a:lnSpc>
+              <a:spcAft>
+                <a:spcPts val="600"/>
+              </a:spcAft>
+            </a:pPr>
+            <a:r>
+              <a:rPr sz="1600" b="1" i="1">
+                <a:solidFill>
+                  <a:srgbClr val="43AA8B"/>
+                </a:solidFill>
+                <a:latin typeface="Calibri"/>
+              </a:rPr>
+              <a:t>“The most sustainable battery is sometimes the one you do not need to install.”</a:t>
             </a:r>
           </a:p>
         </p:txBody>
@@ -5929,7 +6786,7 @@
         </p:nvSpPr>
         <p:spPr>
           <a:xfrm>
-            <a:off x="822960" y="640080"/>
+            <a:off x="822960" y="594360"/>
             <a:ext cx="10515600" cy="822960"/>
           </a:xfrm>
           <a:prstGeom prst="rect">
@@ -5952,13 +6809,13 @@
               </a:spcAft>
             </a:pPr>
             <a:r>
-              <a:rPr sz="3600" b="1" i="0">
+              <a:rPr sz="3400" b="1" i="0">
                 <a:solidFill>
                   <a:srgbClr val="F2B705"/>
                 </a:solidFill>
                 <a:latin typeface="Georgia"/>
               </a:rPr>
-              <a:t>Now - the model itself, live</a:t>
+              <a:t>Now - the prototype itself, live</a:t>
             </a:r>
           </a:p>
         </p:txBody>
@@ -5971,7 +6828,7 @@
         </p:nvSpPr>
         <p:spPr>
           <a:xfrm>
-            <a:off x="868680" y="1737360"/>
+            <a:off x="868680" y="1600200"/>
             <a:ext cx="457200" cy="457200"/>
           </a:xfrm>
           <a:prstGeom prst="ellipse">
@@ -6022,7 +6879,7 @@
         </p:nvSpPr>
         <p:spPr>
           <a:xfrm>
-            <a:off x="1554480" y="1700784"/>
+            <a:off x="1554480" y="1563624"/>
             <a:ext cx="6035040" cy="457200"/>
           </a:xfrm>
           <a:prstGeom prst="rect">
@@ -6045,13 +6902,13 @@
               </a:spcAft>
             </a:pPr>
             <a:r>
-              <a:rPr sz="1700" b="1" i="0">
+              <a:rPr sz="1650" b="1" i="0">
                 <a:solidFill>
                   <a:srgbClr val="FFFFFF"/>
                 </a:solidFill>
                 <a:latin typeface="Calibri"/>
               </a:rPr>
-              <a:t>The hub, animated</a:t>
+              <a:t>The recommendation, computed in front of you</a:t>
             </a:r>
           </a:p>
         </p:txBody>
@@ -6064,7 +6921,7 @@
         </p:nvSpPr>
         <p:spPr>
           <a:xfrm>
-            <a:off x="1554480" y="2084831"/>
+            <a:off x="1554480" y="1929384"/>
             <a:ext cx="6035040" cy="548640"/>
           </a:xfrm>
           <a:prstGeom prst="rect">
@@ -6087,13 +6944,13 @@
               </a:spcAft>
             </a:pPr>
             <a:r>
-              <a:rPr sz="1250" b="0" i="0">
+              <a:rPr sz="1200" b="0" i="0">
                 <a:solidFill>
                   <a:srgbClr val="CADCFC"/>
                 </a:solidFill>
                 <a:latin typeface="Calibri"/>
               </a:rPr>
-              <a:t>hour-by-hour dispatch of the real model - sun up, bikes out, smart charging into the sun</a:t>
+              <a:t>the browser re-runs the full 150-design optimisation in about a second</a:t>
             </a:r>
           </a:p>
         </p:txBody>
@@ -6106,7 +6963,7 @@
         </p:nvSpPr>
         <p:spPr>
           <a:xfrm>
-            <a:off x="868680" y="2761488"/>
+            <a:off x="868680" y="2532888"/>
             <a:ext cx="457200" cy="457200"/>
           </a:xfrm>
           <a:prstGeom prst="ellipse">
@@ -6157,7 +7014,7 @@
         </p:nvSpPr>
         <p:spPr>
           <a:xfrm>
-            <a:off x="1554480" y="2724912"/>
+            <a:off x="1554480" y="2496312"/>
             <a:ext cx="6035040" cy="457200"/>
           </a:xfrm>
           <a:prstGeom prst="rect">
@@ -6180,7 +7037,7 @@
               </a:spcAft>
             </a:pPr>
             <a:r>
-              <a:rPr sz="1700" b="1" i="0">
+              <a:rPr sz="1650" b="1" i="0">
                 <a:solidFill>
                   <a:srgbClr val="FFFFFF"/>
                 </a:solidFill>
@@ -6199,7 +7056,7 @@
         </p:nvSpPr>
         <p:spPr>
           <a:xfrm>
-            <a:off x="1554480" y="3108960"/>
+            <a:off x="1554480" y="2862072"/>
             <a:ext cx="6035040" cy="548640"/>
           </a:xfrm>
           <a:prstGeom prst="rect">
@@ -6222,13 +7079,13 @@
               </a:spcAft>
             </a:pPr>
             <a:r>
-              <a:rPr sz="1250" b="0" i="0">
+              <a:rPr sz="1200" b="0" i="0">
                 <a:solidFill>
                   <a:srgbClr val="CADCFC"/>
                 </a:solidFill>
                 <a:latin typeface="Calibri"/>
               </a:rPr>
-              <a:t>the naive design collapses in the worst future; the robust design holds at 99.6%</a:t>
+              <a:t>the average-demand design goes red at peaks; the robust design holds at 99.6%</a:t>
             </a:r>
           </a:p>
         </p:txBody>
@@ -6241,7 +7098,7 @@
         </p:nvSpPr>
         <p:spPr>
           <a:xfrm>
-            <a:off x="868680" y="3785616"/>
+            <a:off x="868680" y="3465576"/>
             <a:ext cx="457200" cy="457200"/>
           </a:xfrm>
           <a:prstGeom prst="ellipse">
@@ -6292,7 +7149,7 @@
         </p:nvSpPr>
         <p:spPr>
           <a:xfrm>
-            <a:off x="1554480" y="3749040"/>
+            <a:off x="1554480" y="3429000"/>
             <a:ext cx="6035040" cy="457200"/>
           </a:xfrm>
           <a:prstGeom prst="rect">
@@ -6315,13 +7172,13 @@
               </a:spcAft>
             </a:pPr>
             <a:r>
-              <a:rPr sz="1700" b="1" i="0">
+              <a:rPr sz="1650" b="1" i="0">
                 <a:solidFill>
                   <a:srgbClr val="FFFFFF"/>
                 </a:solidFill>
                 <a:latin typeface="Calibri"/>
               </a:rPr>
-              <a:t>150 designs, searched live</a:t>
+              <a:t>The battery threshold, proven live</a:t>
             </a:r>
           </a:p>
         </p:txBody>
@@ -6334,7 +7191,7 @@
         </p:nvSpPr>
         <p:spPr>
           <a:xfrm>
-            <a:off x="1554480" y="4133088"/>
+            <a:off x="1554480" y="3794760"/>
             <a:ext cx="6035040" cy="548640"/>
           </a:xfrm>
           <a:prstGeom prst="rect">
@@ -6357,13 +7214,13 @@
               </a:spcAft>
             </a:pPr>
             <a:r>
-              <a:rPr sz="1250" b="0" i="0">
+              <a:rPr sz="1200" b="0" i="0">
                 <a:solidFill>
                   <a:srgbClr val="CADCFC"/>
                 </a:solidFill>
                 <a:latin typeface="Calibri"/>
               </a:rPr>
-              <a:t>the browser re-runs the full robust optimisation - 20 million simulated hours - in about a second</a:t>
+              <a:t>weaken the grid to 8 kW and storage enters the optimal design</a:t>
             </a:r>
           </a:p>
         </p:txBody>
@@ -6376,7 +7233,7 @@
         </p:nvSpPr>
         <p:spPr>
           <a:xfrm>
-            <a:off x="868680" y="4809744"/>
+            <a:off x="868680" y="4398264"/>
             <a:ext cx="457200" cy="457200"/>
           </a:xfrm>
           <a:prstGeom prst="ellipse">
@@ -6427,7 +7284,7 @@
         </p:nvSpPr>
         <p:spPr>
           <a:xfrm>
-            <a:off x="1554480" y="4773168"/>
+            <a:off x="1554480" y="4361688"/>
             <a:ext cx="6035040" cy="457200"/>
           </a:xfrm>
           <a:prstGeom prst="rect">
@@ -6450,13 +7307,13 @@
               </a:spcAft>
             </a:pPr>
             <a:r>
-              <a:rPr sz="1700" b="1" i="0">
+              <a:rPr sz="1650" b="1" i="0">
                 <a:solidFill>
                   <a:srgbClr val="FFFFFF"/>
                 </a:solidFill>
                 <a:latin typeface="Calibri"/>
               </a:rPr>
-              <a:t>The storage boundary</a:t>
+              <a:t>Validated and reproducible</a:t>
             </a:r>
           </a:p>
         </p:txBody>
@@ -6469,7 +7326,7 @@
         </p:nvSpPr>
         <p:spPr>
           <a:xfrm>
-            <a:off x="1554480" y="5157216"/>
+            <a:off x="1554480" y="4727448"/>
             <a:ext cx="6035040" cy="548640"/>
           </a:xfrm>
           <a:prstGeom prst="rect">
@@ -6492,13 +7349,13 @@
               </a:spcAft>
             </a:pPr>
             <a:r>
-              <a:rPr sz="1250" b="0" i="0">
+              <a:rPr sz="1200" b="0" i="0">
                 <a:solidFill>
                   <a:srgbClr val="CADCFC"/>
                 </a:solidFill>
                 <a:latin typeface="Calibri"/>
               </a:rPr>
-              <a:t>weaken the grid to 8 kW and watch a battery enter the optimal design</a:t>
+              <a:t>9/9 checks in published ranges; browser matches the Python pipeline; one command rebuilds everything</a:t>
             </a:r>
           </a:p>
         </p:txBody>
@@ -6519,8 +7376,8 @@
         </p:blipFill>
         <p:spPr>
           <a:xfrm>
-            <a:off x="8503920" y="1828800"/>
-            <a:ext cx="2377440" cy="2377440"/>
+            <a:off x="8732520" y="1600200"/>
+            <a:ext cx="2194560" cy="2194560"/>
           </a:xfrm>
           <a:prstGeom prst="rect">
             <a:avLst/>
@@ -6535,8 +7392,8 @@
         </p:nvSpPr>
         <p:spPr>
           <a:xfrm>
-            <a:off x="8046720" y="4343400"/>
-            <a:ext cx="3291840" cy="457200"/>
+            <a:off x="8275320" y="3886200"/>
+            <a:ext cx="3108960" cy="457200"/>
           </a:xfrm>
           <a:prstGeom prst="rect">
             <a:avLst/>
@@ -6558,7 +7415,7 @@
               </a:spcAft>
             </a:pPr>
             <a:r>
-              <a:rPr sz="1150" b="0" i="0">
+              <a:rPr sz="1100" b="0" i="0">
                 <a:solidFill>
                   <a:srgbClr val="CADCFC"/>
                 </a:solidFill>
@@ -6577,8 +7434,8 @@
         </p:nvSpPr>
         <p:spPr>
           <a:xfrm>
-            <a:off x="8046720" y="4846320"/>
-            <a:ext cx="3291840" cy="731520"/>
+            <a:off x="8275320" y="4343400"/>
+            <a:ext cx="3108960" cy="731520"/>
           </a:xfrm>
           <a:prstGeom prst="rect">
             <a:avLst/>
@@ -6600,7 +7457,7 @@
               </a:spcAft>
             </a:pPr>
             <a:r>
-              <a:rPr sz="1300" b="1" i="0">
+              <a:rPr sz="1200" b="1" i="0">
                 <a:solidFill>
                   <a:srgbClr val="F2B705"/>
                 </a:solidFill>
@@ -6613,14 +7470,57 @@
       </p:sp>
       <p:sp>
         <p:nvSpPr>
-          <p:cNvPr id="18" name="TextBox 17"/>
+          <p:cNvPr id="18" name="Rectangle 17"/>
+          <p:cNvSpPr/>
+          <p:nvPr/>
+        </p:nvSpPr>
+        <p:spPr>
+          <a:xfrm>
+            <a:off x="868680" y="5440680"/>
+            <a:ext cx="256032" cy="868680"/>
+          </a:xfrm>
+          <a:prstGeom prst="rect">
+            <a:avLst/>
+          </a:prstGeom>
+          <a:solidFill>
+            <a:srgbClr val="43AA8B"/>
+          </a:solidFill>
+          <a:ln>
+            <a:noFill/>
+          </a:ln>
+        </p:spPr>
+        <p:style>
+          <a:lnRef idx="1">
+            <a:schemeClr val="accent1"/>
+          </a:lnRef>
+          <a:fillRef idx="3">
+            <a:schemeClr val="accent1"/>
+          </a:fillRef>
+          <a:effectRef idx="2">
+            <a:schemeClr val="accent1"/>
+          </a:effectRef>
+          <a:fontRef idx="minor">
+            <a:schemeClr val="lt1"/>
+          </a:fontRef>
+        </p:style>
+        <p:txBody>
+          <a:bodyPr rtlCol="0" anchor="ctr"/>
+          <a:lstStyle/>
+          <a:p>
+            <a:pPr algn="ctr"/>
+          </a:p>
+        </p:txBody>
+      </p:sp>
+      <p:sp>
+        <p:nvSpPr>
+          <p:cNvPr id="19" name="TextBox 18"/>
           <p:cNvSpPr txBox="1"/>
           <p:nvPr/>
         </p:nvSpPr>
         <p:spPr>
           <a:xfrm>
-            <a:off x="868680" y="5897880"/>
-            <a:ext cx="10424160" cy="457200"/>
+            <a:off x="1280160" y="5486400"/>
+            <a:ext cx="10058400" cy="914400"/>
           </a:xfrm>
           <a:prstGeom prst="rect">
             <a:avLst/>
@@ -6635,718 +7535,39 @@
           <a:p>
             <a:pPr algn="l">
               <a:lnSpc>
-                <a:spcPct val="105000"/>
+                <a:spcPct val="112000"/>
               </a:lnSpc>
               <a:spcAft>
                 <a:spcPts val="600"/>
               </a:spcAft>
             </a:pPr>
             <a:r>
-              <a:rPr sz="1200" b="0" i="1">
-                <a:solidFill>
-                  <a:srgbClr val="CADCFC"/>
-                </a:solidFill>
-                <a:latin typeface="Calibri"/>
+              <a:rPr sz="1900" b="1" i="0">
+                <a:solidFill>
+                  <a:srgbClr val="FFFFFF"/>
+                </a:solidFill>
+                <a:latin typeface="Georgia"/>
               </a:rPr>
-              <a:t>Runs in any browser - no install, works offline; every number re-derived by the page and checked against the Python pipeline at load.</a:t>
-            </a:r>
-          </a:p>
-        </p:txBody>
-      </p:sp>
-      <p:sp>
-        <p:nvSpPr>
-          <p:cNvPr id="19" name="TextBox 18"/>
-          <p:cNvSpPr txBox="1"/>
-          <p:nvPr/>
-        </p:nvSpPr>
-        <p:spPr>
-          <a:xfrm>
-            <a:off x="640080" y="6419088"/>
-            <a:ext cx="10972800" cy="365760"/>
-          </a:xfrm>
-          <a:prstGeom prst="rect">
-            <a:avLst/>
-          </a:prstGeom>
-          <a:noFill/>
-        </p:spPr>
-        <p:txBody>
-          <a:bodyPr wrap="square" anchor="t" lIns="0" rIns="0" tIns="0" bIns="0">
-            <a:spAutoFit/>
-          </a:bodyPr>
-          <a:lstStyle/>
+              <a:t>The prototype turns uncertain e-bike demand into a clear infrastructure decision:</a:t>
+            </a:r>
+          </a:p>
           <a:p>
             <a:pPr algn="l">
               <a:lnSpc>
-                <a:spcPct val="105000"/>
+                <a:spcPct val="112000"/>
               </a:lnSpc>
               <a:spcAft>
                 <a:spcPts val="600"/>
               </a:spcAft>
             </a:pPr>
             <a:r>
-              <a:rPr sz="1050" b="0" i="1">
-                <a:solidFill>
-                  <a:srgbClr val="CADCFC"/>
-                </a:solidFill>
-                <a:latin typeface="Calibri"/>
-              </a:rPr>
-              <a:t>Judging criterion: Demonstration of Model (40%) - handoff to the live demo</a:t>
-            </a:r>
-          </a:p>
-        </p:txBody>
-      </p:sp>
-    </p:spTree>
-  </p:cSld>
-  <p:clrMapOvr>
-    <a:masterClrMapping/>
-  </p:clrMapOvr>
-</p:sld>
-</file>
-
-<file path=ppt/slides/slide7.xml><?xml version="1.0" encoding="utf-8"?>
-<p:sld xmlns:a="http://schemas.openxmlformats.org/drawingml/2006/main" xmlns:p="http://schemas.openxmlformats.org/presentationml/2006/main" xmlns:r="http://schemas.openxmlformats.org/officeDocument/2006/relationships">
-  <p:cSld>
-    <p:bg>
-      <p:bgPr>
-        <a:solidFill>
-          <a:srgbClr val="1B1B3A"/>
-        </a:solidFill>
-        <a:effectLst/>
-      </p:bgPr>
-    </p:bg>
-    <p:spTree>
-      <p:nvGrpSpPr>
-        <p:cNvPr id="1" name=""/>
-        <p:cNvGrpSpPr/>
-        <p:nvPr/>
-      </p:nvGrpSpPr>
-      <p:grpSpPr/>
-      <p:sp>
-        <p:nvSpPr>
-          <p:cNvPr id="2" name="TextBox 1"/>
-          <p:cNvSpPr txBox="1"/>
-          <p:nvPr/>
-        </p:nvSpPr>
-        <p:spPr>
-          <a:xfrm>
-            <a:off x="822960" y="640080"/>
-            <a:ext cx="10515600" cy="731520"/>
-          </a:xfrm>
-          <a:prstGeom prst="rect">
-            <a:avLst/>
-          </a:prstGeom>
-          <a:noFill/>
-        </p:spPr>
-        <p:txBody>
-          <a:bodyPr wrap="square" anchor="t" lIns="0" rIns="0" tIns="0" bIns="0">
-            <a:spAutoFit/>
-          </a:bodyPr>
-          <a:lstStyle/>
-          <a:p>
-            <a:pPr algn="l">
-              <a:lnSpc>
-                <a:spcPct val="105000"/>
-              </a:lnSpc>
-              <a:spcAft>
-                <a:spcPts val="600"/>
-              </a:spcAft>
-            </a:pPr>
-            <a:r>
-              <a:rPr sz="3400" b="1" i="0">
+              <a:rPr sz="1900" b="1" i="0">
                 <a:solidFill>
                   <a:srgbClr val="F2B705"/>
                 </a:solidFill>
                 <a:latin typeface="Georgia"/>
               </a:rPr>
-              <a:t>Questions welcome</a:t>
-            </a:r>
-          </a:p>
-        </p:txBody>
-      </p:sp>
-      <p:sp>
-        <p:nvSpPr>
-          <p:cNvPr id="3" name="TextBox 2"/>
-          <p:cNvSpPr txBox="1"/>
-          <p:nvPr/>
-        </p:nvSpPr>
-        <p:spPr>
-          <a:xfrm>
-            <a:off x="868680" y="1600200"/>
-            <a:ext cx="10424160" cy="822960"/>
-          </a:xfrm>
-          <a:prstGeom prst="rect">
-            <a:avLst/>
-          </a:prstGeom>
-          <a:noFill/>
-        </p:spPr>
-        <p:txBody>
-          <a:bodyPr wrap="square" anchor="t" lIns="0" rIns="0" tIns="0" bIns="0">
-            <a:spAutoFit/>
-          </a:bodyPr>
-          <a:lstStyle/>
-          <a:p>
-            <a:pPr algn="l">
-              <a:lnSpc>
-                <a:spcPct val="105000"/>
-              </a:lnSpc>
-              <a:spcAft>
-                <a:spcPts val="600"/>
-              </a:spcAft>
-            </a:pPr>
-            <a:r>
-              <a:rPr sz="1900" b="0" i="1">
-                <a:solidFill>
-                  <a:srgbClr val="FFFFFF"/>
-                </a:solidFill>
-                <a:latin typeface="Calibri"/>
-              </a:rPr>
-              <a:t>We turn demand uncertainty from a risk into a design input - and show that robustness pays.</a:t>
-            </a:r>
-          </a:p>
-        </p:txBody>
-      </p:sp>
-      <p:sp>
-        <p:nvSpPr>
-          <p:cNvPr id="4" name="TextBox 3"/>
-          <p:cNvSpPr txBox="1"/>
-          <p:nvPr/>
-        </p:nvSpPr>
-        <p:spPr>
-          <a:xfrm>
-            <a:off x="868680" y="2651760"/>
-            <a:ext cx="3566160" cy="640080"/>
-          </a:xfrm>
-          <a:prstGeom prst="rect">
-            <a:avLst/>
-          </a:prstGeom>
-          <a:noFill/>
-        </p:spPr>
-        <p:txBody>
-          <a:bodyPr wrap="square" anchor="t" lIns="0" rIns="0" tIns="0" bIns="0">
-            <a:spAutoFit/>
-          </a:bodyPr>
-          <a:lstStyle/>
-          <a:p>
-            <a:pPr algn="l">
-              <a:lnSpc>
-                <a:spcPct val="105000"/>
-              </a:lnSpc>
-              <a:spcAft>
-                <a:spcPts val="600"/>
-              </a:spcAft>
-            </a:pPr>
-            <a:r>
-              <a:rPr sz="1900" b="1" i="0">
-                <a:solidFill>
-                  <a:srgbClr val="F2B705"/>
-                </a:solidFill>
-                <a:latin typeface="Georgia"/>
-              </a:rPr>
-              <a:t>15 kWp / 0 kWh / 8 bays</a:t>
-            </a:r>
-          </a:p>
-        </p:txBody>
-      </p:sp>
-      <p:sp>
-        <p:nvSpPr>
-          <p:cNvPr id="5" name="TextBox 4"/>
-          <p:cNvSpPr txBox="1"/>
-          <p:nvPr/>
-        </p:nvSpPr>
-        <p:spPr>
-          <a:xfrm>
-            <a:off x="868680" y="3127248"/>
-            <a:ext cx="3566160" cy="731520"/>
-          </a:xfrm>
-          <a:prstGeom prst="rect">
-            <a:avLst/>
-          </a:prstGeom>
-          <a:noFill/>
-        </p:spPr>
-        <p:txBody>
-          <a:bodyPr wrap="square" anchor="t" lIns="0" rIns="0" tIns="0" bIns="0">
-            <a:spAutoFit/>
-          </a:bodyPr>
-          <a:lstStyle/>
-          <a:p>
-            <a:pPr algn="l">
-              <a:lnSpc>
-                <a:spcPct val="110000"/>
-              </a:lnSpc>
-              <a:spcAft>
-                <a:spcPts val="600"/>
-              </a:spcAft>
-            </a:pPr>
-            <a:r>
-              <a:rPr sz="1150" b="0" i="0">
-                <a:solidFill>
-                  <a:srgbClr val="CADCFC"/>
-                </a:solidFill>
-                <a:latin typeface="Calibri"/>
-              </a:rPr>
-              <a:t>recommended robust hub (maximin)</a:t>
-            </a:r>
-          </a:p>
-        </p:txBody>
-      </p:sp>
-      <p:sp>
-        <p:nvSpPr>
-          <p:cNvPr id="6" name="TextBox 5"/>
-          <p:cNvSpPr txBox="1"/>
-          <p:nvPr/>
-        </p:nvSpPr>
-        <p:spPr>
-          <a:xfrm>
-            <a:off x="4709160" y="2651760"/>
-            <a:ext cx="3566160" cy="640080"/>
-          </a:xfrm>
-          <a:prstGeom prst="rect">
-            <a:avLst/>
-          </a:prstGeom>
-          <a:noFill/>
-        </p:spPr>
-        <p:txBody>
-          <a:bodyPr wrap="square" anchor="t" lIns="0" rIns="0" tIns="0" bIns="0">
-            <a:spAutoFit/>
-          </a:bodyPr>
-          <a:lstStyle/>
-          <a:p>
-            <a:pPr algn="l">
-              <a:lnSpc>
-                <a:spcPct val="105000"/>
-              </a:lnSpc>
-              <a:spcAft>
-                <a:spcPts val="600"/>
-              </a:spcAft>
-            </a:pPr>
-            <a:r>
-              <a:rPr sz="1900" b="1" i="0">
-                <a:solidFill>
-                  <a:srgbClr val="F2B705"/>
-                </a:solidFill>
-                <a:latin typeface="Georgia"/>
-              </a:rPr>
-              <a:t>-59%  worst-case cost</a:t>
-            </a:r>
-          </a:p>
-        </p:txBody>
-      </p:sp>
-      <p:sp>
-        <p:nvSpPr>
-          <p:cNvPr id="7" name="TextBox 6"/>
-          <p:cNvSpPr txBox="1"/>
-          <p:nvPr/>
-        </p:nvSpPr>
-        <p:spPr>
-          <a:xfrm>
-            <a:off x="4709160" y="3127248"/>
-            <a:ext cx="3566160" cy="731520"/>
-          </a:xfrm>
-          <a:prstGeom prst="rect">
-            <a:avLst/>
-          </a:prstGeom>
-          <a:noFill/>
-        </p:spPr>
-        <p:txBody>
-          <a:bodyPr wrap="square" anchor="t" lIns="0" rIns="0" tIns="0" bIns="0">
-            <a:spAutoFit/>
-          </a:bodyPr>
-          <a:lstStyle/>
-          <a:p>
-            <a:pPr algn="l">
-              <a:lnSpc>
-                <a:spcPct val="110000"/>
-              </a:lnSpc>
-              <a:spcAft>
-                <a:spcPts val="600"/>
-              </a:spcAft>
-            </a:pPr>
-            <a:r>
-              <a:rPr sz="1150" b="0" i="0">
-                <a:solidFill>
-                  <a:srgbClr val="CADCFC"/>
-                </a:solidFill>
-                <a:latin typeface="Calibri"/>
-              </a:rPr>
-              <a:t>GBP 47,179 -&gt; GBP 19,232 per year</a:t>
-            </a:r>
-          </a:p>
-        </p:txBody>
-      </p:sp>
-      <p:sp>
-        <p:nvSpPr>
-          <p:cNvPr id="8" name="TextBox 7"/>
-          <p:cNvSpPr txBox="1"/>
-          <p:nvPr/>
-        </p:nvSpPr>
-        <p:spPr>
-          <a:xfrm>
-            <a:off x="8549640" y="2651760"/>
-            <a:ext cx="3566160" cy="640080"/>
-          </a:xfrm>
-          <a:prstGeom prst="rect">
-            <a:avLst/>
-          </a:prstGeom>
-          <a:noFill/>
-        </p:spPr>
-        <p:txBody>
-          <a:bodyPr wrap="square" anchor="t" lIns="0" rIns="0" tIns="0" bIns="0">
-            <a:spAutoFit/>
-          </a:bodyPr>
-          <a:lstStyle/>
-          <a:p>
-            <a:pPr algn="l">
-              <a:lnSpc>
-                <a:spcPct val="105000"/>
-              </a:lnSpc>
-              <a:spcAft>
-                <a:spcPts val="600"/>
-              </a:spcAft>
-            </a:pPr>
-            <a:r>
-              <a:rPr sz="1900" b="1" i="0">
-                <a:solidFill>
-                  <a:srgbClr val="F2B705"/>
-                </a:solidFill>
-                <a:latin typeface="Georgia"/>
-              </a:rPr>
-              <a:t>99.6% service</a:t>
-            </a:r>
-          </a:p>
-        </p:txBody>
-      </p:sp>
-      <p:sp>
-        <p:nvSpPr>
-          <p:cNvPr id="9" name="TextBox 8"/>
-          <p:cNvSpPr txBox="1"/>
-          <p:nvPr/>
-        </p:nvSpPr>
-        <p:spPr>
-          <a:xfrm>
-            <a:off x="8549640" y="3127248"/>
-            <a:ext cx="3566160" cy="731520"/>
-          </a:xfrm>
-          <a:prstGeom prst="rect">
-            <a:avLst/>
-          </a:prstGeom>
-          <a:noFill/>
-        </p:spPr>
-        <p:txBody>
-          <a:bodyPr wrap="square" anchor="t" lIns="0" rIns="0" tIns="0" bIns="0">
-            <a:spAutoFit/>
-          </a:bodyPr>
-          <a:lstStyle/>
-          <a:p>
-            <a:pPr algn="l">
-              <a:lnSpc>
-                <a:spcPct val="110000"/>
-              </a:lnSpc>
-              <a:spcAft>
-                <a:spcPts val="600"/>
-              </a:spcAft>
-            </a:pPr>
-            <a:r>
-              <a:rPr sz="1150" b="0" i="0">
-                <a:solidFill>
-                  <a:srgbClr val="CADCFC"/>
-                </a:solidFill>
-                <a:latin typeface="Calibri"/>
-              </a:rPr>
-              <a:t>guaranteed in every one of 15 futures</a:t>
-            </a:r>
-          </a:p>
-        </p:txBody>
-      </p:sp>
-      <p:sp>
-        <p:nvSpPr>
-          <p:cNvPr id="10" name="TextBox 9"/>
-          <p:cNvSpPr txBox="1"/>
-          <p:nvPr/>
-        </p:nvSpPr>
-        <p:spPr>
-          <a:xfrm>
-            <a:off x="868680" y="4297680"/>
-            <a:ext cx="3566160" cy="640080"/>
-          </a:xfrm>
-          <a:prstGeom prst="rect">
-            <a:avLst/>
-          </a:prstGeom>
-          <a:noFill/>
-        </p:spPr>
-        <p:txBody>
-          <a:bodyPr wrap="square" anchor="t" lIns="0" rIns="0" tIns="0" bIns="0">
-            <a:spAutoFit/>
-          </a:bodyPr>
-          <a:lstStyle/>
-          <a:p>
-            <a:pPr algn="l">
-              <a:lnSpc>
-                <a:spcPct val="105000"/>
-              </a:lnSpc>
-              <a:spcAft>
-                <a:spcPts val="600"/>
-              </a:spcAft>
-            </a:pPr>
-            <a:r>
-              <a:rPr sz="1900" b="1" i="0">
-                <a:solidFill>
-                  <a:srgbClr val="F2B705"/>
-                </a:solidFill>
-                <a:latin typeface="Georgia"/>
-              </a:rPr>
-              <a:t>battery only if grid &lt;= 9 kW</a:t>
-            </a:r>
-          </a:p>
-        </p:txBody>
-      </p:sp>
-      <p:sp>
-        <p:nvSpPr>
-          <p:cNvPr id="11" name="TextBox 10"/>
-          <p:cNvSpPr txBox="1"/>
-          <p:nvPr/>
-        </p:nvSpPr>
-        <p:spPr>
-          <a:xfrm>
-            <a:off x="868680" y="4773168"/>
-            <a:ext cx="3566160" cy="731520"/>
-          </a:xfrm>
-          <a:prstGeom prst="rect">
-            <a:avLst/>
-          </a:prstGeom>
-          <a:noFill/>
-        </p:spPr>
-        <p:txBody>
-          <a:bodyPr wrap="square" anchor="t" lIns="0" rIns="0" tIns="0" bIns="0">
-            <a:spAutoFit/>
-          </a:bodyPr>
-          <a:lstStyle/>
-          <a:p>
-            <a:pPr algn="l">
-              <a:lnSpc>
-                <a:spcPct val="110000"/>
-              </a:lnSpc>
-              <a:spcAft>
-                <a:spcPts val="600"/>
-              </a:spcAft>
-            </a:pPr>
-            <a:r>
-              <a:rPr sz="1150" b="0" i="0">
-                <a:solidFill>
-                  <a:srgbClr val="CADCFC"/>
-                </a:solidFill>
-                <a:latin typeface="Calibri"/>
-              </a:rPr>
-              <a:t>the storage boundary, located by sweep</a:t>
-            </a:r>
-          </a:p>
-        </p:txBody>
-      </p:sp>
-      <p:sp>
-        <p:nvSpPr>
-          <p:cNvPr id="12" name="TextBox 11"/>
-          <p:cNvSpPr txBox="1"/>
-          <p:nvPr/>
-        </p:nvSpPr>
-        <p:spPr>
-          <a:xfrm>
-            <a:off x="4709160" y="4297680"/>
-            <a:ext cx="3566160" cy="640080"/>
-          </a:xfrm>
-          <a:prstGeom prst="rect">
-            <a:avLst/>
-          </a:prstGeom>
-          <a:noFill/>
-        </p:spPr>
-        <p:txBody>
-          <a:bodyPr wrap="square" anchor="t" lIns="0" rIns="0" tIns="0" bIns="0">
-            <a:spAutoFit/>
-          </a:bodyPr>
-          <a:lstStyle/>
-          <a:p>
-            <a:pPr algn="l">
-              <a:lnSpc>
-                <a:spcPct val="105000"/>
-              </a:lnSpc>
-              <a:spcAft>
-                <a:spcPts val="600"/>
-              </a:spcAft>
-            </a:pPr>
-            <a:r>
-              <a:rPr sz="1900" b="1" i="0">
-                <a:solidFill>
-                  <a:srgbClr val="F2B705"/>
-                </a:solidFill>
-                <a:latin typeface="Georgia"/>
-              </a:rPr>
-              <a:t>9/9 validated</a:t>
-            </a:r>
-          </a:p>
-        </p:txBody>
-      </p:sp>
-      <p:sp>
-        <p:nvSpPr>
-          <p:cNvPr id="13" name="TextBox 12"/>
-          <p:cNvSpPr txBox="1"/>
-          <p:nvPr/>
-        </p:nvSpPr>
-        <p:spPr>
-          <a:xfrm>
-            <a:off x="4709160" y="4773168"/>
-            <a:ext cx="3566160" cy="731520"/>
-          </a:xfrm>
-          <a:prstGeom prst="rect">
-            <a:avLst/>
-          </a:prstGeom>
-          <a:noFill/>
-        </p:spPr>
-        <p:txBody>
-          <a:bodyPr wrap="square" anchor="t" lIns="0" rIns="0" tIns="0" bIns="0">
-            <a:spAutoFit/>
-          </a:bodyPr>
-          <a:lstStyle/>
-          <a:p>
-            <a:pPr algn="l">
-              <a:lnSpc>
-                <a:spcPct val="110000"/>
-              </a:lnSpc>
-              <a:spcAft>
-                <a:spcPts val="600"/>
-              </a:spcAft>
-            </a:pPr>
-            <a:r>
-              <a:rPr sz="1150" b="0" i="0">
-                <a:solidFill>
-                  <a:srgbClr val="CADCFC"/>
-                </a:solidFill>
-                <a:latin typeface="Calibri"/>
-              </a:rPr>
-              <a:t>outputs &amp; inputs within published ranges</a:t>
-            </a:r>
-          </a:p>
-        </p:txBody>
-      </p:sp>
-      <p:sp>
-        <p:nvSpPr>
-          <p:cNvPr id="14" name="TextBox 13"/>
-          <p:cNvSpPr txBox="1"/>
-          <p:nvPr/>
-        </p:nvSpPr>
-        <p:spPr>
-          <a:xfrm>
-            <a:off x="8549640" y="4297680"/>
-            <a:ext cx="3566160" cy="640080"/>
-          </a:xfrm>
-          <a:prstGeom prst="rect">
-            <a:avLst/>
-          </a:prstGeom>
-          <a:noFill/>
-        </p:spPr>
-        <p:txBody>
-          <a:bodyPr wrap="square" anchor="t" lIns="0" rIns="0" tIns="0" bIns="0">
-            <a:spAutoFit/>
-          </a:bodyPr>
-          <a:lstStyle/>
-          <a:p>
-            <a:pPr algn="l">
-              <a:lnSpc>
-                <a:spcPct val="105000"/>
-              </a:lnSpc>
-              <a:spcAft>
-                <a:spcPts val="600"/>
-              </a:spcAft>
-            </a:pPr>
-            <a:r>
-              <a:rPr sz="1900" b="1" i="0">
-                <a:solidFill>
-                  <a:srgbClr val="F2B705"/>
-                </a:solidFill>
-                <a:latin typeface="Georgia"/>
-              </a:rPr>
-              <a:t>3.7 tCO2/yr avoided</a:t>
-            </a:r>
-          </a:p>
-        </p:txBody>
-      </p:sp>
-      <p:sp>
-        <p:nvSpPr>
-          <p:cNvPr id="15" name="TextBox 14"/>
-          <p:cNvSpPr txBox="1"/>
-          <p:nvPr/>
-        </p:nvSpPr>
-        <p:spPr>
-          <a:xfrm>
-            <a:off x="8549640" y="4773168"/>
-            <a:ext cx="3566160" cy="731520"/>
-          </a:xfrm>
-          <a:prstGeom prst="rect">
-            <a:avLst/>
-          </a:prstGeom>
-          <a:noFill/>
-        </p:spPr>
-        <p:txBody>
-          <a:bodyPr wrap="square" anchor="t" lIns="0" rIns="0" tIns="0" bIns="0">
-            <a:spAutoFit/>
-          </a:bodyPr>
-          <a:lstStyle/>
-          <a:p>
-            <a:pPr algn="l">
-              <a:lnSpc>
-                <a:spcPct val="110000"/>
-              </a:lnSpc>
-              <a:spcAft>
-                <a:spcPts val="600"/>
-              </a:spcAft>
-            </a:pPr>
-            <a:r>
-              <a:rPr sz="1150" b="0" i="0">
-                <a:solidFill>
-                  <a:srgbClr val="CADCFC"/>
-                </a:solidFill>
-                <a:latin typeface="Calibri"/>
-              </a:rPr>
-              <a:t>15% vs grid-only, marginal basis</a:t>
-            </a:r>
-          </a:p>
-        </p:txBody>
-      </p:sp>
-      <p:sp>
-        <p:nvSpPr>
-          <p:cNvPr id="16" name="TextBox 15"/>
-          <p:cNvSpPr txBox="1"/>
-          <p:nvPr/>
-        </p:nvSpPr>
-        <p:spPr>
-          <a:xfrm>
-            <a:off x="868680" y="5943600"/>
-            <a:ext cx="10424160" cy="457200"/>
-          </a:xfrm>
-          <a:prstGeom prst="rect">
-            <a:avLst/>
-          </a:prstGeom>
-          <a:noFill/>
-        </p:spPr>
-        <p:txBody>
-          <a:bodyPr wrap="square" anchor="t" lIns="0" rIns="0" tIns="0" bIns="0">
-            <a:spAutoFit/>
-          </a:bodyPr>
-          <a:lstStyle/>
-          <a:p>
-            <a:pPr algn="l">
-              <a:lnSpc>
-                <a:spcPct val="105000"/>
-              </a:lnSpc>
-              <a:spcAft>
-                <a:spcPts val="600"/>
-              </a:spcAft>
-            </a:pPr>
-            <a:r>
-              <a:rPr sz="1200" b="0" i="0">
-                <a:solidFill>
-                  <a:srgbClr val="FFFFFF"/>
-                </a:solidFill>
-                <a:latin typeface="Calibri"/>
-              </a:rPr>
-              <a:t>Live demo: gourav88502.github.io/emicromobility-robust-charging    -    Code, data &amp; tests: github.com/Gourav88502/emicromobility-robust-charging  (MIT, one-command reproducible)</a:t>
+              <a:t>how much solar, whether a battery is needed, and how many smart bays to install.</a:t>
             </a:r>
           </a:p>
         </p:txBody>

--- a/outputs/Presentation.pptx
+++ b/outputs/Presentation.pptx
@@ -4252,7 +4252,7 @@
                 </a:solidFill>
                 <a:latin typeface="Calibri"/>
               </a:rPr>
-              <a:t>UoW-Bikes Solar Hub Team</a:t>
+              <a:t>Team SolarCycle - Gourav Singh, Neelesh Raj, Priti Burud (Newcastle University)</a:t>
             </a:r>
           </a:p>
         </p:txBody>

--- a/outputs/Presentation.pptx
+++ b/outputs/Presentation.pptx
@@ -5765,7 +5765,7 @@
                 </a:solidFill>
                 <a:latin typeface="Calibri"/>
               </a:rPr>
-              <a:t>50</a:t>
+              <a:t>50.0</a:t>
             </a:r>
           </a:p>
         </p:txBody>
@@ -5807,7 +5807,7 @@
                 </a:solidFill>
                 <a:latin typeface="Calibri"/>
               </a:rPr>
-              <a:t>4</a:t>
+              <a:t>4.0</a:t>
             </a:r>
           </a:p>
         </p:txBody>
@@ -5892,7 +5892,7 @@
                 </a:solidFill>
                 <a:latin typeface="Calibri"/>
               </a:rPr>
-              <a:t>50</a:t>
+              <a:t>50.0</a:t>
             </a:r>
           </a:p>
         </p:txBody>
@@ -5934,7 +5934,7 @@
                 </a:solidFill>
                 <a:latin typeface="Calibri"/>
               </a:rPr>
-              <a:t>6</a:t>
+              <a:t>6.0</a:t>
             </a:r>
           </a:p>
         </p:txBody>
@@ -5947,8 +5947,8 @@
         </p:nvSpPr>
         <p:spPr>
           <a:xfrm>
-            <a:off x="2468880" y="3319272"/>
-            <a:ext cx="566928" cy="841247"/>
+            <a:off x="2468880" y="2057400"/>
+            <a:ext cx="566928" cy="2103120"/>
           </a:xfrm>
           <a:prstGeom prst="roundRect">
             <a:avLst/>
@@ -5990,7 +5990,7 @@
         </p:nvSpPr>
         <p:spPr>
           <a:xfrm>
-            <a:off x="2395728" y="3008376"/>
+            <a:off x="2395728" y="1746504"/>
             <a:ext cx="749808" cy="274320"/>
           </a:xfrm>
           <a:prstGeom prst="rect">
@@ -6019,7 +6019,7 @@
                 </a:solidFill>
                 <a:latin typeface="Calibri"/>
               </a:rPr>
-              <a:t>20</a:t>
+              <a:t>50.0</a:t>
             </a:r>
           </a:p>
         </p:txBody>
@@ -6061,7 +6061,7 @@
                 </a:solidFill>
                 <a:latin typeface="Calibri"/>
               </a:rPr>
-              <a:t>8</a:t>
+              <a:t>8.0</a:t>
             </a:r>
           </a:p>
         </p:txBody>
@@ -6146,7 +6146,7 @@
                 </a:solidFill>
                 <a:latin typeface="Calibri"/>
               </a:rPr>
-              <a:t>10</a:t>
+              <a:t>10.0</a:t>
             </a:r>
           </a:p>
         </p:txBody>
@@ -6231,7 +6231,7 @@
                 </a:solidFill>
                 <a:latin typeface="Calibri"/>
               </a:rPr>
-              <a:t>12</a:t>
+              <a:t>12.0</a:t>
             </a:r>
           </a:p>
         </p:txBody>
@@ -6316,7 +6316,7 @@
                 </a:solidFill>
                 <a:latin typeface="Calibri"/>
               </a:rPr>
-              <a:t>15</a:t>
+              <a:t>15.0</a:t>
             </a:r>
           </a:p>
         </p:txBody>
@@ -6401,7 +6401,7 @@
                 </a:solidFill>
                 <a:latin typeface="Calibri"/>
               </a:rPr>
-              <a:t>18</a:t>
+              <a:t>18.0</a:t>
             </a:r>
           </a:p>
         </p:txBody>
@@ -6486,7 +6486,7 @@
                 </a:solidFill>
                 <a:latin typeface="Calibri"/>
               </a:rPr>
-              <a:t>20</a:t>
+              <a:t>20.0</a:t>
             </a:r>
           </a:p>
         </p:txBody>
